--- a/backend/templates/pptx/dark_executive.pptx
+++ b/backend/templates/pptx/dark_executive.pptx
@@ -1710,7 +1710,7 @@
               <a:buNone/>
             </a:pPr>
             <a:r>
-              <a:rPr lang="en-US" sz="4400" b="1" dirty="0">
+              <a:rPr lang="en-US" sz="4000" b="1" dirty="0">
                 <a:solidFill>
                   <a:srgbClr val="F8FAFC"/>
                 </a:solidFill>
@@ -1720,7 +1720,7 @@
               </a:rPr>
               <a:t>{{client_name}}</a:t>
             </a:r>
-            <a:endParaRPr lang="en-US" sz="4400" dirty="0"/>
+            <a:endParaRPr lang="en-US" sz="4000" dirty="0"/>
           </a:p>
         </p:txBody>
       </p:sp>
@@ -1749,7 +1749,7 @@
               <a:buNone/>
             </a:pPr>
             <a:r>
-              <a:rPr lang="en-US" sz="1600" dirty="0">
+              <a:rPr lang="en-US" sz="1400" dirty="0">
                 <a:solidFill>
                   <a:srgbClr val="CBD5E1"/>
                 </a:solidFill>
@@ -1759,7 +1759,7 @@
               </a:rPr>
               <a:t>{{report_period}}</a:t>
             </a:r>
-            <a:endParaRPr lang="en-US" sz="1600" dirty="0"/>
+            <a:endParaRPr lang="en-US" sz="1400" dirty="0"/>
           </a:p>
         </p:txBody>
       </p:sp>
@@ -2046,7 +2046,7 @@
               <a:buNone/>
             </a:pPr>
             <a:r>
-              <a:rPr lang="en-US" sz="1300" dirty="0">
+              <a:rPr lang="en-US" sz="1200" dirty="0">
                 <a:solidFill>
                   <a:srgbClr val="CBD5E1"/>
                 </a:solidFill>
@@ -2056,7 +2056,7 @@
               </a:rPr>
               <a:t>{{executive_summary}}</a:t>
             </a:r>
-            <a:endParaRPr lang="en-US" sz="1300" dirty="0"/>
+            <a:endParaRPr lang="en-US" sz="1200" dirty="0"/>
           </a:p>
         </p:txBody>
       </p:sp>
@@ -2321,7 +2321,7 @@
               <a:buNone/>
             </a:pPr>
             <a:r>
-              <a:rPr lang="en-US" sz="3000" b="1" dirty="0">
+              <a:rPr lang="en-US" sz="3200" b="1" dirty="0">
                 <a:solidFill>
                   <a:srgbClr val="F8FAFC"/>
                 </a:solidFill>
@@ -2331,7 +2331,7 @@
               </a:rPr>
               <a:t>{{kpi_0_value}}</a:t>
             </a:r>
-            <a:endParaRPr lang="en-US" sz="3000" dirty="0"/>
+            <a:endParaRPr lang="en-US" sz="3200" dirty="0"/>
           </a:p>
         </p:txBody>
       </p:sp>
@@ -2485,7 +2485,7 @@
               <a:buNone/>
             </a:pPr>
             <a:r>
-              <a:rPr lang="en-US" sz="3000" b="1" dirty="0">
+              <a:rPr lang="en-US" sz="3200" b="1" dirty="0">
                 <a:solidFill>
                   <a:srgbClr val="F8FAFC"/>
                 </a:solidFill>
@@ -2495,7 +2495,7 @@
               </a:rPr>
               <a:t>{{kpi_1_value}}</a:t>
             </a:r>
-            <a:endParaRPr lang="en-US" sz="3000" dirty="0"/>
+            <a:endParaRPr lang="en-US" sz="3200" dirty="0"/>
           </a:p>
         </p:txBody>
       </p:sp>
@@ -2649,7 +2649,7 @@
               <a:buNone/>
             </a:pPr>
             <a:r>
-              <a:rPr lang="en-US" sz="3000" b="1" dirty="0">
+              <a:rPr lang="en-US" sz="3200" b="1" dirty="0">
                 <a:solidFill>
                   <a:srgbClr val="F8FAFC"/>
                 </a:solidFill>
@@ -2659,7 +2659,7 @@
               </a:rPr>
               <a:t>{{kpi_2_value}}</a:t>
             </a:r>
-            <a:endParaRPr lang="en-US" sz="3000" dirty="0"/>
+            <a:endParaRPr lang="en-US" sz="3200" dirty="0"/>
           </a:p>
         </p:txBody>
       </p:sp>
@@ -2813,7 +2813,7 @@
               <a:buNone/>
             </a:pPr>
             <a:r>
-              <a:rPr lang="en-US" sz="3000" b="1" dirty="0">
+              <a:rPr lang="en-US" sz="3200" b="1" dirty="0">
                 <a:solidFill>
                   <a:srgbClr val="F8FAFC"/>
                 </a:solidFill>
@@ -2823,7 +2823,7 @@
               </a:rPr>
               <a:t>{{kpi_3_value}}</a:t>
             </a:r>
-            <a:endParaRPr lang="en-US" sz="3000" dirty="0"/>
+            <a:endParaRPr lang="en-US" sz="3200" dirty="0"/>
           </a:p>
         </p:txBody>
       </p:sp>
@@ -2977,7 +2977,7 @@
               <a:buNone/>
             </a:pPr>
             <a:r>
-              <a:rPr lang="en-US" sz="3000" b="1" dirty="0">
+              <a:rPr lang="en-US" sz="3200" b="1" dirty="0">
                 <a:solidFill>
                   <a:srgbClr val="F8FAFC"/>
                 </a:solidFill>
@@ -2987,7 +2987,7 @@
               </a:rPr>
               <a:t>{{kpi_4_value}}</a:t>
             </a:r>
-            <a:endParaRPr lang="en-US" sz="3000" dirty="0"/>
+            <a:endParaRPr lang="en-US" sz="3200" dirty="0"/>
           </a:p>
         </p:txBody>
       </p:sp>
@@ -3141,7 +3141,7 @@
               <a:buNone/>
             </a:pPr>
             <a:r>
-              <a:rPr lang="en-US" sz="3000" b="1" dirty="0">
+              <a:rPr lang="en-US" sz="3200" b="1" dirty="0">
                 <a:solidFill>
                   <a:srgbClr val="F8FAFC"/>
                 </a:solidFill>
@@ -3151,7 +3151,7 @@
               </a:rPr>
               <a:t>{{kpi_5_value}}</a:t>
             </a:r>
-            <a:endParaRPr lang="en-US" sz="3000" dirty="0"/>
+            <a:endParaRPr lang="en-US" sz="3200" dirty="0"/>
           </a:p>
         </p:txBody>
       </p:sp>
@@ -4047,7 +4047,7 @@
               <a:buNone/>
             </a:pPr>
             <a:r>
-              <a:rPr lang="en-US" sz="1300" dirty="0">
+              <a:rPr lang="en-US" sz="1200" dirty="0">
                 <a:solidFill>
                   <a:srgbClr val="CBD5E1"/>
                 </a:solidFill>
@@ -4057,7 +4057,7 @@
               </a:rPr>
               <a:t>{{key_wins}}</a:t>
             </a:r>
-            <a:endParaRPr lang="en-US" sz="1300" dirty="0"/>
+            <a:endParaRPr lang="en-US" sz="1200" dirty="0"/>
           </a:p>
         </p:txBody>
       </p:sp>
@@ -4266,7 +4266,7 @@
               <a:buNone/>
             </a:pPr>
             <a:r>
-              <a:rPr lang="en-US" sz="1300" dirty="0">
+              <a:rPr lang="en-US" sz="1200" dirty="0">
                 <a:solidFill>
                   <a:srgbClr val="CBD5E1"/>
                 </a:solidFill>
@@ -4276,7 +4276,7 @@
               </a:rPr>
               <a:t>{{concerns}}</a:t>
             </a:r>
-            <a:endParaRPr lang="en-US" sz="1300" dirty="0"/>
+            <a:endParaRPr lang="en-US" sz="1200" dirty="0"/>
           </a:p>
         </p:txBody>
       </p:sp>
@@ -4485,7 +4485,7 @@
               <a:buNone/>
             </a:pPr>
             <a:r>
-              <a:rPr lang="en-US" sz="1300" dirty="0">
+              <a:rPr lang="en-US" sz="1200" dirty="0">
                 <a:solidFill>
                   <a:srgbClr val="CBD5E1"/>
                 </a:solidFill>
@@ -4495,7 +4495,7 @@
               </a:rPr>
               <a:t>{{next_steps}}</a:t>
             </a:r>
-            <a:endParaRPr lang="en-US" sz="1300" dirty="0"/>
+            <a:endParaRPr lang="en-US" sz="1200" dirty="0"/>
           </a:p>
         </p:txBody>
       </p:sp>
@@ -4743,7 +4743,7 @@
               <a:buNone/>
             </a:pPr>
             <a:r>
-              <a:rPr lang="en-US" sz="1300" dirty="0">
+              <a:rPr lang="en-US" sz="1200" dirty="0">
                 <a:solidFill>
                   <a:srgbClr val="CBD5E1"/>
                 </a:solidFill>
@@ -4753,7 +4753,7 @@
               </a:rPr>
               <a:t>{{custom_section_text}}</a:t>
             </a:r>
-            <a:endParaRPr lang="en-US" sz="1300" dirty="0"/>
+            <a:endParaRPr lang="en-US" sz="1200" dirty="0"/>
           </a:p>
         </p:txBody>
       </p:sp>

--- a/backend/templates/pptx/dark_executive.pptx
+++ b/backend/templates/pptx/dark_executive.pptx
@@ -14,9 +14,19 @@
     <p:sldId id="262" r:id="rId8"/>
     <p:sldId id="263" r:id="rId9"/>
     <p:sldId id="264" r:id="rId10"/>
+    <p:sldId id="265" r:id="rId11"/>
+    <p:sldId id="266" r:id="rId12"/>
+    <p:sldId id="267" r:id="rId13"/>
+    <p:sldId id="268" r:id="rId14"/>
+    <p:sldId id="269" r:id="rId15"/>
+    <p:sldId id="270" r:id="rId16"/>
+    <p:sldId id="271" r:id="rId17"/>
+    <p:sldId id="272" r:id="rId18"/>
+    <p:sldId id="273" r:id="rId19"/>
+    <p:sldId id="274" r:id="rId20"/>
   </p:sldIdLst>
   <p:notesMasterIdLst>
-    <p:notesMasterId r:id="rId11"/>
+    <p:notesMasterId r:id="rId21"/>
   </p:notesMasterIdLst>
   <p:sldSz cx="12192000" cy="6858000"/>
   <p:notesSz cx="6858000" cy="12192000"/>
@@ -552,6 +562,886 @@
 </p:notes>
 </file>
 
+<file path=ppt/notesSlides/notesSlide10.xml><?xml version="1.0" encoding="utf-8"?>
+<p:notes xmlns:a="http://schemas.openxmlformats.org/drawingml/2006/main" xmlns:r="http://schemas.openxmlformats.org/officeDocument/2006/relationships" xmlns:p="http://schemas.openxmlformats.org/presentationml/2006/main">
+  <p:cSld>
+    <p:spTree>
+      <p:nvGrpSpPr>
+        <p:cNvPr id="1" name=""/>
+        <p:cNvGrpSpPr/>
+        <p:nvPr/>
+      </p:nvGrpSpPr>
+      <p:grpSpPr>
+        <a:xfrm>
+          <a:off x="0" y="0"/>
+          <a:ext cx="0" cy="0"/>
+          <a:chOff x="0" y="0"/>
+          <a:chExt cx="0" cy="0"/>
+        </a:xfrm>
+      </p:grpSpPr>
+      <p:sp>
+        <p:nvSpPr>
+          <p:cNvPr id="2" name="Slide Image Placeholder 1"/>
+          <p:cNvSpPr>
+            <a:spLocks noGrp="1" noRot="1" noChangeAspect="1"/>
+          </p:cNvSpPr>
+          <p:nvPr>
+            <p:ph type="sldImg"/>
+          </p:nvPr>
+        </p:nvSpPr>
+        <p:spPr/>
+      </p:sp>
+      <p:sp>
+        <p:nvSpPr>
+          <p:cNvPr id="3" name="Notes Placeholder 2"/>
+          <p:cNvSpPr>
+            <a:spLocks noGrp="1"/>
+          </p:cNvSpPr>
+          <p:nvPr>
+            <p:ph type="body" idx="1"/>
+          </p:nvPr>
+        </p:nvSpPr>
+        <p:spPr/>
+        <p:txBody>
+          <a:bodyPr/>
+          <a:lstStyle/>
+          <a:p>
+            <a:r>
+              <a:rPr lang="en-US" dirty="0"/>
+              <a:t/>
+            </a:r>
+            <a:endParaRPr lang="en-US" dirty="0"/>
+          </a:p>
+        </p:txBody>
+      </p:sp>
+      <p:sp>
+        <p:nvSpPr>
+          <p:cNvPr id="4" name="Slide Number Placeholder 3"/>
+          <p:cNvSpPr>
+            <a:spLocks noGrp="1"/>
+          </p:cNvSpPr>
+          <p:nvPr>
+            <p:ph type="sldNum" sz="quarter" idx="10"/>
+          </p:nvPr>
+        </p:nvSpPr>
+        <p:spPr/>
+        <p:txBody>
+          <a:bodyPr/>
+          <a:lstStyle/>
+          <a:p>
+            <a:fld id="{F7021451-1387-4CA6-816F-3879F97B5CBC}" type="slidenum">
+              <a:rPr lang="en-US"/>
+              <a:t>10</a:t>
+            </a:fld>
+            <a:endParaRPr lang="en-US"/>
+          </a:p>
+        </p:txBody>
+      </p:sp>
+    </p:spTree>
+    <p:extLst>
+      <p:ext uri="{BB962C8B-B14F-4D97-AF65-F5344CB8AC3E}">
+        <p14:creationId xmlns:p14="http://schemas.microsoft.com/office/powerpoint/2010/main" val="1024086991"/>
+      </p:ext>
+    </p:extLst>
+  </p:cSld>
+  <p:clrMapOvr>
+    <a:masterClrMapping/>
+  </p:clrMapOvr>
+</p:notes>
+</file>
+
+<file path=ppt/notesSlides/notesSlide11.xml><?xml version="1.0" encoding="utf-8"?>
+<p:notes xmlns:a="http://schemas.openxmlformats.org/drawingml/2006/main" xmlns:r="http://schemas.openxmlformats.org/officeDocument/2006/relationships" xmlns:p="http://schemas.openxmlformats.org/presentationml/2006/main">
+  <p:cSld>
+    <p:spTree>
+      <p:nvGrpSpPr>
+        <p:cNvPr id="1" name=""/>
+        <p:cNvGrpSpPr/>
+        <p:nvPr/>
+      </p:nvGrpSpPr>
+      <p:grpSpPr>
+        <a:xfrm>
+          <a:off x="0" y="0"/>
+          <a:ext cx="0" cy="0"/>
+          <a:chOff x="0" y="0"/>
+          <a:chExt cx="0" cy="0"/>
+        </a:xfrm>
+      </p:grpSpPr>
+      <p:sp>
+        <p:nvSpPr>
+          <p:cNvPr id="2" name="Slide Image Placeholder 1"/>
+          <p:cNvSpPr>
+            <a:spLocks noGrp="1" noRot="1" noChangeAspect="1"/>
+          </p:cNvSpPr>
+          <p:nvPr>
+            <p:ph type="sldImg"/>
+          </p:nvPr>
+        </p:nvSpPr>
+        <p:spPr/>
+      </p:sp>
+      <p:sp>
+        <p:nvSpPr>
+          <p:cNvPr id="3" name="Notes Placeholder 2"/>
+          <p:cNvSpPr>
+            <a:spLocks noGrp="1"/>
+          </p:cNvSpPr>
+          <p:nvPr>
+            <p:ph type="body" idx="1"/>
+          </p:nvPr>
+        </p:nvSpPr>
+        <p:spPr/>
+        <p:txBody>
+          <a:bodyPr/>
+          <a:lstStyle/>
+          <a:p>
+            <a:r>
+              <a:rPr lang="en-US" dirty="0"/>
+              <a:t/>
+            </a:r>
+            <a:endParaRPr lang="en-US" dirty="0"/>
+          </a:p>
+        </p:txBody>
+      </p:sp>
+      <p:sp>
+        <p:nvSpPr>
+          <p:cNvPr id="4" name="Slide Number Placeholder 3"/>
+          <p:cNvSpPr>
+            <a:spLocks noGrp="1"/>
+          </p:cNvSpPr>
+          <p:nvPr>
+            <p:ph type="sldNum" sz="quarter" idx="10"/>
+          </p:nvPr>
+        </p:nvSpPr>
+        <p:spPr/>
+        <p:txBody>
+          <a:bodyPr/>
+          <a:lstStyle/>
+          <a:p>
+            <a:fld id="{F7021451-1387-4CA6-816F-3879F97B5CBC}" type="slidenum">
+              <a:rPr lang="en-US"/>
+              <a:t>11</a:t>
+            </a:fld>
+            <a:endParaRPr lang="en-US"/>
+          </a:p>
+        </p:txBody>
+      </p:sp>
+    </p:spTree>
+    <p:extLst>
+      <p:ext uri="{BB962C8B-B14F-4D97-AF65-F5344CB8AC3E}">
+        <p14:creationId xmlns:p14="http://schemas.microsoft.com/office/powerpoint/2010/main" val="1024086991"/>
+      </p:ext>
+    </p:extLst>
+  </p:cSld>
+  <p:clrMapOvr>
+    <a:masterClrMapping/>
+  </p:clrMapOvr>
+</p:notes>
+</file>
+
+<file path=ppt/notesSlides/notesSlide12.xml><?xml version="1.0" encoding="utf-8"?>
+<p:notes xmlns:a="http://schemas.openxmlformats.org/drawingml/2006/main" xmlns:r="http://schemas.openxmlformats.org/officeDocument/2006/relationships" xmlns:p="http://schemas.openxmlformats.org/presentationml/2006/main">
+  <p:cSld>
+    <p:spTree>
+      <p:nvGrpSpPr>
+        <p:cNvPr id="1" name=""/>
+        <p:cNvGrpSpPr/>
+        <p:nvPr/>
+      </p:nvGrpSpPr>
+      <p:grpSpPr>
+        <a:xfrm>
+          <a:off x="0" y="0"/>
+          <a:ext cx="0" cy="0"/>
+          <a:chOff x="0" y="0"/>
+          <a:chExt cx="0" cy="0"/>
+        </a:xfrm>
+      </p:grpSpPr>
+      <p:sp>
+        <p:nvSpPr>
+          <p:cNvPr id="2" name="Slide Image Placeholder 1"/>
+          <p:cNvSpPr>
+            <a:spLocks noGrp="1" noRot="1" noChangeAspect="1"/>
+          </p:cNvSpPr>
+          <p:nvPr>
+            <p:ph type="sldImg"/>
+          </p:nvPr>
+        </p:nvSpPr>
+        <p:spPr/>
+      </p:sp>
+      <p:sp>
+        <p:nvSpPr>
+          <p:cNvPr id="3" name="Notes Placeholder 2"/>
+          <p:cNvSpPr>
+            <a:spLocks noGrp="1"/>
+          </p:cNvSpPr>
+          <p:nvPr>
+            <p:ph type="body" idx="1"/>
+          </p:nvPr>
+        </p:nvSpPr>
+        <p:spPr/>
+        <p:txBody>
+          <a:bodyPr/>
+          <a:lstStyle/>
+          <a:p>
+            <a:r>
+              <a:rPr lang="en-US" dirty="0"/>
+              <a:t/>
+            </a:r>
+            <a:endParaRPr lang="en-US" dirty="0"/>
+          </a:p>
+        </p:txBody>
+      </p:sp>
+      <p:sp>
+        <p:nvSpPr>
+          <p:cNvPr id="4" name="Slide Number Placeholder 3"/>
+          <p:cNvSpPr>
+            <a:spLocks noGrp="1"/>
+          </p:cNvSpPr>
+          <p:nvPr>
+            <p:ph type="sldNum" sz="quarter" idx="10"/>
+          </p:nvPr>
+        </p:nvSpPr>
+        <p:spPr/>
+        <p:txBody>
+          <a:bodyPr/>
+          <a:lstStyle/>
+          <a:p>
+            <a:fld id="{F7021451-1387-4CA6-816F-3879F97B5CBC}" type="slidenum">
+              <a:rPr lang="en-US"/>
+              <a:t>12</a:t>
+            </a:fld>
+            <a:endParaRPr lang="en-US"/>
+          </a:p>
+        </p:txBody>
+      </p:sp>
+    </p:spTree>
+    <p:extLst>
+      <p:ext uri="{BB962C8B-B14F-4D97-AF65-F5344CB8AC3E}">
+        <p14:creationId xmlns:p14="http://schemas.microsoft.com/office/powerpoint/2010/main" val="1024086991"/>
+      </p:ext>
+    </p:extLst>
+  </p:cSld>
+  <p:clrMapOvr>
+    <a:masterClrMapping/>
+  </p:clrMapOvr>
+</p:notes>
+</file>
+
+<file path=ppt/notesSlides/notesSlide13.xml><?xml version="1.0" encoding="utf-8"?>
+<p:notes xmlns:a="http://schemas.openxmlformats.org/drawingml/2006/main" xmlns:r="http://schemas.openxmlformats.org/officeDocument/2006/relationships" xmlns:p="http://schemas.openxmlformats.org/presentationml/2006/main">
+  <p:cSld>
+    <p:spTree>
+      <p:nvGrpSpPr>
+        <p:cNvPr id="1" name=""/>
+        <p:cNvGrpSpPr/>
+        <p:nvPr/>
+      </p:nvGrpSpPr>
+      <p:grpSpPr>
+        <a:xfrm>
+          <a:off x="0" y="0"/>
+          <a:ext cx="0" cy="0"/>
+          <a:chOff x="0" y="0"/>
+          <a:chExt cx="0" cy="0"/>
+        </a:xfrm>
+      </p:grpSpPr>
+      <p:sp>
+        <p:nvSpPr>
+          <p:cNvPr id="2" name="Slide Image Placeholder 1"/>
+          <p:cNvSpPr>
+            <a:spLocks noGrp="1" noRot="1" noChangeAspect="1"/>
+          </p:cNvSpPr>
+          <p:nvPr>
+            <p:ph type="sldImg"/>
+          </p:nvPr>
+        </p:nvSpPr>
+        <p:spPr/>
+      </p:sp>
+      <p:sp>
+        <p:nvSpPr>
+          <p:cNvPr id="3" name="Notes Placeholder 2"/>
+          <p:cNvSpPr>
+            <a:spLocks noGrp="1"/>
+          </p:cNvSpPr>
+          <p:nvPr>
+            <p:ph type="body" idx="1"/>
+          </p:nvPr>
+        </p:nvSpPr>
+        <p:spPr/>
+        <p:txBody>
+          <a:bodyPr/>
+          <a:lstStyle/>
+          <a:p>
+            <a:r>
+              <a:rPr lang="en-US" dirty="0"/>
+              <a:t/>
+            </a:r>
+            <a:endParaRPr lang="en-US" dirty="0"/>
+          </a:p>
+        </p:txBody>
+      </p:sp>
+      <p:sp>
+        <p:nvSpPr>
+          <p:cNvPr id="4" name="Slide Number Placeholder 3"/>
+          <p:cNvSpPr>
+            <a:spLocks noGrp="1"/>
+          </p:cNvSpPr>
+          <p:nvPr>
+            <p:ph type="sldNum" sz="quarter" idx="10"/>
+          </p:nvPr>
+        </p:nvSpPr>
+        <p:spPr/>
+        <p:txBody>
+          <a:bodyPr/>
+          <a:lstStyle/>
+          <a:p>
+            <a:fld id="{F7021451-1387-4CA6-816F-3879F97B5CBC}" type="slidenum">
+              <a:rPr lang="en-US"/>
+              <a:t>13</a:t>
+            </a:fld>
+            <a:endParaRPr lang="en-US"/>
+          </a:p>
+        </p:txBody>
+      </p:sp>
+    </p:spTree>
+    <p:extLst>
+      <p:ext uri="{BB962C8B-B14F-4D97-AF65-F5344CB8AC3E}">
+        <p14:creationId xmlns:p14="http://schemas.microsoft.com/office/powerpoint/2010/main" val="1024086991"/>
+      </p:ext>
+    </p:extLst>
+  </p:cSld>
+  <p:clrMapOvr>
+    <a:masterClrMapping/>
+  </p:clrMapOvr>
+</p:notes>
+</file>
+
+<file path=ppt/notesSlides/notesSlide14.xml><?xml version="1.0" encoding="utf-8"?>
+<p:notes xmlns:a="http://schemas.openxmlformats.org/drawingml/2006/main" xmlns:r="http://schemas.openxmlformats.org/officeDocument/2006/relationships" xmlns:p="http://schemas.openxmlformats.org/presentationml/2006/main">
+  <p:cSld>
+    <p:spTree>
+      <p:nvGrpSpPr>
+        <p:cNvPr id="1" name=""/>
+        <p:cNvGrpSpPr/>
+        <p:nvPr/>
+      </p:nvGrpSpPr>
+      <p:grpSpPr>
+        <a:xfrm>
+          <a:off x="0" y="0"/>
+          <a:ext cx="0" cy="0"/>
+          <a:chOff x="0" y="0"/>
+          <a:chExt cx="0" cy="0"/>
+        </a:xfrm>
+      </p:grpSpPr>
+      <p:sp>
+        <p:nvSpPr>
+          <p:cNvPr id="2" name="Slide Image Placeholder 1"/>
+          <p:cNvSpPr>
+            <a:spLocks noGrp="1" noRot="1" noChangeAspect="1"/>
+          </p:cNvSpPr>
+          <p:nvPr>
+            <p:ph type="sldImg"/>
+          </p:nvPr>
+        </p:nvSpPr>
+        <p:spPr/>
+      </p:sp>
+      <p:sp>
+        <p:nvSpPr>
+          <p:cNvPr id="3" name="Notes Placeholder 2"/>
+          <p:cNvSpPr>
+            <a:spLocks noGrp="1"/>
+          </p:cNvSpPr>
+          <p:nvPr>
+            <p:ph type="body" idx="1"/>
+          </p:nvPr>
+        </p:nvSpPr>
+        <p:spPr/>
+        <p:txBody>
+          <a:bodyPr/>
+          <a:lstStyle/>
+          <a:p>
+            <a:r>
+              <a:rPr lang="en-US" dirty="0"/>
+              <a:t/>
+            </a:r>
+            <a:endParaRPr lang="en-US" dirty="0"/>
+          </a:p>
+        </p:txBody>
+      </p:sp>
+      <p:sp>
+        <p:nvSpPr>
+          <p:cNvPr id="4" name="Slide Number Placeholder 3"/>
+          <p:cNvSpPr>
+            <a:spLocks noGrp="1"/>
+          </p:cNvSpPr>
+          <p:nvPr>
+            <p:ph type="sldNum" sz="quarter" idx="10"/>
+          </p:nvPr>
+        </p:nvSpPr>
+        <p:spPr/>
+        <p:txBody>
+          <a:bodyPr/>
+          <a:lstStyle/>
+          <a:p>
+            <a:fld id="{F7021451-1387-4CA6-816F-3879F97B5CBC}" type="slidenum">
+              <a:rPr lang="en-US"/>
+              <a:t>14</a:t>
+            </a:fld>
+            <a:endParaRPr lang="en-US"/>
+          </a:p>
+        </p:txBody>
+      </p:sp>
+    </p:spTree>
+    <p:extLst>
+      <p:ext uri="{BB962C8B-B14F-4D97-AF65-F5344CB8AC3E}">
+        <p14:creationId xmlns:p14="http://schemas.microsoft.com/office/powerpoint/2010/main" val="1024086991"/>
+      </p:ext>
+    </p:extLst>
+  </p:cSld>
+  <p:clrMapOvr>
+    <a:masterClrMapping/>
+  </p:clrMapOvr>
+</p:notes>
+</file>
+
+<file path=ppt/notesSlides/notesSlide15.xml><?xml version="1.0" encoding="utf-8"?>
+<p:notes xmlns:a="http://schemas.openxmlformats.org/drawingml/2006/main" xmlns:r="http://schemas.openxmlformats.org/officeDocument/2006/relationships" xmlns:p="http://schemas.openxmlformats.org/presentationml/2006/main">
+  <p:cSld>
+    <p:spTree>
+      <p:nvGrpSpPr>
+        <p:cNvPr id="1" name=""/>
+        <p:cNvGrpSpPr/>
+        <p:nvPr/>
+      </p:nvGrpSpPr>
+      <p:grpSpPr>
+        <a:xfrm>
+          <a:off x="0" y="0"/>
+          <a:ext cx="0" cy="0"/>
+          <a:chOff x="0" y="0"/>
+          <a:chExt cx="0" cy="0"/>
+        </a:xfrm>
+      </p:grpSpPr>
+      <p:sp>
+        <p:nvSpPr>
+          <p:cNvPr id="2" name="Slide Image Placeholder 1"/>
+          <p:cNvSpPr>
+            <a:spLocks noGrp="1" noRot="1" noChangeAspect="1"/>
+          </p:cNvSpPr>
+          <p:nvPr>
+            <p:ph type="sldImg"/>
+          </p:nvPr>
+        </p:nvSpPr>
+        <p:spPr/>
+      </p:sp>
+      <p:sp>
+        <p:nvSpPr>
+          <p:cNvPr id="3" name="Notes Placeholder 2"/>
+          <p:cNvSpPr>
+            <a:spLocks noGrp="1"/>
+          </p:cNvSpPr>
+          <p:nvPr>
+            <p:ph type="body" idx="1"/>
+          </p:nvPr>
+        </p:nvSpPr>
+        <p:spPr/>
+        <p:txBody>
+          <a:bodyPr/>
+          <a:lstStyle/>
+          <a:p>
+            <a:r>
+              <a:rPr lang="en-US" dirty="0"/>
+              <a:t/>
+            </a:r>
+            <a:endParaRPr lang="en-US" dirty="0"/>
+          </a:p>
+        </p:txBody>
+      </p:sp>
+      <p:sp>
+        <p:nvSpPr>
+          <p:cNvPr id="4" name="Slide Number Placeholder 3"/>
+          <p:cNvSpPr>
+            <a:spLocks noGrp="1"/>
+          </p:cNvSpPr>
+          <p:nvPr>
+            <p:ph type="sldNum" sz="quarter" idx="10"/>
+          </p:nvPr>
+        </p:nvSpPr>
+        <p:spPr/>
+        <p:txBody>
+          <a:bodyPr/>
+          <a:lstStyle/>
+          <a:p>
+            <a:fld id="{F7021451-1387-4CA6-816F-3879F97B5CBC}" type="slidenum">
+              <a:rPr lang="en-US"/>
+              <a:t>15</a:t>
+            </a:fld>
+            <a:endParaRPr lang="en-US"/>
+          </a:p>
+        </p:txBody>
+      </p:sp>
+    </p:spTree>
+    <p:extLst>
+      <p:ext uri="{BB962C8B-B14F-4D97-AF65-F5344CB8AC3E}">
+        <p14:creationId xmlns:p14="http://schemas.microsoft.com/office/powerpoint/2010/main" val="1024086991"/>
+      </p:ext>
+    </p:extLst>
+  </p:cSld>
+  <p:clrMapOvr>
+    <a:masterClrMapping/>
+  </p:clrMapOvr>
+</p:notes>
+</file>
+
+<file path=ppt/notesSlides/notesSlide16.xml><?xml version="1.0" encoding="utf-8"?>
+<p:notes xmlns:a="http://schemas.openxmlformats.org/drawingml/2006/main" xmlns:r="http://schemas.openxmlformats.org/officeDocument/2006/relationships" xmlns:p="http://schemas.openxmlformats.org/presentationml/2006/main">
+  <p:cSld>
+    <p:spTree>
+      <p:nvGrpSpPr>
+        <p:cNvPr id="1" name=""/>
+        <p:cNvGrpSpPr/>
+        <p:nvPr/>
+      </p:nvGrpSpPr>
+      <p:grpSpPr>
+        <a:xfrm>
+          <a:off x="0" y="0"/>
+          <a:ext cx="0" cy="0"/>
+          <a:chOff x="0" y="0"/>
+          <a:chExt cx="0" cy="0"/>
+        </a:xfrm>
+      </p:grpSpPr>
+      <p:sp>
+        <p:nvSpPr>
+          <p:cNvPr id="2" name="Slide Image Placeholder 1"/>
+          <p:cNvSpPr>
+            <a:spLocks noGrp="1" noRot="1" noChangeAspect="1"/>
+          </p:cNvSpPr>
+          <p:nvPr>
+            <p:ph type="sldImg"/>
+          </p:nvPr>
+        </p:nvSpPr>
+        <p:spPr/>
+      </p:sp>
+      <p:sp>
+        <p:nvSpPr>
+          <p:cNvPr id="3" name="Notes Placeholder 2"/>
+          <p:cNvSpPr>
+            <a:spLocks noGrp="1"/>
+          </p:cNvSpPr>
+          <p:nvPr>
+            <p:ph type="body" idx="1"/>
+          </p:nvPr>
+        </p:nvSpPr>
+        <p:spPr/>
+        <p:txBody>
+          <a:bodyPr/>
+          <a:lstStyle/>
+          <a:p>
+            <a:r>
+              <a:rPr lang="en-US" dirty="0"/>
+              <a:t/>
+            </a:r>
+            <a:endParaRPr lang="en-US" dirty="0"/>
+          </a:p>
+        </p:txBody>
+      </p:sp>
+      <p:sp>
+        <p:nvSpPr>
+          <p:cNvPr id="4" name="Slide Number Placeholder 3"/>
+          <p:cNvSpPr>
+            <a:spLocks noGrp="1"/>
+          </p:cNvSpPr>
+          <p:nvPr>
+            <p:ph type="sldNum" sz="quarter" idx="10"/>
+          </p:nvPr>
+        </p:nvSpPr>
+        <p:spPr/>
+        <p:txBody>
+          <a:bodyPr/>
+          <a:lstStyle/>
+          <a:p>
+            <a:fld id="{F7021451-1387-4CA6-816F-3879F97B5CBC}" type="slidenum">
+              <a:rPr lang="en-US"/>
+              <a:t>16</a:t>
+            </a:fld>
+            <a:endParaRPr lang="en-US"/>
+          </a:p>
+        </p:txBody>
+      </p:sp>
+    </p:spTree>
+    <p:extLst>
+      <p:ext uri="{BB962C8B-B14F-4D97-AF65-F5344CB8AC3E}">
+        <p14:creationId xmlns:p14="http://schemas.microsoft.com/office/powerpoint/2010/main" val="1024086991"/>
+      </p:ext>
+    </p:extLst>
+  </p:cSld>
+  <p:clrMapOvr>
+    <a:masterClrMapping/>
+  </p:clrMapOvr>
+</p:notes>
+</file>
+
+<file path=ppt/notesSlides/notesSlide17.xml><?xml version="1.0" encoding="utf-8"?>
+<p:notes xmlns:a="http://schemas.openxmlformats.org/drawingml/2006/main" xmlns:r="http://schemas.openxmlformats.org/officeDocument/2006/relationships" xmlns:p="http://schemas.openxmlformats.org/presentationml/2006/main">
+  <p:cSld>
+    <p:spTree>
+      <p:nvGrpSpPr>
+        <p:cNvPr id="1" name=""/>
+        <p:cNvGrpSpPr/>
+        <p:nvPr/>
+      </p:nvGrpSpPr>
+      <p:grpSpPr>
+        <a:xfrm>
+          <a:off x="0" y="0"/>
+          <a:ext cx="0" cy="0"/>
+          <a:chOff x="0" y="0"/>
+          <a:chExt cx="0" cy="0"/>
+        </a:xfrm>
+      </p:grpSpPr>
+      <p:sp>
+        <p:nvSpPr>
+          <p:cNvPr id="2" name="Slide Image Placeholder 1"/>
+          <p:cNvSpPr>
+            <a:spLocks noGrp="1" noRot="1" noChangeAspect="1"/>
+          </p:cNvSpPr>
+          <p:nvPr>
+            <p:ph type="sldImg"/>
+          </p:nvPr>
+        </p:nvSpPr>
+        <p:spPr/>
+      </p:sp>
+      <p:sp>
+        <p:nvSpPr>
+          <p:cNvPr id="3" name="Notes Placeholder 2"/>
+          <p:cNvSpPr>
+            <a:spLocks noGrp="1"/>
+          </p:cNvSpPr>
+          <p:nvPr>
+            <p:ph type="body" idx="1"/>
+          </p:nvPr>
+        </p:nvSpPr>
+        <p:spPr/>
+        <p:txBody>
+          <a:bodyPr/>
+          <a:lstStyle/>
+          <a:p>
+            <a:r>
+              <a:rPr lang="en-US" dirty="0"/>
+              <a:t/>
+            </a:r>
+            <a:endParaRPr lang="en-US" dirty="0"/>
+          </a:p>
+        </p:txBody>
+      </p:sp>
+      <p:sp>
+        <p:nvSpPr>
+          <p:cNvPr id="4" name="Slide Number Placeholder 3"/>
+          <p:cNvSpPr>
+            <a:spLocks noGrp="1"/>
+          </p:cNvSpPr>
+          <p:nvPr>
+            <p:ph type="sldNum" sz="quarter" idx="10"/>
+          </p:nvPr>
+        </p:nvSpPr>
+        <p:spPr/>
+        <p:txBody>
+          <a:bodyPr/>
+          <a:lstStyle/>
+          <a:p>
+            <a:fld id="{F7021451-1387-4CA6-816F-3879F97B5CBC}" type="slidenum">
+              <a:rPr lang="en-US"/>
+              <a:t>17</a:t>
+            </a:fld>
+            <a:endParaRPr lang="en-US"/>
+          </a:p>
+        </p:txBody>
+      </p:sp>
+    </p:spTree>
+    <p:extLst>
+      <p:ext uri="{BB962C8B-B14F-4D97-AF65-F5344CB8AC3E}">
+        <p14:creationId xmlns:p14="http://schemas.microsoft.com/office/powerpoint/2010/main" val="1024086991"/>
+      </p:ext>
+    </p:extLst>
+  </p:cSld>
+  <p:clrMapOvr>
+    <a:masterClrMapping/>
+  </p:clrMapOvr>
+</p:notes>
+</file>
+
+<file path=ppt/notesSlides/notesSlide18.xml><?xml version="1.0" encoding="utf-8"?>
+<p:notes xmlns:a="http://schemas.openxmlformats.org/drawingml/2006/main" xmlns:r="http://schemas.openxmlformats.org/officeDocument/2006/relationships" xmlns:p="http://schemas.openxmlformats.org/presentationml/2006/main">
+  <p:cSld>
+    <p:spTree>
+      <p:nvGrpSpPr>
+        <p:cNvPr id="1" name=""/>
+        <p:cNvGrpSpPr/>
+        <p:nvPr/>
+      </p:nvGrpSpPr>
+      <p:grpSpPr>
+        <a:xfrm>
+          <a:off x="0" y="0"/>
+          <a:ext cx="0" cy="0"/>
+          <a:chOff x="0" y="0"/>
+          <a:chExt cx="0" cy="0"/>
+        </a:xfrm>
+      </p:grpSpPr>
+      <p:sp>
+        <p:nvSpPr>
+          <p:cNvPr id="2" name="Slide Image Placeholder 1"/>
+          <p:cNvSpPr>
+            <a:spLocks noGrp="1" noRot="1" noChangeAspect="1"/>
+          </p:cNvSpPr>
+          <p:nvPr>
+            <p:ph type="sldImg"/>
+          </p:nvPr>
+        </p:nvSpPr>
+        <p:spPr/>
+      </p:sp>
+      <p:sp>
+        <p:nvSpPr>
+          <p:cNvPr id="3" name="Notes Placeholder 2"/>
+          <p:cNvSpPr>
+            <a:spLocks noGrp="1"/>
+          </p:cNvSpPr>
+          <p:nvPr>
+            <p:ph type="body" idx="1"/>
+          </p:nvPr>
+        </p:nvSpPr>
+        <p:spPr/>
+        <p:txBody>
+          <a:bodyPr/>
+          <a:lstStyle/>
+          <a:p>
+            <a:r>
+              <a:rPr lang="en-US" dirty="0"/>
+              <a:t/>
+            </a:r>
+            <a:endParaRPr lang="en-US" dirty="0"/>
+          </a:p>
+        </p:txBody>
+      </p:sp>
+      <p:sp>
+        <p:nvSpPr>
+          <p:cNvPr id="4" name="Slide Number Placeholder 3"/>
+          <p:cNvSpPr>
+            <a:spLocks noGrp="1"/>
+          </p:cNvSpPr>
+          <p:nvPr>
+            <p:ph type="sldNum" sz="quarter" idx="10"/>
+          </p:nvPr>
+        </p:nvSpPr>
+        <p:spPr/>
+        <p:txBody>
+          <a:bodyPr/>
+          <a:lstStyle/>
+          <a:p>
+            <a:fld id="{F7021451-1387-4CA6-816F-3879F97B5CBC}" type="slidenum">
+              <a:rPr lang="en-US"/>
+              <a:t>18</a:t>
+            </a:fld>
+            <a:endParaRPr lang="en-US"/>
+          </a:p>
+        </p:txBody>
+      </p:sp>
+    </p:spTree>
+    <p:extLst>
+      <p:ext uri="{BB962C8B-B14F-4D97-AF65-F5344CB8AC3E}">
+        <p14:creationId xmlns:p14="http://schemas.microsoft.com/office/powerpoint/2010/main" val="1024086991"/>
+      </p:ext>
+    </p:extLst>
+  </p:cSld>
+  <p:clrMapOvr>
+    <a:masterClrMapping/>
+  </p:clrMapOvr>
+</p:notes>
+</file>
+
+<file path=ppt/notesSlides/notesSlide19.xml><?xml version="1.0" encoding="utf-8"?>
+<p:notes xmlns:a="http://schemas.openxmlformats.org/drawingml/2006/main" xmlns:r="http://schemas.openxmlformats.org/officeDocument/2006/relationships" xmlns:p="http://schemas.openxmlformats.org/presentationml/2006/main">
+  <p:cSld>
+    <p:spTree>
+      <p:nvGrpSpPr>
+        <p:cNvPr id="1" name=""/>
+        <p:cNvGrpSpPr/>
+        <p:nvPr/>
+      </p:nvGrpSpPr>
+      <p:grpSpPr>
+        <a:xfrm>
+          <a:off x="0" y="0"/>
+          <a:ext cx="0" cy="0"/>
+          <a:chOff x="0" y="0"/>
+          <a:chExt cx="0" cy="0"/>
+        </a:xfrm>
+      </p:grpSpPr>
+      <p:sp>
+        <p:nvSpPr>
+          <p:cNvPr id="2" name="Slide Image Placeholder 1"/>
+          <p:cNvSpPr>
+            <a:spLocks noGrp="1" noRot="1" noChangeAspect="1"/>
+          </p:cNvSpPr>
+          <p:nvPr>
+            <p:ph type="sldImg"/>
+          </p:nvPr>
+        </p:nvSpPr>
+        <p:spPr/>
+      </p:sp>
+      <p:sp>
+        <p:nvSpPr>
+          <p:cNvPr id="3" name="Notes Placeholder 2"/>
+          <p:cNvSpPr>
+            <a:spLocks noGrp="1"/>
+          </p:cNvSpPr>
+          <p:nvPr>
+            <p:ph type="body" idx="1"/>
+          </p:nvPr>
+        </p:nvSpPr>
+        <p:spPr/>
+        <p:txBody>
+          <a:bodyPr/>
+          <a:lstStyle/>
+          <a:p>
+            <a:r>
+              <a:rPr lang="en-US" dirty="0"/>
+              <a:t/>
+            </a:r>
+            <a:endParaRPr lang="en-US" dirty="0"/>
+          </a:p>
+        </p:txBody>
+      </p:sp>
+      <p:sp>
+        <p:nvSpPr>
+          <p:cNvPr id="4" name="Slide Number Placeholder 3"/>
+          <p:cNvSpPr>
+            <a:spLocks noGrp="1"/>
+          </p:cNvSpPr>
+          <p:nvPr>
+            <p:ph type="sldNum" sz="quarter" idx="10"/>
+          </p:nvPr>
+        </p:nvSpPr>
+        <p:spPr/>
+        <p:txBody>
+          <a:bodyPr/>
+          <a:lstStyle/>
+          <a:p>
+            <a:fld id="{F7021451-1387-4CA6-816F-3879F97B5CBC}" type="slidenum">
+              <a:rPr lang="en-US"/>
+              <a:t>19</a:t>
+            </a:fld>
+            <a:endParaRPr lang="en-US"/>
+          </a:p>
+        </p:txBody>
+      </p:sp>
+    </p:spTree>
+    <p:extLst>
+      <p:ext uri="{BB962C8B-B14F-4D97-AF65-F5344CB8AC3E}">
+        <p14:creationId xmlns:p14="http://schemas.microsoft.com/office/powerpoint/2010/main" val="1024086991"/>
+      </p:ext>
+    </p:extLst>
+  </p:cSld>
+  <p:clrMapOvr>
+    <a:masterClrMapping/>
+  </p:clrMapOvr>
+</p:notes>
+</file>
+
 <file path=ppt/notesSlides/notesSlide2.xml><?xml version="1.0" encoding="utf-8"?>
 <p:notes xmlns:a="http://schemas.openxmlformats.org/drawingml/2006/main" xmlns:r="http://schemas.openxmlformats.org/officeDocument/2006/relationships" xmlns:p="http://schemas.openxmlformats.org/presentationml/2006/main">
   <p:cSld>
@@ -1908,6 +2798,3189 @@
 </p:sld>
 </file>
 
+<file path=ppt/slides/slide10.xml><?xml version="1.0" encoding="utf-8"?>
+<p:sld xmlns:a="http://schemas.openxmlformats.org/drawingml/2006/main" xmlns:r="http://schemas.openxmlformats.org/officeDocument/2006/relationships" xmlns:p="http://schemas.openxmlformats.org/presentationml/2006/main">
+  <p:cSld name="Slide 10">
+    <p:bg>
+      <p:bgPr>
+        <a:solidFill>
+          <a:srgbClr val="0F172A"/>
+        </a:solidFill>
+      </p:bgPr>
+    </p:bg>
+    <p:spTree>
+      <p:nvGrpSpPr>
+        <p:cNvPr id="1" name=""/>
+        <p:cNvGrpSpPr/>
+        <p:nvPr/>
+      </p:nvGrpSpPr>
+      <p:grpSpPr>
+        <a:xfrm>
+          <a:off x="0" y="0"/>
+          <a:ext cx="0" cy="0"/>
+          <a:chOff x="0" y="0"/>
+          <a:chExt cx="0" cy="0"/>
+        </a:xfrm>
+      </p:grpSpPr>
+      <p:sp>
+        <p:nvSpPr>
+          <p:cNvPr id="2" name="Shape 0"/>
+          <p:cNvSpPr/>
+          <p:nvPr/>
+        </p:nvSpPr>
+        <p:spPr>
+          <a:xfrm>
+            <a:off x="731520" y="365760"/>
+            <a:ext cx="1371600" cy="32004"/>
+          </a:xfrm>
+          <a:prstGeom prst="rect">
+            <a:avLst/>
+          </a:prstGeom>
+          <a:solidFill>
+            <a:srgbClr val="06B6D4"/>
+          </a:solidFill>
+          <a:ln/>
+        </p:spPr>
+      </p:sp>
+      <p:sp>
+        <p:nvSpPr>
+          <p:cNvPr id="3" name="Text 1"/>
+          <p:cNvSpPr/>
+          <p:nvPr/>
+        </p:nvSpPr>
+        <p:spPr>
+          <a:xfrm>
+            <a:off x="731520" y="502920"/>
+            <a:ext cx="10698480" cy="640080"/>
+          </a:xfrm>
+          <a:prstGeom prst="rect">
+            <a:avLst/>
+          </a:prstGeom>
+          <a:noFill/>
+          <a:ln/>
+        </p:spPr>
+        <p:txBody>
+          <a:bodyPr wrap="square" lIns="0" tIns="0" rIns="0" bIns="0" rtlCol="0" anchor="ctr"/>
+          <a:lstStyle/>
+          <a:p>
+            <a:pPr indent="0" marL="0">
+              <a:buNone/>
+            </a:pPr>
+            <a:r>
+              <a:rPr lang="en-US" sz="2800" b="1" dirty="0">
+                <a:solidFill>
+                  <a:srgbClr val="F8FAFC"/>
+                </a:solidFill>
+                <a:latin typeface="Calibri" pitchFamily="34" charset="0"/>
+                <a:ea typeface="Calibri" pitchFamily="34" charset="-122"/>
+                <a:cs typeface="Calibri" pitchFamily="34" charset="-120"/>
+              </a:rPr>
+              <a:t>Meta Ads — Top Ads</a:t>
+            </a:r>
+            <a:endParaRPr lang="en-US" sz="2800" dirty="0"/>
+          </a:p>
+        </p:txBody>
+      </p:sp>
+      <p:sp>
+        <p:nvSpPr>
+          <p:cNvPr id="4" name="Shape 2"/>
+          <p:cNvSpPr/>
+          <p:nvPr/>
+        </p:nvSpPr>
+        <p:spPr>
+          <a:xfrm>
+            <a:off x="731520" y="1371600"/>
+            <a:ext cx="10698480" cy="3657600"/>
+          </a:xfrm>
+          <a:prstGeom prst="rect">
+            <a:avLst/>
+          </a:prstGeom>
+          <a:solidFill>
+            <a:srgbClr val="1E293B"/>
+          </a:solidFill>
+          <a:ln/>
+          <a:effectLst>
+            <a:outerShdw sx="100000" sy="100000" kx="0" ky="0" algn="bl" rotWithShape="0" blurRad="101600" dist="25400" dir="8100000">
+              <a:srgbClr val="000000">
+                <a:alpha val="30000"/>
+              </a:srgbClr>
+            </a:outerShdw>
+          </a:effectLst>
+        </p:spPr>
+      </p:sp>
+      <p:sp>
+        <p:nvSpPr>
+          <p:cNvPr id="5" name="Text 3"/>
+          <p:cNvSpPr/>
+          <p:nvPr/>
+        </p:nvSpPr>
+        <p:spPr>
+          <a:xfrm>
+            <a:off x="731520" y="1371600"/>
+            <a:ext cx="10698480" cy="3657600"/>
+          </a:xfrm>
+          <a:prstGeom prst="rect">
+            <a:avLst/>
+          </a:prstGeom>
+          <a:noFill/>
+          <a:ln/>
+        </p:spPr>
+        <p:txBody>
+          <a:bodyPr wrap="square" rtlCol="0" anchor="ctr"/>
+          <a:lstStyle/>
+          <a:p>
+            <a:pPr algn="ctr" indent="0" marL="0">
+              <a:buNone/>
+            </a:pPr>
+            <a:r>
+              <a:rPr lang="en-US" sz="1000" dirty="0">
+                <a:solidFill>
+                  <a:srgbClr val="475569"/>
+                </a:solidFill>
+                <a:latin typeface="Calibri" pitchFamily="34" charset="0"/>
+                <a:ea typeface="Calibri" pitchFamily="34" charset="-122"/>
+                <a:cs typeface="Calibri" pitchFamily="34" charset="-120"/>
+              </a:rPr>
+              <a:t>{{chart_campaigns}}</a:t>
+            </a:r>
+            <a:endParaRPr lang="en-US" sz="1000" dirty="0"/>
+          </a:p>
+        </p:txBody>
+      </p:sp>
+      <p:sp>
+        <p:nvSpPr>
+          <p:cNvPr id="6" name="Text 4"/>
+          <p:cNvSpPr/>
+          <p:nvPr/>
+        </p:nvSpPr>
+        <p:spPr>
+          <a:xfrm>
+            <a:off x="731520" y="5257800"/>
+            <a:ext cx="10698480" cy="1097280"/>
+          </a:xfrm>
+          <a:prstGeom prst="rect">
+            <a:avLst/>
+          </a:prstGeom>
+          <a:noFill/>
+          <a:ln/>
+        </p:spPr>
+        <p:txBody>
+          <a:bodyPr wrap="square" rtlCol="0" anchor="t"/>
+          <a:lstStyle/>
+          <a:p>
+            <a:pPr indent="0" marL="0">
+              <a:lnSpc>
+                <a:spcPct val="135000"/>
+              </a:lnSpc>
+              <a:buNone/>
+            </a:pPr>
+            <a:r>
+              <a:rPr lang="en-US" sz="1200" dirty="0">
+                <a:solidFill>
+                  <a:srgbClr val="CBD5E1"/>
+                </a:solidFill>
+                <a:latin typeface="Calibri" pitchFamily="34" charset="0"/>
+                <a:ea typeface="Calibri" pitchFamily="34" charset="-122"/>
+                <a:cs typeface="Calibri" pitchFamily="34" charset="-120"/>
+              </a:rPr>
+              <a:t>{{ads_narrative}}</a:t>
+            </a:r>
+            <a:endParaRPr lang="en-US" sz="1200" dirty="0"/>
+          </a:p>
+        </p:txBody>
+      </p:sp>
+      <p:sp>
+        <p:nvSpPr>
+          <p:cNvPr id="7" name="Shape 5"/>
+          <p:cNvSpPr/>
+          <p:nvPr/>
+        </p:nvSpPr>
+        <p:spPr>
+          <a:xfrm>
+            <a:off x="0" y="6839712"/>
+            <a:ext cx="12161520" cy="18288"/>
+          </a:xfrm>
+          <a:prstGeom prst="rect">
+            <a:avLst/>
+          </a:prstGeom>
+          <a:solidFill>
+            <a:srgbClr val="06B6D4"/>
+          </a:solidFill>
+          <a:ln/>
+        </p:spPr>
+      </p:sp>
+      <p:sp>
+        <p:nvSpPr>
+          <p:cNvPr id="8" name="Text 6"/>
+          <p:cNvSpPr/>
+          <p:nvPr/>
+        </p:nvSpPr>
+        <p:spPr>
+          <a:xfrm>
+            <a:off x="731520" y="6510528"/>
+            <a:ext cx="10698480" cy="256032"/>
+          </a:xfrm>
+          <a:prstGeom prst="rect">
+            <a:avLst/>
+          </a:prstGeom>
+          <a:noFill/>
+          <a:ln/>
+        </p:spPr>
+        <p:txBody>
+          <a:bodyPr wrap="square" rtlCol="0" anchor="ctr"/>
+          <a:lstStyle/>
+          <a:p>
+            <a:pPr indent="0" marL="0">
+              <a:buNone/>
+            </a:pPr>
+            <a:r>
+              <a:rPr lang="en-US" sz="800" dirty="0">
+                <a:solidFill>
+                  <a:srgbClr val="475569"/>
+                </a:solidFill>
+                <a:latin typeface="Calibri" pitchFamily="34" charset="0"/>
+                <a:ea typeface="Calibri" pitchFamily="34" charset="-122"/>
+                <a:cs typeface="Calibri" pitchFamily="34" charset="-120"/>
+              </a:rPr>
+              <a:t>{{agency_name}}  •  Confidential  •  Page 10</a:t>
+            </a:r>
+            <a:endParaRPr lang="en-US" sz="800" dirty="0"/>
+          </a:p>
+        </p:txBody>
+      </p:sp>
+    </p:spTree>
+  </p:cSld>
+  <p:clrMapOvr>
+    <a:masterClrMapping/>
+  </p:clrMapOvr>
+</p:sld>
+</file>
+
+<file path=ppt/slides/slide11.xml><?xml version="1.0" encoding="utf-8"?>
+<p:sld xmlns:a="http://schemas.openxmlformats.org/drawingml/2006/main" xmlns:r="http://schemas.openxmlformats.org/officeDocument/2006/relationships" xmlns:p="http://schemas.openxmlformats.org/presentationml/2006/main">
+  <p:cSld name="Slide 11">
+    <p:bg>
+      <p:bgPr>
+        <a:solidFill>
+          <a:srgbClr val="0F172A"/>
+        </a:solidFill>
+      </p:bgPr>
+    </p:bg>
+    <p:spTree>
+      <p:nvGrpSpPr>
+        <p:cNvPr id="1" name=""/>
+        <p:cNvGrpSpPr/>
+        <p:nvPr/>
+      </p:nvGrpSpPr>
+      <p:grpSpPr>
+        <a:xfrm>
+          <a:off x="0" y="0"/>
+          <a:ext cx="0" cy="0"/>
+          <a:chOff x="0" y="0"/>
+          <a:chExt cx="0" cy="0"/>
+        </a:xfrm>
+      </p:grpSpPr>
+      <p:sp>
+        <p:nvSpPr>
+          <p:cNvPr id="2" name="Shape 0"/>
+          <p:cNvSpPr/>
+          <p:nvPr/>
+        </p:nvSpPr>
+        <p:spPr>
+          <a:xfrm>
+            <a:off x="731520" y="365760"/>
+            <a:ext cx="1371600" cy="32004"/>
+          </a:xfrm>
+          <a:prstGeom prst="rect">
+            <a:avLst/>
+          </a:prstGeom>
+          <a:solidFill>
+            <a:srgbClr val="06B6D4"/>
+          </a:solidFill>
+          <a:ln/>
+        </p:spPr>
+      </p:sp>
+      <p:sp>
+        <p:nvSpPr>
+          <p:cNvPr id="3" name="Text 1"/>
+          <p:cNvSpPr/>
+          <p:nvPr/>
+        </p:nvSpPr>
+        <p:spPr>
+          <a:xfrm>
+            <a:off x="731520" y="502920"/>
+            <a:ext cx="10698480" cy="640080"/>
+          </a:xfrm>
+          <a:prstGeom prst="rect">
+            <a:avLst/>
+          </a:prstGeom>
+          <a:noFill/>
+          <a:ln/>
+        </p:spPr>
+        <p:txBody>
+          <a:bodyPr wrap="square" lIns="0" tIns="0" rIns="0" bIns="0" rtlCol="0" anchor="ctr"/>
+          <a:lstStyle/>
+          <a:p>
+            <a:pPr indent="0" marL="0">
+              <a:buNone/>
+            </a:pPr>
+            <a:r>
+              <a:rPr lang="en-US" sz="2800" b="1" dirty="0">
+                <a:solidFill>
+                  <a:srgbClr val="F8FAFC"/>
+                </a:solidFill>
+                <a:latin typeface="Calibri" pitchFamily="34" charset="0"/>
+                <a:ea typeface="Calibri" pitchFamily="34" charset="-122"/>
+                <a:cs typeface="Calibri" pitchFamily="34" charset="-120"/>
+              </a:rPr>
+              <a:t>Search Advertising — Google Ads</a:t>
+            </a:r>
+            <a:endParaRPr lang="en-US" sz="2800" dirty="0"/>
+          </a:p>
+        </p:txBody>
+      </p:sp>
+      <p:sp>
+        <p:nvSpPr>
+          <p:cNvPr id="4" name="Shape 2"/>
+          <p:cNvSpPr/>
+          <p:nvPr/>
+        </p:nvSpPr>
+        <p:spPr>
+          <a:xfrm>
+            <a:off x="731520" y="1371600"/>
+            <a:ext cx="5120640" cy="2743200"/>
+          </a:xfrm>
+          <a:prstGeom prst="rect">
+            <a:avLst/>
+          </a:prstGeom>
+          <a:solidFill>
+            <a:srgbClr val="1E293B"/>
+          </a:solidFill>
+          <a:ln/>
+          <a:effectLst>
+            <a:outerShdw sx="100000" sy="100000" kx="0" ky="0" algn="bl" rotWithShape="0" blurRad="101600" dist="25400" dir="8100000">
+              <a:srgbClr val="000000">
+                <a:alpha val="30000"/>
+              </a:srgbClr>
+            </a:outerShdw>
+          </a:effectLst>
+        </p:spPr>
+      </p:sp>
+      <p:sp>
+        <p:nvSpPr>
+          <p:cNvPr id="5" name="Text 3"/>
+          <p:cNvSpPr/>
+          <p:nvPr/>
+        </p:nvSpPr>
+        <p:spPr>
+          <a:xfrm>
+            <a:off x="731520" y="1371600"/>
+            <a:ext cx="5120640" cy="2743200"/>
+          </a:xfrm>
+          <a:prstGeom prst="rect">
+            <a:avLst/>
+          </a:prstGeom>
+          <a:noFill/>
+          <a:ln/>
+        </p:spPr>
+        <p:txBody>
+          <a:bodyPr wrap="square" rtlCol="0" anchor="ctr"/>
+          <a:lstStyle/>
+          <a:p>
+            <a:pPr algn="ctr" indent="0" marL="0">
+              <a:buNone/>
+            </a:pPr>
+            <a:r>
+              <a:rPr lang="en-US" sz="1000" dirty="0">
+                <a:solidFill>
+                  <a:srgbClr val="475569"/>
+                </a:solidFill>
+                <a:latin typeface="Calibri" pitchFamily="34" charset="0"/>
+                <a:ea typeface="Calibri" pitchFamily="34" charset="-122"/>
+                <a:cs typeface="Calibri" pitchFamily="34" charset="-120"/>
+              </a:rPr>
+              <a:t>{{chart_gads_spend}}</a:t>
+            </a:r>
+            <a:endParaRPr lang="en-US" sz="1000" dirty="0"/>
+          </a:p>
+        </p:txBody>
+      </p:sp>
+      <p:sp>
+        <p:nvSpPr>
+          <p:cNvPr id="6" name="Shape 4"/>
+          <p:cNvSpPr/>
+          <p:nvPr/>
+        </p:nvSpPr>
+        <p:spPr>
+          <a:xfrm>
+            <a:off x="6217920" y="1371600"/>
+            <a:ext cx="5212080" cy="2743200"/>
+          </a:xfrm>
+          <a:prstGeom prst="rect">
+            <a:avLst/>
+          </a:prstGeom>
+          <a:solidFill>
+            <a:srgbClr val="1E293B"/>
+          </a:solidFill>
+          <a:ln/>
+          <a:effectLst>
+            <a:outerShdw sx="100000" sy="100000" kx="0" ky="0" algn="bl" rotWithShape="0" blurRad="101600" dist="25400" dir="8100000">
+              <a:srgbClr val="000000">
+                <a:alpha val="30000"/>
+              </a:srgbClr>
+            </a:outerShdw>
+          </a:effectLst>
+        </p:spPr>
+      </p:sp>
+      <p:sp>
+        <p:nvSpPr>
+          <p:cNvPr id="7" name="Text 5"/>
+          <p:cNvSpPr/>
+          <p:nvPr/>
+        </p:nvSpPr>
+        <p:spPr>
+          <a:xfrm>
+            <a:off x="6217920" y="1371600"/>
+            <a:ext cx="5212080" cy="2743200"/>
+          </a:xfrm>
+          <a:prstGeom prst="rect">
+            <a:avLst/>
+          </a:prstGeom>
+          <a:noFill/>
+          <a:ln/>
+        </p:spPr>
+        <p:txBody>
+          <a:bodyPr wrap="square" rtlCol="0" anchor="ctr"/>
+          <a:lstStyle/>
+          <a:p>
+            <a:pPr algn="ctr" indent="0" marL="0">
+              <a:buNone/>
+            </a:pPr>
+            <a:r>
+              <a:rPr lang="en-US" sz="1000" dirty="0">
+                <a:solidFill>
+                  <a:srgbClr val="475569"/>
+                </a:solidFill>
+                <a:latin typeface="Calibri" pitchFamily="34" charset="0"/>
+                <a:ea typeface="Calibri" pitchFamily="34" charset="-122"/>
+                <a:cs typeface="Calibri" pitchFamily="34" charset="-120"/>
+              </a:rPr>
+              <a:t>{{chart_gads_campaigns}}</a:t>
+            </a:r>
+            <a:endParaRPr lang="en-US" sz="1000" dirty="0"/>
+          </a:p>
+        </p:txBody>
+      </p:sp>
+      <p:sp>
+        <p:nvSpPr>
+          <p:cNvPr id="8" name="Text 6"/>
+          <p:cNvSpPr/>
+          <p:nvPr/>
+        </p:nvSpPr>
+        <p:spPr>
+          <a:xfrm>
+            <a:off x="731520" y="4389120"/>
+            <a:ext cx="10698480" cy="1828800"/>
+          </a:xfrm>
+          <a:prstGeom prst="rect">
+            <a:avLst/>
+          </a:prstGeom>
+          <a:noFill/>
+          <a:ln/>
+        </p:spPr>
+        <p:txBody>
+          <a:bodyPr wrap="square" rtlCol="0" anchor="t"/>
+          <a:lstStyle/>
+          <a:p>
+            <a:pPr indent="0" marL="0">
+              <a:lnSpc>
+                <a:spcPct val="135000"/>
+              </a:lnSpc>
+              <a:buNone/>
+            </a:pPr>
+            <a:r>
+              <a:rPr lang="en-US" sz="1200" dirty="0">
+                <a:solidFill>
+                  <a:srgbClr val="CBD5E1"/>
+                </a:solidFill>
+                <a:latin typeface="Calibri" pitchFamily="34" charset="0"/>
+                <a:ea typeface="Calibri" pitchFamily="34" charset="-122"/>
+                <a:cs typeface="Calibri" pitchFamily="34" charset="-120"/>
+              </a:rPr>
+              <a:t>{{google_ads_narrative}}</a:t>
+            </a:r>
+            <a:endParaRPr lang="en-US" sz="1200" dirty="0"/>
+          </a:p>
+        </p:txBody>
+      </p:sp>
+      <p:sp>
+        <p:nvSpPr>
+          <p:cNvPr id="9" name="Shape 7"/>
+          <p:cNvSpPr/>
+          <p:nvPr/>
+        </p:nvSpPr>
+        <p:spPr>
+          <a:xfrm>
+            <a:off x="0" y="6839712"/>
+            <a:ext cx="12161520" cy="18288"/>
+          </a:xfrm>
+          <a:prstGeom prst="rect">
+            <a:avLst/>
+          </a:prstGeom>
+          <a:solidFill>
+            <a:srgbClr val="06B6D4"/>
+          </a:solidFill>
+          <a:ln/>
+        </p:spPr>
+      </p:sp>
+      <p:sp>
+        <p:nvSpPr>
+          <p:cNvPr id="10" name="Text 8"/>
+          <p:cNvSpPr/>
+          <p:nvPr/>
+        </p:nvSpPr>
+        <p:spPr>
+          <a:xfrm>
+            <a:off x="731520" y="6510528"/>
+            <a:ext cx="10698480" cy="256032"/>
+          </a:xfrm>
+          <a:prstGeom prst="rect">
+            <a:avLst/>
+          </a:prstGeom>
+          <a:noFill/>
+          <a:ln/>
+        </p:spPr>
+        <p:txBody>
+          <a:bodyPr wrap="square" rtlCol="0" anchor="ctr"/>
+          <a:lstStyle/>
+          <a:p>
+            <a:pPr indent="0" marL="0">
+              <a:buNone/>
+            </a:pPr>
+            <a:r>
+              <a:rPr lang="en-US" sz="800" dirty="0">
+                <a:solidFill>
+                  <a:srgbClr val="475569"/>
+                </a:solidFill>
+                <a:latin typeface="Calibri" pitchFamily="34" charset="0"/>
+                <a:ea typeface="Calibri" pitchFamily="34" charset="-122"/>
+                <a:cs typeface="Calibri" pitchFamily="34" charset="-120"/>
+              </a:rPr>
+              <a:t>{{agency_name}}  •  Confidential  •  Page 11</a:t>
+            </a:r>
+            <a:endParaRPr lang="en-US" sz="800" dirty="0"/>
+          </a:p>
+        </p:txBody>
+      </p:sp>
+    </p:spTree>
+  </p:cSld>
+  <p:clrMapOvr>
+    <a:masterClrMapping/>
+  </p:clrMapOvr>
+</p:sld>
+</file>
+
+<file path=ppt/slides/slide12.xml><?xml version="1.0" encoding="utf-8"?>
+<p:sld xmlns:a="http://schemas.openxmlformats.org/drawingml/2006/main" xmlns:r="http://schemas.openxmlformats.org/officeDocument/2006/relationships" xmlns:p="http://schemas.openxmlformats.org/presentationml/2006/main">
+  <p:cSld name="Slide 12">
+    <p:bg>
+      <p:bgPr>
+        <a:solidFill>
+          <a:srgbClr val="0F172A"/>
+        </a:solidFill>
+      </p:bgPr>
+    </p:bg>
+    <p:spTree>
+      <p:nvGrpSpPr>
+        <p:cNvPr id="1" name=""/>
+        <p:cNvGrpSpPr/>
+        <p:nvPr/>
+      </p:nvGrpSpPr>
+      <p:grpSpPr>
+        <a:xfrm>
+          <a:off x="0" y="0"/>
+          <a:ext cx="0" cy="0"/>
+          <a:chOff x="0" y="0"/>
+          <a:chExt cx="0" cy="0"/>
+        </a:xfrm>
+      </p:grpSpPr>
+      <p:sp>
+        <p:nvSpPr>
+          <p:cNvPr id="2" name="Shape 0"/>
+          <p:cNvSpPr/>
+          <p:nvPr/>
+        </p:nvSpPr>
+        <p:spPr>
+          <a:xfrm>
+            <a:off x="731520" y="365760"/>
+            <a:ext cx="1371600" cy="32004"/>
+          </a:xfrm>
+          <a:prstGeom prst="rect">
+            <a:avLst/>
+          </a:prstGeom>
+          <a:solidFill>
+            <a:srgbClr val="06B6D4"/>
+          </a:solidFill>
+          <a:ln/>
+        </p:spPr>
+      </p:sp>
+      <p:sp>
+        <p:nvSpPr>
+          <p:cNvPr id="3" name="Text 1"/>
+          <p:cNvSpPr/>
+          <p:nvPr/>
+        </p:nvSpPr>
+        <p:spPr>
+          <a:xfrm>
+            <a:off x="731520" y="502920"/>
+            <a:ext cx="10698480" cy="640080"/>
+          </a:xfrm>
+          <a:prstGeom prst="rect">
+            <a:avLst/>
+          </a:prstGeom>
+          <a:noFill/>
+          <a:ln/>
+        </p:spPr>
+        <p:txBody>
+          <a:bodyPr wrap="square" lIns="0" tIns="0" rIns="0" bIns="0" rtlCol="0" anchor="ctr"/>
+          <a:lstStyle/>
+          <a:p>
+            <a:pPr indent="0" marL="0">
+              <a:buNone/>
+            </a:pPr>
+            <a:r>
+              <a:rPr lang="en-US" sz="2800" b="1" dirty="0">
+                <a:solidFill>
+                  <a:srgbClr val="F8FAFC"/>
+                </a:solidFill>
+                <a:latin typeface="Calibri" pitchFamily="34" charset="0"/>
+                <a:ea typeface="Calibri" pitchFamily="34" charset="-122"/>
+                <a:cs typeface="Calibri" pitchFamily="34" charset="-120"/>
+              </a:rPr>
+              <a:t>Search Terms Performance</a:t>
+            </a:r>
+            <a:endParaRPr lang="en-US" sz="2800" dirty="0"/>
+          </a:p>
+        </p:txBody>
+      </p:sp>
+      <p:sp>
+        <p:nvSpPr>
+          <p:cNvPr id="4" name="Shape 2"/>
+          <p:cNvSpPr/>
+          <p:nvPr/>
+        </p:nvSpPr>
+        <p:spPr>
+          <a:xfrm>
+            <a:off x="731520" y="1371600"/>
+            <a:ext cx="10698480" cy="3657600"/>
+          </a:xfrm>
+          <a:prstGeom prst="rect">
+            <a:avLst/>
+          </a:prstGeom>
+          <a:solidFill>
+            <a:srgbClr val="1E293B"/>
+          </a:solidFill>
+          <a:ln/>
+          <a:effectLst>
+            <a:outerShdw sx="100000" sy="100000" kx="0" ky="0" algn="bl" rotWithShape="0" blurRad="101600" dist="25400" dir="8100000">
+              <a:srgbClr val="000000">
+                <a:alpha val="30000"/>
+              </a:srgbClr>
+            </a:outerShdw>
+          </a:effectLst>
+        </p:spPr>
+      </p:sp>
+      <p:sp>
+        <p:nvSpPr>
+          <p:cNvPr id="5" name="Text 3"/>
+          <p:cNvSpPr/>
+          <p:nvPr/>
+        </p:nvSpPr>
+        <p:spPr>
+          <a:xfrm>
+            <a:off x="731520" y="1371600"/>
+            <a:ext cx="10698480" cy="3657600"/>
+          </a:xfrm>
+          <a:prstGeom prst="rect">
+            <a:avLst/>
+          </a:prstGeom>
+          <a:noFill/>
+          <a:ln/>
+        </p:spPr>
+        <p:txBody>
+          <a:bodyPr wrap="square" rtlCol="0" anchor="ctr"/>
+          <a:lstStyle/>
+          <a:p>
+            <a:pPr algn="ctr" indent="0" marL="0">
+              <a:buNone/>
+            </a:pPr>
+            <a:r>
+              <a:rPr lang="en-US" sz="1000" dirty="0">
+                <a:solidFill>
+                  <a:srgbClr val="475569"/>
+                </a:solidFill>
+                <a:latin typeface="Calibri" pitchFamily="34" charset="0"/>
+                <a:ea typeface="Calibri" pitchFamily="34" charset="-122"/>
+                <a:cs typeface="Calibri" pitchFamily="34" charset="-120"/>
+              </a:rPr>
+              <a:t>{{chart_search_terms}}</a:t>
+            </a:r>
+            <a:endParaRPr lang="en-US" sz="1000" dirty="0"/>
+          </a:p>
+        </p:txBody>
+      </p:sp>
+      <p:sp>
+        <p:nvSpPr>
+          <p:cNvPr id="6" name="Text 4"/>
+          <p:cNvSpPr/>
+          <p:nvPr/>
+        </p:nvSpPr>
+        <p:spPr>
+          <a:xfrm>
+            <a:off x="731520" y="5257800"/>
+            <a:ext cx="10698480" cy="1097280"/>
+          </a:xfrm>
+          <a:prstGeom prst="rect">
+            <a:avLst/>
+          </a:prstGeom>
+          <a:noFill/>
+          <a:ln/>
+        </p:spPr>
+        <p:txBody>
+          <a:bodyPr wrap="square" rtlCol="0" anchor="t"/>
+          <a:lstStyle/>
+          <a:p>
+            <a:pPr indent="0" marL="0">
+              <a:lnSpc>
+                <a:spcPct val="135000"/>
+              </a:lnSpc>
+              <a:buNone/>
+            </a:pPr>
+            <a:r>
+              <a:rPr lang="en-US" sz="1200" dirty="0">
+                <a:solidFill>
+                  <a:srgbClr val="CBD5E1"/>
+                </a:solidFill>
+                <a:latin typeface="Calibri" pitchFamily="34" charset="0"/>
+                <a:ea typeface="Calibri" pitchFamily="34" charset="-122"/>
+                <a:cs typeface="Calibri" pitchFamily="34" charset="-120"/>
+              </a:rPr>
+              <a:t>{{google_ads_narrative}}</a:t>
+            </a:r>
+            <a:endParaRPr lang="en-US" sz="1200" dirty="0"/>
+          </a:p>
+        </p:txBody>
+      </p:sp>
+      <p:sp>
+        <p:nvSpPr>
+          <p:cNvPr id="7" name="Shape 5"/>
+          <p:cNvSpPr/>
+          <p:nvPr/>
+        </p:nvSpPr>
+        <p:spPr>
+          <a:xfrm>
+            <a:off x="0" y="6839712"/>
+            <a:ext cx="12161520" cy="18288"/>
+          </a:xfrm>
+          <a:prstGeom prst="rect">
+            <a:avLst/>
+          </a:prstGeom>
+          <a:solidFill>
+            <a:srgbClr val="06B6D4"/>
+          </a:solidFill>
+          <a:ln/>
+        </p:spPr>
+      </p:sp>
+      <p:sp>
+        <p:nvSpPr>
+          <p:cNvPr id="8" name="Text 6"/>
+          <p:cNvSpPr/>
+          <p:nvPr/>
+        </p:nvSpPr>
+        <p:spPr>
+          <a:xfrm>
+            <a:off x="731520" y="6510528"/>
+            <a:ext cx="10698480" cy="256032"/>
+          </a:xfrm>
+          <a:prstGeom prst="rect">
+            <a:avLst/>
+          </a:prstGeom>
+          <a:noFill/>
+          <a:ln/>
+        </p:spPr>
+        <p:txBody>
+          <a:bodyPr wrap="square" rtlCol="0" anchor="ctr"/>
+          <a:lstStyle/>
+          <a:p>
+            <a:pPr indent="0" marL="0">
+              <a:buNone/>
+            </a:pPr>
+            <a:r>
+              <a:rPr lang="en-US" sz="800" dirty="0">
+                <a:solidFill>
+                  <a:srgbClr val="475569"/>
+                </a:solidFill>
+                <a:latin typeface="Calibri" pitchFamily="34" charset="0"/>
+                <a:ea typeface="Calibri" pitchFamily="34" charset="-122"/>
+                <a:cs typeface="Calibri" pitchFamily="34" charset="-120"/>
+              </a:rPr>
+              <a:t>{{agency_name}}  •  Confidential  •  Page 12</a:t>
+            </a:r>
+            <a:endParaRPr lang="en-US" sz="800" dirty="0"/>
+          </a:p>
+        </p:txBody>
+      </p:sp>
+    </p:spTree>
+  </p:cSld>
+  <p:clrMapOvr>
+    <a:masterClrMapping/>
+  </p:clrMapOvr>
+</p:sld>
+</file>
+
+<file path=ppt/slides/slide13.xml><?xml version="1.0" encoding="utf-8"?>
+<p:sld xmlns:a="http://schemas.openxmlformats.org/drawingml/2006/main" xmlns:r="http://schemas.openxmlformats.org/officeDocument/2006/relationships" xmlns:p="http://schemas.openxmlformats.org/presentationml/2006/main">
+  <p:cSld name="Slide 13">
+    <p:bg>
+      <p:bgPr>
+        <a:solidFill>
+          <a:srgbClr val="0F172A"/>
+        </a:solidFill>
+      </p:bgPr>
+    </p:bg>
+    <p:spTree>
+      <p:nvGrpSpPr>
+        <p:cNvPr id="1" name=""/>
+        <p:cNvGrpSpPr/>
+        <p:nvPr/>
+      </p:nvGrpSpPr>
+      <p:grpSpPr>
+        <a:xfrm>
+          <a:off x="0" y="0"/>
+          <a:ext cx="0" cy="0"/>
+          <a:chOff x="0" y="0"/>
+          <a:chExt cx="0" cy="0"/>
+        </a:xfrm>
+      </p:grpSpPr>
+      <p:sp>
+        <p:nvSpPr>
+          <p:cNvPr id="2" name="Shape 0"/>
+          <p:cNvSpPr/>
+          <p:nvPr/>
+        </p:nvSpPr>
+        <p:spPr>
+          <a:xfrm>
+            <a:off x="731520" y="365760"/>
+            <a:ext cx="1371600" cy="32004"/>
+          </a:xfrm>
+          <a:prstGeom prst="rect">
+            <a:avLst/>
+          </a:prstGeom>
+          <a:solidFill>
+            <a:srgbClr val="06B6D4"/>
+          </a:solidFill>
+          <a:ln/>
+        </p:spPr>
+      </p:sp>
+      <p:sp>
+        <p:nvSpPr>
+          <p:cNvPr id="3" name="Text 1"/>
+          <p:cNvSpPr/>
+          <p:nvPr/>
+        </p:nvSpPr>
+        <p:spPr>
+          <a:xfrm>
+            <a:off x="731520" y="502920"/>
+            <a:ext cx="10698480" cy="640080"/>
+          </a:xfrm>
+          <a:prstGeom prst="rect">
+            <a:avLst/>
+          </a:prstGeom>
+          <a:noFill/>
+          <a:ln/>
+        </p:spPr>
+        <p:txBody>
+          <a:bodyPr wrap="square" lIns="0" tIns="0" rIns="0" bIns="0" rtlCol="0" anchor="ctr"/>
+          <a:lstStyle/>
+          <a:p>
+            <a:pPr indent="0" marL="0">
+              <a:buNone/>
+            </a:pPr>
+            <a:r>
+              <a:rPr lang="en-US" sz="2800" b="1" dirty="0">
+                <a:solidFill>
+                  <a:srgbClr val="F8FAFC"/>
+                </a:solidFill>
+                <a:latin typeface="Calibri" pitchFamily="34" charset="0"/>
+                <a:ea typeface="Calibri" pitchFamily="34" charset="-122"/>
+                <a:cs typeface="Calibri" pitchFamily="34" charset="-120"/>
+              </a:rPr>
+              <a:t>Organic Search — SEO</a:t>
+            </a:r>
+            <a:endParaRPr lang="en-US" sz="2800" dirty="0"/>
+          </a:p>
+        </p:txBody>
+      </p:sp>
+      <p:sp>
+        <p:nvSpPr>
+          <p:cNvPr id="4" name="Shape 2"/>
+          <p:cNvSpPr/>
+          <p:nvPr/>
+        </p:nvSpPr>
+        <p:spPr>
+          <a:xfrm>
+            <a:off x="731520" y="1371600"/>
+            <a:ext cx="5120640" cy="2743200"/>
+          </a:xfrm>
+          <a:prstGeom prst="rect">
+            <a:avLst/>
+          </a:prstGeom>
+          <a:solidFill>
+            <a:srgbClr val="1E293B"/>
+          </a:solidFill>
+          <a:ln/>
+          <a:effectLst>
+            <a:outerShdw sx="100000" sy="100000" kx="0" ky="0" algn="bl" rotWithShape="0" blurRad="101600" dist="25400" dir="8100000">
+              <a:srgbClr val="000000">
+                <a:alpha val="30000"/>
+              </a:srgbClr>
+            </a:outerShdw>
+          </a:effectLst>
+        </p:spPr>
+      </p:sp>
+      <p:sp>
+        <p:nvSpPr>
+          <p:cNvPr id="5" name="Text 3"/>
+          <p:cNvSpPr/>
+          <p:nvPr/>
+        </p:nvSpPr>
+        <p:spPr>
+          <a:xfrm>
+            <a:off x="731520" y="1371600"/>
+            <a:ext cx="5120640" cy="2743200"/>
+          </a:xfrm>
+          <a:prstGeom prst="rect">
+            <a:avLst/>
+          </a:prstGeom>
+          <a:noFill/>
+          <a:ln/>
+        </p:spPr>
+        <p:txBody>
+          <a:bodyPr wrap="square" rtlCol="0" anchor="ctr"/>
+          <a:lstStyle/>
+          <a:p>
+            <a:pPr algn="ctr" indent="0" marL="0">
+              <a:buNone/>
+            </a:pPr>
+            <a:r>
+              <a:rPr lang="en-US" sz="1000" dirty="0">
+                <a:solidFill>
+                  <a:srgbClr val="475569"/>
+                </a:solidFill>
+                <a:latin typeface="Calibri" pitchFamily="34" charset="0"/>
+                <a:ea typeface="Calibri" pitchFamily="34" charset="-122"/>
+                <a:cs typeface="Calibri" pitchFamily="34" charset="-120"/>
+              </a:rPr>
+              <a:t>{{chart_seo_trend}}</a:t>
+            </a:r>
+            <a:endParaRPr lang="en-US" sz="1000" dirty="0"/>
+          </a:p>
+        </p:txBody>
+      </p:sp>
+      <p:sp>
+        <p:nvSpPr>
+          <p:cNvPr id="6" name="Shape 4"/>
+          <p:cNvSpPr/>
+          <p:nvPr/>
+        </p:nvSpPr>
+        <p:spPr>
+          <a:xfrm>
+            <a:off x="6217920" y="1371600"/>
+            <a:ext cx="5212080" cy="2743200"/>
+          </a:xfrm>
+          <a:prstGeom prst="rect">
+            <a:avLst/>
+          </a:prstGeom>
+          <a:solidFill>
+            <a:srgbClr val="1E293B"/>
+          </a:solidFill>
+          <a:ln/>
+          <a:effectLst>
+            <a:outerShdw sx="100000" sy="100000" kx="0" ky="0" algn="bl" rotWithShape="0" blurRad="101600" dist="25400" dir="8100000">
+              <a:srgbClr val="000000">
+                <a:alpha val="30000"/>
+              </a:srgbClr>
+            </a:outerShdw>
+          </a:effectLst>
+        </p:spPr>
+      </p:sp>
+      <p:sp>
+        <p:nvSpPr>
+          <p:cNvPr id="7" name="Text 5"/>
+          <p:cNvSpPr/>
+          <p:nvPr/>
+        </p:nvSpPr>
+        <p:spPr>
+          <a:xfrm>
+            <a:off x="6217920" y="1371600"/>
+            <a:ext cx="5212080" cy="2743200"/>
+          </a:xfrm>
+          <a:prstGeom prst="rect">
+            <a:avLst/>
+          </a:prstGeom>
+          <a:noFill/>
+          <a:ln/>
+        </p:spPr>
+        <p:txBody>
+          <a:bodyPr wrap="square" rtlCol="0" anchor="ctr"/>
+          <a:lstStyle/>
+          <a:p>
+            <a:pPr algn="ctr" indent="0" marL="0">
+              <a:buNone/>
+            </a:pPr>
+            <a:r>
+              <a:rPr lang="en-US" sz="1000" dirty="0">
+                <a:solidFill>
+                  <a:srgbClr val="475569"/>
+                </a:solidFill>
+                <a:latin typeface="Calibri" pitchFamily="34" charset="0"/>
+                <a:ea typeface="Calibri" pitchFamily="34" charset="-122"/>
+                <a:cs typeface="Calibri" pitchFamily="34" charset="-120"/>
+              </a:rPr>
+              <a:t>{{chart_top_queries}}</a:t>
+            </a:r>
+            <a:endParaRPr lang="en-US" sz="1000" dirty="0"/>
+          </a:p>
+        </p:txBody>
+      </p:sp>
+      <p:sp>
+        <p:nvSpPr>
+          <p:cNvPr id="8" name="Text 6"/>
+          <p:cNvSpPr/>
+          <p:nvPr/>
+        </p:nvSpPr>
+        <p:spPr>
+          <a:xfrm>
+            <a:off x="731520" y="4389120"/>
+            <a:ext cx="10698480" cy="1828800"/>
+          </a:xfrm>
+          <a:prstGeom prst="rect">
+            <a:avLst/>
+          </a:prstGeom>
+          <a:noFill/>
+          <a:ln/>
+        </p:spPr>
+        <p:txBody>
+          <a:bodyPr wrap="square" rtlCol="0" anchor="t"/>
+          <a:lstStyle/>
+          <a:p>
+            <a:pPr indent="0" marL="0">
+              <a:lnSpc>
+                <a:spcPct val="135000"/>
+              </a:lnSpc>
+              <a:buNone/>
+            </a:pPr>
+            <a:r>
+              <a:rPr lang="en-US" sz="1200" dirty="0">
+                <a:solidFill>
+                  <a:srgbClr val="CBD5E1"/>
+                </a:solidFill>
+                <a:latin typeface="Calibri" pitchFamily="34" charset="0"/>
+                <a:ea typeface="Calibri" pitchFamily="34" charset="-122"/>
+                <a:cs typeface="Calibri" pitchFamily="34" charset="-120"/>
+              </a:rPr>
+              <a:t>{{seo_narrative}}</a:t>
+            </a:r>
+            <a:endParaRPr lang="en-US" sz="1200" dirty="0"/>
+          </a:p>
+        </p:txBody>
+      </p:sp>
+      <p:sp>
+        <p:nvSpPr>
+          <p:cNvPr id="9" name="Shape 7"/>
+          <p:cNvSpPr/>
+          <p:nvPr/>
+        </p:nvSpPr>
+        <p:spPr>
+          <a:xfrm>
+            <a:off x="0" y="6839712"/>
+            <a:ext cx="12161520" cy="18288"/>
+          </a:xfrm>
+          <a:prstGeom prst="rect">
+            <a:avLst/>
+          </a:prstGeom>
+          <a:solidFill>
+            <a:srgbClr val="06B6D4"/>
+          </a:solidFill>
+          <a:ln/>
+        </p:spPr>
+      </p:sp>
+      <p:sp>
+        <p:nvSpPr>
+          <p:cNvPr id="10" name="Text 8"/>
+          <p:cNvSpPr/>
+          <p:nvPr/>
+        </p:nvSpPr>
+        <p:spPr>
+          <a:xfrm>
+            <a:off x="731520" y="6510528"/>
+            <a:ext cx="10698480" cy="256032"/>
+          </a:xfrm>
+          <a:prstGeom prst="rect">
+            <a:avLst/>
+          </a:prstGeom>
+          <a:noFill/>
+          <a:ln/>
+        </p:spPr>
+        <p:txBody>
+          <a:bodyPr wrap="square" rtlCol="0" anchor="ctr"/>
+          <a:lstStyle/>
+          <a:p>
+            <a:pPr indent="0" marL="0">
+              <a:buNone/>
+            </a:pPr>
+            <a:r>
+              <a:rPr lang="en-US" sz="800" dirty="0">
+                <a:solidFill>
+                  <a:srgbClr val="475569"/>
+                </a:solidFill>
+                <a:latin typeface="Calibri" pitchFamily="34" charset="0"/>
+                <a:ea typeface="Calibri" pitchFamily="34" charset="-122"/>
+                <a:cs typeface="Calibri" pitchFamily="34" charset="-120"/>
+              </a:rPr>
+              <a:t>{{agency_name}}  •  Confidential  •  Page 13</a:t>
+            </a:r>
+            <a:endParaRPr lang="en-US" sz="800" dirty="0"/>
+          </a:p>
+        </p:txBody>
+      </p:sp>
+    </p:spTree>
+  </p:cSld>
+  <p:clrMapOvr>
+    <a:masterClrMapping/>
+  </p:clrMapOvr>
+</p:sld>
+</file>
+
+<file path=ppt/slides/slide14.xml><?xml version="1.0" encoding="utf-8"?>
+<p:sld xmlns:a="http://schemas.openxmlformats.org/drawingml/2006/main" xmlns:r="http://schemas.openxmlformats.org/officeDocument/2006/relationships" xmlns:p="http://schemas.openxmlformats.org/presentationml/2006/main">
+  <p:cSld name="Slide 14">
+    <p:bg>
+      <p:bgPr>
+        <a:solidFill>
+          <a:srgbClr val="0F172A"/>
+        </a:solidFill>
+      </p:bgPr>
+    </p:bg>
+    <p:spTree>
+      <p:nvGrpSpPr>
+        <p:cNvPr id="1" name=""/>
+        <p:cNvGrpSpPr/>
+        <p:nvPr/>
+      </p:nvGrpSpPr>
+      <p:grpSpPr>
+        <a:xfrm>
+          <a:off x="0" y="0"/>
+          <a:ext cx="0" cy="0"/>
+          <a:chOff x="0" y="0"/>
+          <a:chExt cx="0" cy="0"/>
+        </a:xfrm>
+      </p:grpSpPr>
+      <p:sp>
+        <p:nvSpPr>
+          <p:cNvPr id="2" name="Shape 0"/>
+          <p:cNvSpPr/>
+          <p:nvPr/>
+        </p:nvSpPr>
+        <p:spPr>
+          <a:xfrm>
+            <a:off x="731520" y="365760"/>
+            <a:ext cx="1371600" cy="32004"/>
+          </a:xfrm>
+          <a:prstGeom prst="rect">
+            <a:avLst/>
+          </a:prstGeom>
+          <a:solidFill>
+            <a:srgbClr val="06B6D4"/>
+          </a:solidFill>
+          <a:ln/>
+        </p:spPr>
+      </p:sp>
+      <p:sp>
+        <p:nvSpPr>
+          <p:cNvPr id="3" name="Text 1"/>
+          <p:cNvSpPr/>
+          <p:nvPr/>
+        </p:nvSpPr>
+        <p:spPr>
+          <a:xfrm>
+            <a:off x="731520" y="502920"/>
+            <a:ext cx="10698480" cy="640080"/>
+          </a:xfrm>
+          <a:prstGeom prst="rect">
+            <a:avLst/>
+          </a:prstGeom>
+          <a:noFill/>
+          <a:ln/>
+        </p:spPr>
+        <p:txBody>
+          <a:bodyPr wrap="square" lIns="0" tIns="0" rIns="0" bIns="0" rtlCol="0" anchor="ctr"/>
+          <a:lstStyle/>
+          <a:p>
+            <a:pPr indent="0" marL="0">
+              <a:buNone/>
+            </a:pPr>
+            <a:r>
+              <a:rPr lang="en-US" sz="2800" b="1" dirty="0">
+                <a:solidFill>
+                  <a:srgbClr val="F8FAFC"/>
+                </a:solidFill>
+                <a:latin typeface="Calibri" pitchFamily="34" charset="0"/>
+                <a:ea typeface="Calibri" pitchFamily="34" charset="-122"/>
+                <a:cs typeface="Calibri" pitchFamily="34" charset="-120"/>
+              </a:rPr>
+              <a:t>{{csv_source_name}}</a:t>
+            </a:r>
+            <a:endParaRPr lang="en-US" sz="2800" dirty="0"/>
+          </a:p>
+        </p:txBody>
+      </p:sp>
+      <p:sp>
+        <p:nvSpPr>
+          <p:cNvPr id="4" name="Shape 2"/>
+          <p:cNvSpPr/>
+          <p:nvPr/>
+        </p:nvSpPr>
+        <p:spPr>
+          <a:xfrm>
+            <a:off x="731520" y="1417320"/>
+            <a:ext cx="5029200" cy="777240"/>
+          </a:xfrm>
+          <a:prstGeom prst="rect">
+            <a:avLst/>
+          </a:prstGeom>
+          <a:solidFill>
+            <a:srgbClr val="1E293B"/>
+          </a:solidFill>
+          <a:ln/>
+          <a:effectLst>
+            <a:outerShdw sx="100000" sy="100000" kx="0" ky="0" algn="bl" rotWithShape="0" blurRad="101600" dist="25400" dir="8100000">
+              <a:srgbClr val="000000">
+                <a:alpha val="30000"/>
+              </a:srgbClr>
+            </a:outerShdw>
+          </a:effectLst>
+        </p:spPr>
+      </p:sp>
+      <p:sp>
+        <p:nvSpPr>
+          <p:cNvPr id="5" name="Text 3"/>
+          <p:cNvSpPr/>
+          <p:nvPr/>
+        </p:nvSpPr>
+        <p:spPr>
+          <a:xfrm>
+            <a:off x="914400" y="1463040"/>
+            <a:ext cx="4663440" cy="256032"/>
+          </a:xfrm>
+          <a:prstGeom prst="rect">
+            <a:avLst/>
+          </a:prstGeom>
+          <a:noFill/>
+          <a:ln/>
+        </p:spPr>
+        <p:txBody>
+          <a:bodyPr wrap="square" rtlCol="0" anchor="ctr"/>
+          <a:lstStyle/>
+          <a:p>
+            <a:pPr indent="0" marL="0">
+              <a:buNone/>
+            </a:pPr>
+            <a:r>
+              <a:rPr lang="en-US" sz="900" b="1" spc="100" kern="0" dirty="0">
+                <a:solidFill>
+                  <a:srgbClr val="64748B"/>
+                </a:solidFill>
+                <a:latin typeface="Calibri" pitchFamily="34" charset="0"/>
+                <a:ea typeface="Calibri" pitchFamily="34" charset="-122"/>
+                <a:cs typeface="Calibri" pitchFamily="34" charset="-120"/>
+              </a:rPr>
+              <a:t>{{csv_kpi_0_label}}</a:t>
+            </a:r>
+            <a:endParaRPr lang="en-US" sz="900" dirty="0"/>
+          </a:p>
+        </p:txBody>
+      </p:sp>
+      <p:sp>
+        <p:nvSpPr>
+          <p:cNvPr id="6" name="Text 4"/>
+          <p:cNvSpPr/>
+          <p:nvPr/>
+        </p:nvSpPr>
+        <p:spPr>
+          <a:xfrm>
+            <a:off x="914400" y="1719072"/>
+            <a:ext cx="4663440" cy="411480"/>
+          </a:xfrm>
+          <a:prstGeom prst="rect">
+            <a:avLst/>
+          </a:prstGeom>
+          <a:noFill/>
+          <a:ln/>
+        </p:spPr>
+        <p:txBody>
+          <a:bodyPr wrap="square" rtlCol="0" anchor="ctr"/>
+          <a:lstStyle/>
+          <a:p>
+            <a:pPr indent="0" marL="0">
+              <a:buNone/>
+            </a:pPr>
+            <a:r>
+              <a:rPr lang="en-US" sz="2200" b="1" dirty="0">
+                <a:solidFill>
+                  <a:srgbClr val="F8FAFC"/>
+                </a:solidFill>
+                <a:latin typeface="Calibri" pitchFamily="34" charset="0"/>
+                <a:ea typeface="Calibri" pitchFamily="34" charset="-122"/>
+                <a:cs typeface="Calibri" pitchFamily="34" charset="-120"/>
+              </a:rPr>
+              <a:t>{{csv_kpi_0_value}}</a:t>
+            </a:r>
+            <a:endParaRPr lang="en-US" sz="2200" dirty="0"/>
+          </a:p>
+        </p:txBody>
+      </p:sp>
+      <p:sp>
+        <p:nvSpPr>
+          <p:cNvPr id="7" name="Shape 5"/>
+          <p:cNvSpPr/>
+          <p:nvPr/>
+        </p:nvSpPr>
+        <p:spPr>
+          <a:xfrm>
+            <a:off x="6400800" y="1417320"/>
+            <a:ext cx="5029200" cy="777240"/>
+          </a:xfrm>
+          <a:prstGeom prst="rect">
+            <a:avLst/>
+          </a:prstGeom>
+          <a:solidFill>
+            <a:srgbClr val="1E293B"/>
+          </a:solidFill>
+          <a:ln/>
+          <a:effectLst>
+            <a:outerShdw sx="100000" sy="100000" kx="0" ky="0" algn="bl" rotWithShape="0" blurRad="101600" dist="25400" dir="8100000">
+              <a:srgbClr val="000000">
+                <a:alpha val="30000"/>
+              </a:srgbClr>
+            </a:outerShdw>
+          </a:effectLst>
+        </p:spPr>
+      </p:sp>
+      <p:sp>
+        <p:nvSpPr>
+          <p:cNvPr id="8" name="Text 6"/>
+          <p:cNvSpPr/>
+          <p:nvPr/>
+        </p:nvSpPr>
+        <p:spPr>
+          <a:xfrm>
+            <a:off x="6583680" y="1463040"/>
+            <a:ext cx="4663440" cy="256032"/>
+          </a:xfrm>
+          <a:prstGeom prst="rect">
+            <a:avLst/>
+          </a:prstGeom>
+          <a:noFill/>
+          <a:ln/>
+        </p:spPr>
+        <p:txBody>
+          <a:bodyPr wrap="square" rtlCol="0" anchor="ctr"/>
+          <a:lstStyle/>
+          <a:p>
+            <a:pPr indent="0" marL="0">
+              <a:buNone/>
+            </a:pPr>
+            <a:r>
+              <a:rPr lang="en-US" sz="900" b="1" spc="100" kern="0" dirty="0">
+                <a:solidFill>
+                  <a:srgbClr val="64748B"/>
+                </a:solidFill>
+                <a:latin typeface="Calibri" pitchFamily="34" charset="0"/>
+                <a:ea typeface="Calibri" pitchFamily="34" charset="-122"/>
+                <a:cs typeface="Calibri" pitchFamily="34" charset="-120"/>
+              </a:rPr>
+              <a:t>{{csv_kpi_1_label}}</a:t>
+            </a:r>
+            <a:endParaRPr lang="en-US" sz="900" dirty="0"/>
+          </a:p>
+        </p:txBody>
+      </p:sp>
+      <p:sp>
+        <p:nvSpPr>
+          <p:cNvPr id="9" name="Text 7"/>
+          <p:cNvSpPr/>
+          <p:nvPr/>
+        </p:nvSpPr>
+        <p:spPr>
+          <a:xfrm>
+            <a:off x="6583680" y="1719072"/>
+            <a:ext cx="4663440" cy="411480"/>
+          </a:xfrm>
+          <a:prstGeom prst="rect">
+            <a:avLst/>
+          </a:prstGeom>
+          <a:noFill/>
+          <a:ln/>
+        </p:spPr>
+        <p:txBody>
+          <a:bodyPr wrap="square" rtlCol="0" anchor="ctr"/>
+          <a:lstStyle/>
+          <a:p>
+            <a:pPr indent="0" marL="0">
+              <a:buNone/>
+            </a:pPr>
+            <a:r>
+              <a:rPr lang="en-US" sz="2200" b="1" dirty="0">
+                <a:solidFill>
+                  <a:srgbClr val="F8FAFC"/>
+                </a:solidFill>
+                <a:latin typeface="Calibri" pitchFamily="34" charset="0"/>
+                <a:ea typeface="Calibri" pitchFamily="34" charset="-122"/>
+                <a:cs typeface="Calibri" pitchFamily="34" charset="-120"/>
+              </a:rPr>
+              <a:t>{{csv_kpi_1_value}}</a:t>
+            </a:r>
+            <a:endParaRPr lang="en-US" sz="2200" dirty="0"/>
+          </a:p>
+        </p:txBody>
+      </p:sp>
+      <p:sp>
+        <p:nvSpPr>
+          <p:cNvPr id="10" name="Shape 8"/>
+          <p:cNvSpPr/>
+          <p:nvPr/>
+        </p:nvSpPr>
+        <p:spPr>
+          <a:xfrm>
+            <a:off x="731520" y="2240280"/>
+            <a:ext cx="5029200" cy="777240"/>
+          </a:xfrm>
+          <a:prstGeom prst="rect">
+            <a:avLst/>
+          </a:prstGeom>
+          <a:solidFill>
+            <a:srgbClr val="1E293B"/>
+          </a:solidFill>
+          <a:ln/>
+          <a:effectLst>
+            <a:outerShdw sx="100000" sy="100000" kx="0" ky="0" algn="bl" rotWithShape="0" blurRad="101600" dist="25400" dir="8100000">
+              <a:srgbClr val="000000">
+                <a:alpha val="30000"/>
+              </a:srgbClr>
+            </a:outerShdw>
+          </a:effectLst>
+        </p:spPr>
+      </p:sp>
+      <p:sp>
+        <p:nvSpPr>
+          <p:cNvPr id="11" name="Text 9"/>
+          <p:cNvSpPr/>
+          <p:nvPr/>
+        </p:nvSpPr>
+        <p:spPr>
+          <a:xfrm>
+            <a:off x="914400" y="2286000"/>
+            <a:ext cx="4663440" cy="256032"/>
+          </a:xfrm>
+          <a:prstGeom prst="rect">
+            <a:avLst/>
+          </a:prstGeom>
+          <a:noFill/>
+          <a:ln/>
+        </p:spPr>
+        <p:txBody>
+          <a:bodyPr wrap="square" rtlCol="0" anchor="ctr"/>
+          <a:lstStyle/>
+          <a:p>
+            <a:pPr indent="0" marL="0">
+              <a:buNone/>
+            </a:pPr>
+            <a:r>
+              <a:rPr lang="en-US" sz="900" b="1" spc="100" kern="0" dirty="0">
+                <a:solidFill>
+                  <a:srgbClr val="64748B"/>
+                </a:solidFill>
+                <a:latin typeface="Calibri" pitchFamily="34" charset="0"/>
+                <a:ea typeface="Calibri" pitchFamily="34" charset="-122"/>
+                <a:cs typeface="Calibri" pitchFamily="34" charset="-120"/>
+              </a:rPr>
+              <a:t>{{csv_kpi_2_label}}</a:t>
+            </a:r>
+            <a:endParaRPr lang="en-US" sz="900" dirty="0"/>
+          </a:p>
+        </p:txBody>
+      </p:sp>
+      <p:sp>
+        <p:nvSpPr>
+          <p:cNvPr id="12" name="Text 10"/>
+          <p:cNvSpPr/>
+          <p:nvPr/>
+        </p:nvSpPr>
+        <p:spPr>
+          <a:xfrm>
+            <a:off x="914400" y="2542032"/>
+            <a:ext cx="4663440" cy="411480"/>
+          </a:xfrm>
+          <a:prstGeom prst="rect">
+            <a:avLst/>
+          </a:prstGeom>
+          <a:noFill/>
+          <a:ln/>
+        </p:spPr>
+        <p:txBody>
+          <a:bodyPr wrap="square" rtlCol="0" anchor="ctr"/>
+          <a:lstStyle/>
+          <a:p>
+            <a:pPr indent="0" marL="0">
+              <a:buNone/>
+            </a:pPr>
+            <a:r>
+              <a:rPr lang="en-US" sz="2200" b="1" dirty="0">
+                <a:solidFill>
+                  <a:srgbClr val="F8FAFC"/>
+                </a:solidFill>
+                <a:latin typeface="Calibri" pitchFamily="34" charset="0"/>
+                <a:ea typeface="Calibri" pitchFamily="34" charset="-122"/>
+                <a:cs typeface="Calibri" pitchFamily="34" charset="-120"/>
+              </a:rPr>
+              <a:t>{{csv_kpi_2_value}}</a:t>
+            </a:r>
+            <a:endParaRPr lang="en-US" sz="2200" dirty="0"/>
+          </a:p>
+        </p:txBody>
+      </p:sp>
+      <p:sp>
+        <p:nvSpPr>
+          <p:cNvPr id="13" name="Shape 11"/>
+          <p:cNvSpPr/>
+          <p:nvPr/>
+        </p:nvSpPr>
+        <p:spPr>
+          <a:xfrm>
+            <a:off x="6400800" y="2240280"/>
+            <a:ext cx="5029200" cy="777240"/>
+          </a:xfrm>
+          <a:prstGeom prst="rect">
+            <a:avLst/>
+          </a:prstGeom>
+          <a:solidFill>
+            <a:srgbClr val="1E293B"/>
+          </a:solidFill>
+          <a:ln/>
+          <a:effectLst>
+            <a:outerShdw sx="100000" sy="100000" kx="0" ky="0" algn="bl" rotWithShape="0" blurRad="101600" dist="25400" dir="8100000">
+              <a:srgbClr val="000000">
+                <a:alpha val="30000"/>
+              </a:srgbClr>
+            </a:outerShdw>
+          </a:effectLst>
+        </p:spPr>
+      </p:sp>
+      <p:sp>
+        <p:nvSpPr>
+          <p:cNvPr id="14" name="Text 12"/>
+          <p:cNvSpPr/>
+          <p:nvPr/>
+        </p:nvSpPr>
+        <p:spPr>
+          <a:xfrm>
+            <a:off x="6583680" y="2286000"/>
+            <a:ext cx="4663440" cy="256032"/>
+          </a:xfrm>
+          <a:prstGeom prst="rect">
+            <a:avLst/>
+          </a:prstGeom>
+          <a:noFill/>
+          <a:ln/>
+        </p:spPr>
+        <p:txBody>
+          <a:bodyPr wrap="square" rtlCol="0" anchor="ctr"/>
+          <a:lstStyle/>
+          <a:p>
+            <a:pPr indent="0" marL="0">
+              <a:buNone/>
+            </a:pPr>
+            <a:r>
+              <a:rPr lang="en-US" sz="900" b="1" spc="100" kern="0" dirty="0">
+                <a:solidFill>
+                  <a:srgbClr val="64748B"/>
+                </a:solidFill>
+                <a:latin typeface="Calibri" pitchFamily="34" charset="0"/>
+                <a:ea typeface="Calibri" pitchFamily="34" charset="-122"/>
+                <a:cs typeface="Calibri" pitchFamily="34" charset="-120"/>
+              </a:rPr>
+              <a:t>{{csv_kpi_3_label}}</a:t>
+            </a:r>
+            <a:endParaRPr lang="en-US" sz="900" dirty="0"/>
+          </a:p>
+        </p:txBody>
+      </p:sp>
+      <p:sp>
+        <p:nvSpPr>
+          <p:cNvPr id="15" name="Text 13"/>
+          <p:cNvSpPr/>
+          <p:nvPr/>
+        </p:nvSpPr>
+        <p:spPr>
+          <a:xfrm>
+            <a:off x="6583680" y="2542032"/>
+            <a:ext cx="4663440" cy="411480"/>
+          </a:xfrm>
+          <a:prstGeom prst="rect">
+            <a:avLst/>
+          </a:prstGeom>
+          <a:noFill/>
+          <a:ln/>
+        </p:spPr>
+        <p:txBody>
+          <a:bodyPr wrap="square" rtlCol="0" anchor="ctr"/>
+          <a:lstStyle/>
+          <a:p>
+            <a:pPr indent="0" marL="0">
+              <a:buNone/>
+            </a:pPr>
+            <a:r>
+              <a:rPr lang="en-US" sz="2200" b="1" dirty="0">
+                <a:solidFill>
+                  <a:srgbClr val="F8FAFC"/>
+                </a:solidFill>
+                <a:latin typeface="Calibri" pitchFamily="34" charset="0"/>
+                <a:ea typeface="Calibri" pitchFamily="34" charset="-122"/>
+                <a:cs typeface="Calibri" pitchFamily="34" charset="-120"/>
+              </a:rPr>
+              <a:t>{{csv_kpi_3_value}}</a:t>
+            </a:r>
+            <a:endParaRPr lang="en-US" sz="2200" dirty="0"/>
+          </a:p>
+        </p:txBody>
+      </p:sp>
+      <p:sp>
+        <p:nvSpPr>
+          <p:cNvPr id="16" name="Shape 14"/>
+          <p:cNvSpPr/>
+          <p:nvPr/>
+        </p:nvSpPr>
+        <p:spPr>
+          <a:xfrm>
+            <a:off x="731520" y="3063240"/>
+            <a:ext cx="5029200" cy="777240"/>
+          </a:xfrm>
+          <a:prstGeom prst="rect">
+            <a:avLst/>
+          </a:prstGeom>
+          <a:solidFill>
+            <a:srgbClr val="1E293B"/>
+          </a:solidFill>
+          <a:ln/>
+          <a:effectLst>
+            <a:outerShdw sx="100000" sy="100000" kx="0" ky="0" algn="bl" rotWithShape="0" blurRad="101600" dist="25400" dir="8100000">
+              <a:srgbClr val="000000">
+                <a:alpha val="30000"/>
+              </a:srgbClr>
+            </a:outerShdw>
+          </a:effectLst>
+        </p:spPr>
+      </p:sp>
+      <p:sp>
+        <p:nvSpPr>
+          <p:cNvPr id="17" name="Text 15"/>
+          <p:cNvSpPr/>
+          <p:nvPr/>
+        </p:nvSpPr>
+        <p:spPr>
+          <a:xfrm>
+            <a:off x="914400" y="3108960"/>
+            <a:ext cx="4663440" cy="256032"/>
+          </a:xfrm>
+          <a:prstGeom prst="rect">
+            <a:avLst/>
+          </a:prstGeom>
+          <a:noFill/>
+          <a:ln/>
+        </p:spPr>
+        <p:txBody>
+          <a:bodyPr wrap="square" rtlCol="0" anchor="ctr"/>
+          <a:lstStyle/>
+          <a:p>
+            <a:pPr indent="0" marL="0">
+              <a:buNone/>
+            </a:pPr>
+            <a:r>
+              <a:rPr lang="en-US" sz="900" b="1" spc="100" kern="0" dirty="0">
+                <a:solidFill>
+                  <a:srgbClr val="64748B"/>
+                </a:solidFill>
+                <a:latin typeface="Calibri" pitchFamily="34" charset="0"/>
+                <a:ea typeface="Calibri" pitchFamily="34" charset="-122"/>
+                <a:cs typeface="Calibri" pitchFamily="34" charset="-120"/>
+              </a:rPr>
+              <a:t>{{csv_kpi_4_label}}</a:t>
+            </a:r>
+            <a:endParaRPr lang="en-US" sz="900" dirty="0"/>
+          </a:p>
+        </p:txBody>
+      </p:sp>
+      <p:sp>
+        <p:nvSpPr>
+          <p:cNvPr id="18" name="Text 16"/>
+          <p:cNvSpPr/>
+          <p:nvPr/>
+        </p:nvSpPr>
+        <p:spPr>
+          <a:xfrm>
+            <a:off x="914400" y="3364992"/>
+            <a:ext cx="4663440" cy="411480"/>
+          </a:xfrm>
+          <a:prstGeom prst="rect">
+            <a:avLst/>
+          </a:prstGeom>
+          <a:noFill/>
+          <a:ln/>
+        </p:spPr>
+        <p:txBody>
+          <a:bodyPr wrap="square" rtlCol="0" anchor="ctr"/>
+          <a:lstStyle/>
+          <a:p>
+            <a:pPr indent="0" marL="0">
+              <a:buNone/>
+            </a:pPr>
+            <a:r>
+              <a:rPr lang="en-US" sz="2200" b="1" dirty="0">
+                <a:solidFill>
+                  <a:srgbClr val="F8FAFC"/>
+                </a:solidFill>
+                <a:latin typeface="Calibri" pitchFamily="34" charset="0"/>
+                <a:ea typeface="Calibri" pitchFamily="34" charset="-122"/>
+                <a:cs typeface="Calibri" pitchFamily="34" charset="-120"/>
+              </a:rPr>
+              <a:t>{{csv_kpi_4_value}}</a:t>
+            </a:r>
+            <a:endParaRPr lang="en-US" sz="2200" dirty="0"/>
+          </a:p>
+        </p:txBody>
+      </p:sp>
+      <p:sp>
+        <p:nvSpPr>
+          <p:cNvPr id="19" name="Shape 17"/>
+          <p:cNvSpPr/>
+          <p:nvPr/>
+        </p:nvSpPr>
+        <p:spPr>
+          <a:xfrm>
+            <a:off x="6400800" y="3063240"/>
+            <a:ext cx="5029200" cy="777240"/>
+          </a:xfrm>
+          <a:prstGeom prst="rect">
+            <a:avLst/>
+          </a:prstGeom>
+          <a:solidFill>
+            <a:srgbClr val="1E293B"/>
+          </a:solidFill>
+          <a:ln/>
+          <a:effectLst>
+            <a:outerShdw sx="100000" sy="100000" kx="0" ky="0" algn="bl" rotWithShape="0" blurRad="101600" dist="25400" dir="8100000">
+              <a:srgbClr val="000000">
+                <a:alpha val="30000"/>
+              </a:srgbClr>
+            </a:outerShdw>
+          </a:effectLst>
+        </p:spPr>
+      </p:sp>
+      <p:sp>
+        <p:nvSpPr>
+          <p:cNvPr id="20" name="Text 18"/>
+          <p:cNvSpPr/>
+          <p:nvPr/>
+        </p:nvSpPr>
+        <p:spPr>
+          <a:xfrm>
+            <a:off x="6583680" y="3108960"/>
+            <a:ext cx="4663440" cy="256032"/>
+          </a:xfrm>
+          <a:prstGeom prst="rect">
+            <a:avLst/>
+          </a:prstGeom>
+          <a:noFill/>
+          <a:ln/>
+        </p:spPr>
+        <p:txBody>
+          <a:bodyPr wrap="square" rtlCol="0" anchor="ctr"/>
+          <a:lstStyle/>
+          <a:p>
+            <a:pPr indent="0" marL="0">
+              <a:buNone/>
+            </a:pPr>
+            <a:r>
+              <a:rPr lang="en-US" sz="900" b="1" spc="100" kern="0" dirty="0">
+                <a:solidFill>
+                  <a:srgbClr val="64748B"/>
+                </a:solidFill>
+                <a:latin typeface="Calibri" pitchFamily="34" charset="0"/>
+                <a:ea typeface="Calibri" pitchFamily="34" charset="-122"/>
+                <a:cs typeface="Calibri" pitchFamily="34" charset="-120"/>
+              </a:rPr>
+              <a:t>{{csv_kpi_5_label}}</a:t>
+            </a:r>
+            <a:endParaRPr lang="en-US" sz="900" dirty="0"/>
+          </a:p>
+        </p:txBody>
+      </p:sp>
+      <p:sp>
+        <p:nvSpPr>
+          <p:cNvPr id="21" name="Text 19"/>
+          <p:cNvSpPr/>
+          <p:nvPr/>
+        </p:nvSpPr>
+        <p:spPr>
+          <a:xfrm>
+            <a:off x="6583680" y="3364992"/>
+            <a:ext cx="4663440" cy="411480"/>
+          </a:xfrm>
+          <a:prstGeom prst="rect">
+            <a:avLst/>
+          </a:prstGeom>
+          <a:noFill/>
+          <a:ln/>
+        </p:spPr>
+        <p:txBody>
+          <a:bodyPr wrap="square" rtlCol="0" anchor="ctr"/>
+          <a:lstStyle/>
+          <a:p>
+            <a:pPr indent="0" marL="0">
+              <a:buNone/>
+            </a:pPr>
+            <a:r>
+              <a:rPr lang="en-US" sz="2200" b="1" dirty="0">
+                <a:solidFill>
+                  <a:srgbClr val="F8FAFC"/>
+                </a:solidFill>
+                <a:latin typeface="Calibri" pitchFamily="34" charset="0"/>
+                <a:ea typeface="Calibri" pitchFamily="34" charset="-122"/>
+                <a:cs typeface="Calibri" pitchFamily="34" charset="-120"/>
+              </a:rPr>
+              <a:t>{{csv_kpi_5_value}}</a:t>
+            </a:r>
+            <a:endParaRPr lang="en-US" sz="2200" dirty="0"/>
+          </a:p>
+        </p:txBody>
+      </p:sp>
+      <p:sp>
+        <p:nvSpPr>
+          <p:cNvPr id="22" name="Shape 20"/>
+          <p:cNvSpPr/>
+          <p:nvPr/>
+        </p:nvSpPr>
+        <p:spPr>
+          <a:xfrm>
+            <a:off x="731520" y="3657600"/>
+            <a:ext cx="10698480" cy="2377440"/>
+          </a:xfrm>
+          <a:prstGeom prst="rect">
+            <a:avLst/>
+          </a:prstGeom>
+          <a:solidFill>
+            <a:srgbClr val="1E293B"/>
+          </a:solidFill>
+          <a:ln/>
+          <a:effectLst>
+            <a:outerShdw sx="100000" sy="100000" kx="0" ky="0" algn="bl" rotWithShape="0" blurRad="101600" dist="25400" dir="8100000">
+              <a:srgbClr val="000000">
+                <a:alpha val="30000"/>
+              </a:srgbClr>
+            </a:outerShdw>
+          </a:effectLst>
+        </p:spPr>
+      </p:sp>
+      <p:sp>
+        <p:nvSpPr>
+          <p:cNvPr id="23" name="Text 21"/>
+          <p:cNvSpPr/>
+          <p:nvPr/>
+        </p:nvSpPr>
+        <p:spPr>
+          <a:xfrm>
+            <a:off x="731520" y="3657600"/>
+            <a:ext cx="10698480" cy="2377440"/>
+          </a:xfrm>
+          <a:prstGeom prst="rect">
+            <a:avLst/>
+          </a:prstGeom>
+          <a:noFill/>
+          <a:ln/>
+        </p:spPr>
+        <p:txBody>
+          <a:bodyPr wrap="square" rtlCol="0" anchor="ctr"/>
+          <a:lstStyle/>
+          <a:p>
+            <a:pPr algn="ctr" indent="0" marL="0">
+              <a:buNone/>
+            </a:pPr>
+            <a:r>
+              <a:rPr lang="en-US" sz="1000" dirty="0">
+                <a:solidFill>
+                  <a:srgbClr val="475569"/>
+                </a:solidFill>
+                <a:latin typeface="Calibri" pitchFamily="34" charset="0"/>
+                <a:ea typeface="Calibri" pitchFamily="34" charset="-122"/>
+                <a:cs typeface="Calibri" pitchFamily="34" charset="-120"/>
+              </a:rPr>
+              <a:t>{{chart_csv_data}}</a:t>
+            </a:r>
+            <a:endParaRPr lang="en-US" sz="1000" dirty="0"/>
+          </a:p>
+        </p:txBody>
+      </p:sp>
+      <p:sp>
+        <p:nvSpPr>
+          <p:cNvPr id="24" name="Shape 22"/>
+          <p:cNvSpPr/>
+          <p:nvPr/>
+        </p:nvSpPr>
+        <p:spPr>
+          <a:xfrm>
+            <a:off x="0" y="6839712"/>
+            <a:ext cx="12161520" cy="18288"/>
+          </a:xfrm>
+          <a:prstGeom prst="rect">
+            <a:avLst/>
+          </a:prstGeom>
+          <a:solidFill>
+            <a:srgbClr val="06B6D4"/>
+          </a:solidFill>
+          <a:ln/>
+        </p:spPr>
+      </p:sp>
+      <p:sp>
+        <p:nvSpPr>
+          <p:cNvPr id="25" name="Text 23"/>
+          <p:cNvSpPr/>
+          <p:nvPr/>
+        </p:nvSpPr>
+        <p:spPr>
+          <a:xfrm>
+            <a:off x="731520" y="6510528"/>
+            <a:ext cx="10698480" cy="256032"/>
+          </a:xfrm>
+          <a:prstGeom prst="rect">
+            <a:avLst/>
+          </a:prstGeom>
+          <a:noFill/>
+          <a:ln/>
+        </p:spPr>
+        <p:txBody>
+          <a:bodyPr wrap="square" rtlCol="0" anchor="ctr"/>
+          <a:lstStyle/>
+          <a:p>
+            <a:pPr indent="0" marL="0">
+              <a:buNone/>
+            </a:pPr>
+            <a:r>
+              <a:rPr lang="en-US" sz="800" dirty="0">
+                <a:solidFill>
+                  <a:srgbClr val="475569"/>
+                </a:solidFill>
+                <a:latin typeface="Calibri" pitchFamily="34" charset="0"/>
+                <a:ea typeface="Calibri" pitchFamily="34" charset="-122"/>
+                <a:cs typeface="Calibri" pitchFamily="34" charset="-120"/>
+              </a:rPr>
+              <a:t>{{agency_name}}  •  Confidential  •  Page 14</a:t>
+            </a:r>
+            <a:endParaRPr lang="en-US" sz="800" dirty="0"/>
+          </a:p>
+        </p:txBody>
+      </p:sp>
+    </p:spTree>
+  </p:cSld>
+  <p:clrMapOvr>
+    <a:masterClrMapping/>
+  </p:clrMapOvr>
+</p:sld>
+</file>
+
+<file path=ppt/slides/slide15.xml><?xml version="1.0" encoding="utf-8"?>
+<p:sld xmlns:a="http://schemas.openxmlformats.org/drawingml/2006/main" xmlns:r="http://schemas.openxmlformats.org/officeDocument/2006/relationships" xmlns:p="http://schemas.openxmlformats.org/presentationml/2006/main">
+  <p:cSld name="Slide 15">
+    <p:bg>
+      <p:bgPr>
+        <a:solidFill>
+          <a:srgbClr val="0F172A"/>
+        </a:solidFill>
+      </p:bgPr>
+    </p:bg>
+    <p:spTree>
+      <p:nvGrpSpPr>
+        <p:cNvPr id="1" name=""/>
+        <p:cNvGrpSpPr/>
+        <p:nvPr/>
+      </p:nvGrpSpPr>
+      <p:grpSpPr>
+        <a:xfrm>
+          <a:off x="0" y="0"/>
+          <a:ext cx="0" cy="0"/>
+          <a:chOff x="0" y="0"/>
+          <a:chExt cx="0" cy="0"/>
+        </a:xfrm>
+      </p:grpSpPr>
+      <p:sp>
+        <p:nvSpPr>
+          <p:cNvPr id="2" name="Shape 0"/>
+          <p:cNvSpPr/>
+          <p:nvPr/>
+        </p:nvSpPr>
+        <p:spPr>
+          <a:xfrm>
+            <a:off x="731520" y="365760"/>
+            <a:ext cx="1371600" cy="32004"/>
+          </a:xfrm>
+          <a:prstGeom prst="rect">
+            <a:avLst/>
+          </a:prstGeom>
+          <a:solidFill>
+            <a:srgbClr val="06B6D4"/>
+          </a:solidFill>
+          <a:ln/>
+        </p:spPr>
+      </p:sp>
+      <p:sp>
+        <p:nvSpPr>
+          <p:cNvPr id="3" name="Text 1"/>
+          <p:cNvSpPr/>
+          <p:nvPr/>
+        </p:nvSpPr>
+        <p:spPr>
+          <a:xfrm>
+            <a:off x="731520" y="502920"/>
+            <a:ext cx="10698480" cy="640080"/>
+          </a:xfrm>
+          <a:prstGeom prst="rect">
+            <a:avLst/>
+          </a:prstGeom>
+          <a:noFill/>
+          <a:ln/>
+        </p:spPr>
+        <p:txBody>
+          <a:bodyPr wrap="square" lIns="0" tIns="0" rIns="0" bIns="0" rtlCol="0" anchor="ctr"/>
+          <a:lstStyle/>
+          <a:p>
+            <a:pPr indent="0" marL="0">
+              <a:buNone/>
+            </a:pPr>
+            <a:r>
+              <a:rPr lang="en-US" sz="2800" b="1" dirty="0">
+                <a:solidFill>
+                  <a:srgbClr val="F8FAFC"/>
+                </a:solidFill>
+                <a:latin typeface="Calibri" pitchFamily="34" charset="0"/>
+                <a:ea typeface="Calibri" pitchFamily="34" charset="-122"/>
+                <a:cs typeface="Calibri" pitchFamily="34" charset="-120"/>
+              </a:rPr>
+              <a:t>Conversion Funnel</a:t>
+            </a:r>
+            <a:endParaRPr lang="en-US" sz="2800" dirty="0"/>
+          </a:p>
+        </p:txBody>
+      </p:sp>
+      <p:sp>
+        <p:nvSpPr>
+          <p:cNvPr id="4" name="Shape 2"/>
+          <p:cNvSpPr/>
+          <p:nvPr/>
+        </p:nvSpPr>
+        <p:spPr>
+          <a:xfrm>
+            <a:off x="731520" y="1371600"/>
+            <a:ext cx="10698480" cy="3657600"/>
+          </a:xfrm>
+          <a:prstGeom prst="rect">
+            <a:avLst/>
+          </a:prstGeom>
+          <a:solidFill>
+            <a:srgbClr val="1E293B"/>
+          </a:solidFill>
+          <a:ln/>
+          <a:effectLst>
+            <a:outerShdw sx="100000" sy="100000" kx="0" ky="0" algn="bl" rotWithShape="0" blurRad="101600" dist="25400" dir="8100000">
+              <a:srgbClr val="000000">
+                <a:alpha val="30000"/>
+              </a:srgbClr>
+            </a:outerShdw>
+          </a:effectLst>
+        </p:spPr>
+      </p:sp>
+      <p:sp>
+        <p:nvSpPr>
+          <p:cNvPr id="5" name="Text 3"/>
+          <p:cNvSpPr/>
+          <p:nvPr/>
+        </p:nvSpPr>
+        <p:spPr>
+          <a:xfrm>
+            <a:off x="731520" y="1371600"/>
+            <a:ext cx="10698480" cy="3657600"/>
+          </a:xfrm>
+          <a:prstGeom prst="rect">
+            <a:avLst/>
+          </a:prstGeom>
+          <a:noFill/>
+          <a:ln/>
+        </p:spPr>
+        <p:txBody>
+          <a:bodyPr wrap="square" rtlCol="0" anchor="ctr"/>
+          <a:lstStyle/>
+          <a:p>
+            <a:pPr algn="ctr" indent="0" marL="0">
+              <a:buNone/>
+            </a:pPr>
+            <a:r>
+              <a:rPr lang="en-US" sz="1000" dirty="0">
+                <a:solidFill>
+                  <a:srgbClr val="475569"/>
+                </a:solidFill>
+                <a:latin typeface="Calibri" pitchFamily="34" charset="0"/>
+                <a:ea typeface="Calibri" pitchFamily="34" charset="-122"/>
+                <a:cs typeface="Calibri" pitchFamily="34" charset="-120"/>
+              </a:rPr>
+              <a:t>{{chart_conversion_funnel}}</a:t>
+            </a:r>
+            <a:endParaRPr lang="en-US" sz="1000" dirty="0"/>
+          </a:p>
+        </p:txBody>
+      </p:sp>
+      <p:sp>
+        <p:nvSpPr>
+          <p:cNvPr id="6" name="Text 4"/>
+          <p:cNvSpPr/>
+          <p:nvPr/>
+        </p:nvSpPr>
+        <p:spPr>
+          <a:xfrm>
+            <a:off x="731520" y="5257800"/>
+            <a:ext cx="10698480" cy="1097280"/>
+          </a:xfrm>
+          <a:prstGeom prst="rect">
+            <a:avLst/>
+          </a:prstGeom>
+          <a:noFill/>
+          <a:ln/>
+        </p:spPr>
+        <p:txBody>
+          <a:bodyPr wrap="square" rtlCol="0" anchor="t"/>
+          <a:lstStyle/>
+          <a:p>
+            <a:pPr indent="0" marL="0">
+              <a:lnSpc>
+                <a:spcPct val="135000"/>
+              </a:lnSpc>
+              <a:buNone/>
+            </a:pPr>
+            <a:r>
+              <a:rPr lang="en-US" sz="1200" dirty="0">
+                <a:solidFill>
+                  <a:srgbClr val="CBD5E1"/>
+                </a:solidFill>
+                <a:latin typeface="Calibri" pitchFamily="34" charset="0"/>
+                <a:ea typeface="Calibri" pitchFamily="34" charset="-122"/>
+                <a:cs typeface="Calibri" pitchFamily="34" charset="-120"/>
+              </a:rPr>
+              <a:t>{{website_narrative}}</a:t>
+            </a:r>
+            <a:endParaRPr lang="en-US" sz="1200" dirty="0"/>
+          </a:p>
+        </p:txBody>
+      </p:sp>
+      <p:sp>
+        <p:nvSpPr>
+          <p:cNvPr id="7" name="Shape 5"/>
+          <p:cNvSpPr/>
+          <p:nvPr/>
+        </p:nvSpPr>
+        <p:spPr>
+          <a:xfrm>
+            <a:off x="0" y="6839712"/>
+            <a:ext cx="12161520" cy="18288"/>
+          </a:xfrm>
+          <a:prstGeom prst="rect">
+            <a:avLst/>
+          </a:prstGeom>
+          <a:solidFill>
+            <a:srgbClr val="06B6D4"/>
+          </a:solidFill>
+          <a:ln/>
+        </p:spPr>
+      </p:sp>
+      <p:sp>
+        <p:nvSpPr>
+          <p:cNvPr id="8" name="Text 6"/>
+          <p:cNvSpPr/>
+          <p:nvPr/>
+        </p:nvSpPr>
+        <p:spPr>
+          <a:xfrm>
+            <a:off x="731520" y="6510528"/>
+            <a:ext cx="10698480" cy="256032"/>
+          </a:xfrm>
+          <a:prstGeom prst="rect">
+            <a:avLst/>
+          </a:prstGeom>
+          <a:noFill/>
+          <a:ln/>
+        </p:spPr>
+        <p:txBody>
+          <a:bodyPr wrap="square" rtlCol="0" anchor="ctr"/>
+          <a:lstStyle/>
+          <a:p>
+            <a:pPr indent="0" marL="0">
+              <a:buNone/>
+            </a:pPr>
+            <a:r>
+              <a:rPr lang="en-US" sz="800" dirty="0">
+                <a:solidFill>
+                  <a:srgbClr val="475569"/>
+                </a:solidFill>
+                <a:latin typeface="Calibri" pitchFamily="34" charset="0"/>
+                <a:ea typeface="Calibri" pitchFamily="34" charset="-122"/>
+                <a:cs typeface="Calibri" pitchFamily="34" charset="-120"/>
+              </a:rPr>
+              <a:t>{{agency_name}}  •  Confidential  •  Page 15</a:t>
+            </a:r>
+            <a:endParaRPr lang="en-US" sz="800" dirty="0"/>
+          </a:p>
+        </p:txBody>
+      </p:sp>
+    </p:spTree>
+  </p:cSld>
+  <p:clrMapOvr>
+    <a:masterClrMapping/>
+  </p:clrMapOvr>
+</p:sld>
+</file>
+
+<file path=ppt/slides/slide16.xml><?xml version="1.0" encoding="utf-8"?>
+<p:sld xmlns:a="http://schemas.openxmlformats.org/drawingml/2006/main" xmlns:r="http://schemas.openxmlformats.org/officeDocument/2006/relationships" xmlns:p="http://schemas.openxmlformats.org/presentationml/2006/main">
+  <p:cSld name="Slide 16">
+    <p:bg>
+      <p:bgPr>
+        <a:solidFill>
+          <a:srgbClr val="0F172A"/>
+        </a:solidFill>
+      </p:bgPr>
+    </p:bg>
+    <p:spTree>
+      <p:nvGrpSpPr>
+        <p:cNvPr id="1" name=""/>
+        <p:cNvGrpSpPr/>
+        <p:nvPr/>
+      </p:nvGrpSpPr>
+      <p:grpSpPr>
+        <a:xfrm>
+          <a:off x="0" y="0"/>
+          <a:ext cx="0" cy="0"/>
+          <a:chOff x="0" y="0"/>
+          <a:chExt cx="0" cy="0"/>
+        </a:xfrm>
+      </p:grpSpPr>
+      <p:sp>
+        <p:nvSpPr>
+          <p:cNvPr id="2" name="Shape 0"/>
+          <p:cNvSpPr/>
+          <p:nvPr/>
+        </p:nvSpPr>
+        <p:spPr>
+          <a:xfrm>
+            <a:off x="731520" y="365760"/>
+            <a:ext cx="1371600" cy="32004"/>
+          </a:xfrm>
+          <a:prstGeom prst="rect">
+            <a:avLst/>
+          </a:prstGeom>
+          <a:solidFill>
+            <a:srgbClr val="10B981"/>
+          </a:solidFill>
+          <a:ln/>
+        </p:spPr>
+      </p:sp>
+      <p:sp>
+        <p:nvSpPr>
+          <p:cNvPr id="3" name="Text 1"/>
+          <p:cNvSpPr/>
+          <p:nvPr/>
+        </p:nvSpPr>
+        <p:spPr>
+          <a:xfrm>
+            <a:off x="731520" y="502920"/>
+            <a:ext cx="10698480" cy="640080"/>
+          </a:xfrm>
+          <a:prstGeom prst="rect">
+            <a:avLst/>
+          </a:prstGeom>
+          <a:noFill/>
+          <a:ln/>
+        </p:spPr>
+        <p:txBody>
+          <a:bodyPr wrap="square" lIns="0" tIns="0" rIns="0" bIns="0" rtlCol="0" anchor="ctr"/>
+          <a:lstStyle/>
+          <a:p>
+            <a:pPr indent="0" marL="0">
+              <a:buNone/>
+            </a:pPr>
+            <a:r>
+              <a:rPr lang="en-US" sz="2800" b="1" dirty="0">
+                <a:solidFill>
+                  <a:srgbClr val="10B981"/>
+                </a:solidFill>
+                <a:latin typeface="Calibri" pitchFamily="34" charset="0"/>
+                <a:ea typeface="Calibri" pitchFamily="34" charset="-122"/>
+                <a:cs typeface="Calibri" pitchFamily="34" charset="-120"/>
+              </a:rPr>
+              <a:t>Key Wins &amp; Highlights</a:t>
+            </a:r>
+            <a:endParaRPr lang="en-US" sz="2800" dirty="0"/>
+          </a:p>
+        </p:txBody>
+      </p:sp>
+      <p:sp>
+        <p:nvSpPr>
+          <p:cNvPr id="4" name="Shape 2"/>
+          <p:cNvSpPr/>
+          <p:nvPr/>
+        </p:nvSpPr>
+        <p:spPr>
+          <a:xfrm>
+            <a:off x="731520" y="1371600"/>
+            <a:ext cx="10698480" cy="4572000"/>
+          </a:xfrm>
+          <a:prstGeom prst="rect">
+            <a:avLst/>
+          </a:prstGeom>
+          <a:solidFill>
+            <a:srgbClr val="1E293B"/>
+          </a:solidFill>
+          <a:ln/>
+          <a:effectLst>
+            <a:outerShdw sx="100000" sy="100000" kx="0" ky="0" algn="bl" rotWithShape="0" blurRad="101600" dist="25400" dir="8100000">
+              <a:srgbClr val="000000">
+                <a:alpha val="30000"/>
+              </a:srgbClr>
+            </a:outerShdw>
+          </a:effectLst>
+        </p:spPr>
+      </p:sp>
+      <p:sp>
+        <p:nvSpPr>
+          <p:cNvPr id="5" name="Text 3"/>
+          <p:cNvSpPr/>
+          <p:nvPr/>
+        </p:nvSpPr>
+        <p:spPr>
+          <a:xfrm>
+            <a:off x="1005840" y="1554480"/>
+            <a:ext cx="10149840" cy="4114800"/>
+          </a:xfrm>
+          <a:prstGeom prst="rect">
+            <a:avLst/>
+          </a:prstGeom>
+          <a:noFill/>
+          <a:ln/>
+        </p:spPr>
+        <p:txBody>
+          <a:bodyPr wrap="square" rtlCol="0" anchor="t"/>
+          <a:lstStyle/>
+          <a:p>
+            <a:pPr indent="0" marL="0">
+              <a:lnSpc>
+                <a:spcPct val="150000"/>
+              </a:lnSpc>
+              <a:buNone/>
+            </a:pPr>
+            <a:r>
+              <a:rPr lang="en-US" sz="1200" dirty="0">
+                <a:solidFill>
+                  <a:srgbClr val="CBD5E1"/>
+                </a:solidFill>
+                <a:latin typeface="Calibri" pitchFamily="34" charset="0"/>
+                <a:ea typeface="Calibri" pitchFamily="34" charset="-122"/>
+                <a:cs typeface="Calibri" pitchFamily="34" charset="-120"/>
+              </a:rPr>
+              <a:t>{{key_wins}}</a:t>
+            </a:r>
+            <a:endParaRPr lang="en-US" sz="1200" dirty="0"/>
+          </a:p>
+        </p:txBody>
+      </p:sp>
+      <p:sp>
+        <p:nvSpPr>
+          <p:cNvPr id="6" name="Shape 4"/>
+          <p:cNvSpPr/>
+          <p:nvPr/>
+        </p:nvSpPr>
+        <p:spPr>
+          <a:xfrm>
+            <a:off x="0" y="6839712"/>
+            <a:ext cx="12161520" cy="18288"/>
+          </a:xfrm>
+          <a:prstGeom prst="rect">
+            <a:avLst/>
+          </a:prstGeom>
+          <a:solidFill>
+            <a:srgbClr val="06B6D4"/>
+          </a:solidFill>
+          <a:ln/>
+        </p:spPr>
+      </p:sp>
+      <p:sp>
+        <p:nvSpPr>
+          <p:cNvPr id="7" name="Text 5"/>
+          <p:cNvSpPr/>
+          <p:nvPr/>
+        </p:nvSpPr>
+        <p:spPr>
+          <a:xfrm>
+            <a:off x="731520" y="6510528"/>
+            <a:ext cx="10698480" cy="256032"/>
+          </a:xfrm>
+          <a:prstGeom prst="rect">
+            <a:avLst/>
+          </a:prstGeom>
+          <a:noFill/>
+          <a:ln/>
+        </p:spPr>
+        <p:txBody>
+          <a:bodyPr wrap="square" rtlCol="0" anchor="ctr"/>
+          <a:lstStyle/>
+          <a:p>
+            <a:pPr indent="0" marL="0">
+              <a:buNone/>
+            </a:pPr>
+            <a:r>
+              <a:rPr lang="en-US" sz="800" dirty="0">
+                <a:solidFill>
+                  <a:srgbClr val="475569"/>
+                </a:solidFill>
+                <a:latin typeface="Calibri" pitchFamily="34" charset="0"/>
+                <a:ea typeface="Calibri" pitchFamily="34" charset="-122"/>
+                <a:cs typeface="Calibri" pitchFamily="34" charset="-120"/>
+              </a:rPr>
+              <a:t>{{agency_name}}  •  Confidential  •  Page 16</a:t>
+            </a:r>
+            <a:endParaRPr lang="en-US" sz="800" dirty="0"/>
+          </a:p>
+        </p:txBody>
+      </p:sp>
+    </p:spTree>
+  </p:cSld>
+  <p:clrMapOvr>
+    <a:masterClrMapping/>
+  </p:clrMapOvr>
+</p:sld>
+</file>
+
+<file path=ppt/slides/slide17.xml><?xml version="1.0" encoding="utf-8"?>
+<p:sld xmlns:a="http://schemas.openxmlformats.org/drawingml/2006/main" xmlns:r="http://schemas.openxmlformats.org/officeDocument/2006/relationships" xmlns:p="http://schemas.openxmlformats.org/presentationml/2006/main">
+  <p:cSld name="Slide 17">
+    <p:bg>
+      <p:bgPr>
+        <a:solidFill>
+          <a:srgbClr val="0F172A"/>
+        </a:solidFill>
+      </p:bgPr>
+    </p:bg>
+    <p:spTree>
+      <p:nvGrpSpPr>
+        <p:cNvPr id="1" name=""/>
+        <p:cNvGrpSpPr/>
+        <p:nvPr/>
+      </p:nvGrpSpPr>
+      <p:grpSpPr>
+        <a:xfrm>
+          <a:off x="0" y="0"/>
+          <a:ext cx="0" cy="0"/>
+          <a:chOff x="0" y="0"/>
+          <a:chExt cx="0" cy="0"/>
+        </a:xfrm>
+      </p:grpSpPr>
+      <p:sp>
+        <p:nvSpPr>
+          <p:cNvPr id="2" name="Shape 0"/>
+          <p:cNvSpPr/>
+          <p:nvPr/>
+        </p:nvSpPr>
+        <p:spPr>
+          <a:xfrm>
+            <a:off x="731520" y="365760"/>
+            <a:ext cx="1371600" cy="32004"/>
+          </a:xfrm>
+          <a:prstGeom prst="rect">
+            <a:avLst/>
+          </a:prstGeom>
+          <a:solidFill>
+            <a:srgbClr val="F59E0B"/>
+          </a:solidFill>
+          <a:ln/>
+        </p:spPr>
+      </p:sp>
+      <p:sp>
+        <p:nvSpPr>
+          <p:cNvPr id="3" name="Text 1"/>
+          <p:cNvSpPr/>
+          <p:nvPr/>
+        </p:nvSpPr>
+        <p:spPr>
+          <a:xfrm>
+            <a:off x="731520" y="502920"/>
+            <a:ext cx="10698480" cy="640080"/>
+          </a:xfrm>
+          <a:prstGeom prst="rect">
+            <a:avLst/>
+          </a:prstGeom>
+          <a:noFill/>
+          <a:ln/>
+        </p:spPr>
+        <p:txBody>
+          <a:bodyPr wrap="square" lIns="0" tIns="0" rIns="0" bIns="0" rtlCol="0" anchor="ctr"/>
+          <a:lstStyle/>
+          <a:p>
+            <a:pPr indent="0" marL="0">
+              <a:buNone/>
+            </a:pPr>
+            <a:r>
+              <a:rPr lang="en-US" sz="2800" b="1" dirty="0">
+                <a:solidFill>
+                  <a:srgbClr val="F59E0B"/>
+                </a:solidFill>
+                <a:latin typeface="Calibri" pitchFamily="34" charset="0"/>
+                <a:ea typeface="Calibri" pitchFamily="34" charset="-122"/>
+                <a:cs typeface="Calibri" pitchFamily="34" charset="-120"/>
+              </a:rPr>
+              <a:t>Concerns &amp; Recommendations</a:t>
+            </a:r>
+            <a:endParaRPr lang="en-US" sz="2800" dirty="0"/>
+          </a:p>
+        </p:txBody>
+      </p:sp>
+      <p:sp>
+        <p:nvSpPr>
+          <p:cNvPr id="4" name="Shape 2"/>
+          <p:cNvSpPr/>
+          <p:nvPr/>
+        </p:nvSpPr>
+        <p:spPr>
+          <a:xfrm>
+            <a:off x="731520" y="1371600"/>
+            <a:ext cx="10698480" cy="4572000"/>
+          </a:xfrm>
+          <a:prstGeom prst="rect">
+            <a:avLst/>
+          </a:prstGeom>
+          <a:solidFill>
+            <a:srgbClr val="1E293B"/>
+          </a:solidFill>
+          <a:ln/>
+          <a:effectLst>
+            <a:outerShdw sx="100000" sy="100000" kx="0" ky="0" algn="bl" rotWithShape="0" blurRad="101600" dist="25400" dir="8100000">
+              <a:srgbClr val="000000">
+                <a:alpha val="30000"/>
+              </a:srgbClr>
+            </a:outerShdw>
+          </a:effectLst>
+        </p:spPr>
+      </p:sp>
+      <p:sp>
+        <p:nvSpPr>
+          <p:cNvPr id="5" name="Text 3"/>
+          <p:cNvSpPr/>
+          <p:nvPr/>
+        </p:nvSpPr>
+        <p:spPr>
+          <a:xfrm>
+            <a:off x="1005840" y="1554480"/>
+            <a:ext cx="10149840" cy="4114800"/>
+          </a:xfrm>
+          <a:prstGeom prst="rect">
+            <a:avLst/>
+          </a:prstGeom>
+          <a:noFill/>
+          <a:ln/>
+        </p:spPr>
+        <p:txBody>
+          <a:bodyPr wrap="square" rtlCol="0" anchor="t"/>
+          <a:lstStyle/>
+          <a:p>
+            <a:pPr indent="0" marL="0">
+              <a:lnSpc>
+                <a:spcPct val="150000"/>
+              </a:lnSpc>
+              <a:buNone/>
+            </a:pPr>
+            <a:r>
+              <a:rPr lang="en-US" sz="1200" dirty="0">
+                <a:solidFill>
+                  <a:srgbClr val="CBD5E1"/>
+                </a:solidFill>
+                <a:latin typeface="Calibri" pitchFamily="34" charset="0"/>
+                <a:ea typeface="Calibri" pitchFamily="34" charset="-122"/>
+                <a:cs typeface="Calibri" pitchFamily="34" charset="-120"/>
+              </a:rPr>
+              <a:t>{{concerns}}</a:t>
+            </a:r>
+            <a:endParaRPr lang="en-US" sz="1200" dirty="0"/>
+          </a:p>
+        </p:txBody>
+      </p:sp>
+      <p:sp>
+        <p:nvSpPr>
+          <p:cNvPr id="6" name="Shape 4"/>
+          <p:cNvSpPr/>
+          <p:nvPr/>
+        </p:nvSpPr>
+        <p:spPr>
+          <a:xfrm>
+            <a:off x="0" y="6839712"/>
+            <a:ext cx="12161520" cy="18288"/>
+          </a:xfrm>
+          <a:prstGeom prst="rect">
+            <a:avLst/>
+          </a:prstGeom>
+          <a:solidFill>
+            <a:srgbClr val="06B6D4"/>
+          </a:solidFill>
+          <a:ln/>
+        </p:spPr>
+      </p:sp>
+      <p:sp>
+        <p:nvSpPr>
+          <p:cNvPr id="7" name="Text 5"/>
+          <p:cNvSpPr/>
+          <p:nvPr/>
+        </p:nvSpPr>
+        <p:spPr>
+          <a:xfrm>
+            <a:off x="731520" y="6510528"/>
+            <a:ext cx="10698480" cy="256032"/>
+          </a:xfrm>
+          <a:prstGeom prst="rect">
+            <a:avLst/>
+          </a:prstGeom>
+          <a:noFill/>
+          <a:ln/>
+        </p:spPr>
+        <p:txBody>
+          <a:bodyPr wrap="square" rtlCol="0" anchor="ctr"/>
+          <a:lstStyle/>
+          <a:p>
+            <a:pPr indent="0" marL="0">
+              <a:buNone/>
+            </a:pPr>
+            <a:r>
+              <a:rPr lang="en-US" sz="800" dirty="0">
+                <a:solidFill>
+                  <a:srgbClr val="475569"/>
+                </a:solidFill>
+                <a:latin typeface="Calibri" pitchFamily="34" charset="0"/>
+                <a:ea typeface="Calibri" pitchFamily="34" charset="-122"/>
+                <a:cs typeface="Calibri" pitchFamily="34" charset="-120"/>
+              </a:rPr>
+              <a:t>{{agency_name}}  •  Confidential  •  Page 17</a:t>
+            </a:r>
+            <a:endParaRPr lang="en-US" sz="800" dirty="0"/>
+          </a:p>
+        </p:txBody>
+      </p:sp>
+    </p:spTree>
+  </p:cSld>
+  <p:clrMapOvr>
+    <a:masterClrMapping/>
+  </p:clrMapOvr>
+</p:sld>
+</file>
+
+<file path=ppt/slides/slide18.xml><?xml version="1.0" encoding="utf-8"?>
+<p:sld xmlns:a="http://schemas.openxmlformats.org/drawingml/2006/main" xmlns:r="http://schemas.openxmlformats.org/officeDocument/2006/relationships" xmlns:p="http://schemas.openxmlformats.org/presentationml/2006/main">
+  <p:cSld name="Slide 18">
+    <p:bg>
+      <p:bgPr>
+        <a:solidFill>
+          <a:srgbClr val="0F172A"/>
+        </a:solidFill>
+      </p:bgPr>
+    </p:bg>
+    <p:spTree>
+      <p:nvGrpSpPr>
+        <p:cNvPr id="1" name=""/>
+        <p:cNvGrpSpPr/>
+        <p:nvPr/>
+      </p:nvGrpSpPr>
+      <p:grpSpPr>
+        <a:xfrm>
+          <a:off x="0" y="0"/>
+          <a:ext cx="0" cy="0"/>
+          <a:chOff x="0" y="0"/>
+          <a:chExt cx="0" cy="0"/>
+        </a:xfrm>
+      </p:grpSpPr>
+      <p:sp>
+        <p:nvSpPr>
+          <p:cNvPr id="2" name="Shape 0"/>
+          <p:cNvSpPr/>
+          <p:nvPr/>
+        </p:nvSpPr>
+        <p:spPr>
+          <a:xfrm>
+            <a:off x="731520" y="365760"/>
+            <a:ext cx="1371600" cy="32004"/>
+          </a:xfrm>
+          <a:prstGeom prst="rect">
+            <a:avLst/>
+          </a:prstGeom>
+          <a:solidFill>
+            <a:srgbClr val="06B6D4"/>
+          </a:solidFill>
+          <a:ln/>
+        </p:spPr>
+      </p:sp>
+      <p:sp>
+        <p:nvSpPr>
+          <p:cNvPr id="3" name="Text 1"/>
+          <p:cNvSpPr/>
+          <p:nvPr/>
+        </p:nvSpPr>
+        <p:spPr>
+          <a:xfrm>
+            <a:off x="731520" y="502920"/>
+            <a:ext cx="10698480" cy="640080"/>
+          </a:xfrm>
+          <a:prstGeom prst="rect">
+            <a:avLst/>
+          </a:prstGeom>
+          <a:noFill/>
+          <a:ln/>
+        </p:spPr>
+        <p:txBody>
+          <a:bodyPr wrap="square" lIns="0" tIns="0" rIns="0" bIns="0" rtlCol="0" anchor="ctr"/>
+          <a:lstStyle/>
+          <a:p>
+            <a:pPr indent="0" marL="0">
+              <a:buNone/>
+            </a:pPr>
+            <a:r>
+              <a:rPr lang="en-US" sz="2800" b="1" dirty="0">
+                <a:solidFill>
+                  <a:srgbClr val="F8FAFC"/>
+                </a:solidFill>
+                <a:latin typeface="Calibri" pitchFamily="34" charset="0"/>
+                <a:ea typeface="Calibri" pitchFamily="34" charset="-122"/>
+                <a:cs typeface="Calibri" pitchFamily="34" charset="-120"/>
+              </a:rPr>
+              <a:t>Next Steps &amp; Action Items</a:t>
+            </a:r>
+            <a:endParaRPr lang="en-US" sz="2800" dirty="0"/>
+          </a:p>
+        </p:txBody>
+      </p:sp>
+      <p:sp>
+        <p:nvSpPr>
+          <p:cNvPr id="4" name="Shape 2"/>
+          <p:cNvSpPr/>
+          <p:nvPr/>
+        </p:nvSpPr>
+        <p:spPr>
+          <a:xfrm>
+            <a:off x="731520" y="1371600"/>
+            <a:ext cx="10698480" cy="3657600"/>
+          </a:xfrm>
+          <a:prstGeom prst="rect">
+            <a:avLst/>
+          </a:prstGeom>
+          <a:solidFill>
+            <a:srgbClr val="1E293B"/>
+          </a:solidFill>
+          <a:ln/>
+          <a:effectLst>
+            <a:outerShdw sx="100000" sy="100000" kx="0" ky="0" algn="bl" rotWithShape="0" blurRad="101600" dist="25400" dir="8100000">
+              <a:srgbClr val="000000">
+                <a:alpha val="30000"/>
+              </a:srgbClr>
+            </a:outerShdw>
+          </a:effectLst>
+        </p:spPr>
+      </p:sp>
+      <p:sp>
+        <p:nvSpPr>
+          <p:cNvPr id="5" name="Text 3"/>
+          <p:cNvSpPr/>
+          <p:nvPr/>
+        </p:nvSpPr>
+        <p:spPr>
+          <a:xfrm>
+            <a:off x="1005840" y="1554480"/>
+            <a:ext cx="10149840" cy="3200400"/>
+          </a:xfrm>
+          <a:prstGeom prst="rect">
+            <a:avLst/>
+          </a:prstGeom>
+          <a:noFill/>
+          <a:ln/>
+        </p:spPr>
+        <p:txBody>
+          <a:bodyPr wrap="square" rtlCol="0" anchor="t"/>
+          <a:lstStyle/>
+          <a:p>
+            <a:pPr indent="0" marL="0">
+              <a:lnSpc>
+                <a:spcPct val="150000"/>
+              </a:lnSpc>
+              <a:buNone/>
+            </a:pPr>
+            <a:r>
+              <a:rPr lang="en-US" sz="1200" dirty="0">
+                <a:solidFill>
+                  <a:srgbClr val="CBD5E1"/>
+                </a:solidFill>
+                <a:latin typeface="Calibri" pitchFamily="34" charset="0"/>
+                <a:ea typeface="Calibri" pitchFamily="34" charset="-122"/>
+                <a:cs typeface="Calibri" pitchFamily="34" charset="-120"/>
+              </a:rPr>
+              <a:t>{{next_steps}}</a:t>
+            </a:r>
+            <a:endParaRPr lang="en-US" sz="1200" dirty="0"/>
+          </a:p>
+        </p:txBody>
+      </p:sp>
+      <p:sp>
+        <p:nvSpPr>
+          <p:cNvPr id="6" name="Shape 4"/>
+          <p:cNvSpPr/>
+          <p:nvPr/>
+        </p:nvSpPr>
+        <p:spPr>
+          <a:xfrm>
+            <a:off x="0" y="5760720"/>
+            <a:ext cx="12161520" cy="1097280"/>
+          </a:xfrm>
+          <a:prstGeom prst="rect">
+            <a:avLst/>
+          </a:prstGeom>
+          <a:solidFill>
+            <a:srgbClr val="164E63"/>
+          </a:solidFill>
+          <a:ln/>
+        </p:spPr>
+      </p:sp>
+      <p:sp>
+        <p:nvSpPr>
+          <p:cNvPr id="7" name="Text 5"/>
+          <p:cNvSpPr/>
+          <p:nvPr/>
+        </p:nvSpPr>
+        <p:spPr>
+          <a:xfrm>
+            <a:off x="731520" y="5806440"/>
+            <a:ext cx="10698480" cy="411480"/>
+          </a:xfrm>
+          <a:prstGeom prst="rect">
+            <a:avLst/>
+          </a:prstGeom>
+          <a:noFill/>
+          <a:ln/>
+        </p:spPr>
+        <p:txBody>
+          <a:bodyPr wrap="square" rtlCol="0" anchor="ctr"/>
+          <a:lstStyle/>
+          <a:p>
+            <a:pPr indent="0" marL="0">
+              <a:buNone/>
+            </a:pPr>
+            <a:r>
+              <a:rPr lang="en-US" sz="1300" b="1" dirty="0">
+                <a:solidFill>
+                  <a:srgbClr val="06B6D4"/>
+                </a:solidFill>
+                <a:latin typeface="Calibri" pitchFamily="34" charset="0"/>
+                <a:ea typeface="Calibri" pitchFamily="34" charset="-122"/>
+                <a:cs typeface="Calibri" pitchFamily="34" charset="-120"/>
+              </a:rPr>
+              <a:t>Questions? Reply to this email or schedule a call.</a:t>
+            </a:r>
+            <a:endParaRPr lang="en-US" sz="1300" dirty="0"/>
+          </a:p>
+        </p:txBody>
+      </p:sp>
+      <p:sp>
+        <p:nvSpPr>
+          <p:cNvPr id="8" name="Text 6"/>
+          <p:cNvSpPr/>
+          <p:nvPr/>
+        </p:nvSpPr>
+        <p:spPr>
+          <a:xfrm>
+            <a:off x="731520" y="6263640"/>
+            <a:ext cx="10698480" cy="320040"/>
+          </a:xfrm>
+          <a:prstGeom prst="rect">
+            <a:avLst/>
+          </a:prstGeom>
+          <a:noFill/>
+          <a:ln/>
+        </p:spPr>
+        <p:txBody>
+          <a:bodyPr wrap="square" rtlCol="0" anchor="ctr"/>
+          <a:lstStyle/>
+          <a:p>
+            <a:pPr indent="0" marL="0">
+              <a:buNone/>
+            </a:pPr>
+            <a:r>
+              <a:rPr lang="en-US" sz="1100" dirty="0">
+                <a:solidFill>
+                  <a:srgbClr val="CBD5E1"/>
+                </a:solidFill>
+                <a:latin typeface="Calibri" pitchFamily="34" charset="0"/>
+                <a:ea typeface="Calibri" pitchFamily="34" charset="-122"/>
+                <a:cs typeface="Calibri" pitchFamily="34" charset="-120"/>
+              </a:rPr>
+              <a:t>{{agency_name}}  •  {{agency_email}}</a:t>
+            </a:r>
+            <a:endParaRPr lang="en-US" sz="1100" dirty="0"/>
+          </a:p>
+        </p:txBody>
+      </p:sp>
+    </p:spTree>
+  </p:cSld>
+  <p:clrMapOvr>
+    <a:masterClrMapping/>
+  </p:clrMapOvr>
+</p:sld>
+</file>
+
+<file path=ppt/slides/slide19.xml><?xml version="1.0" encoding="utf-8"?>
+<p:sld xmlns:a="http://schemas.openxmlformats.org/drawingml/2006/main" xmlns:r="http://schemas.openxmlformats.org/officeDocument/2006/relationships" xmlns:p="http://schemas.openxmlformats.org/presentationml/2006/main">
+  <p:cSld name="Slide 19">
+    <p:bg>
+      <p:bgPr>
+        <a:solidFill>
+          <a:srgbClr val="0F172A"/>
+        </a:solidFill>
+      </p:bgPr>
+    </p:bg>
+    <p:spTree>
+      <p:nvGrpSpPr>
+        <p:cNvPr id="1" name=""/>
+        <p:cNvGrpSpPr/>
+        <p:nvPr/>
+      </p:nvGrpSpPr>
+      <p:grpSpPr>
+        <a:xfrm>
+          <a:off x="0" y="0"/>
+          <a:ext cx="0" cy="0"/>
+          <a:chOff x="0" y="0"/>
+          <a:chExt cx="0" cy="0"/>
+        </a:xfrm>
+      </p:grpSpPr>
+      <p:sp>
+        <p:nvSpPr>
+          <p:cNvPr id="2" name="Shape 0"/>
+          <p:cNvSpPr/>
+          <p:nvPr/>
+        </p:nvSpPr>
+        <p:spPr>
+          <a:xfrm>
+            <a:off x="731520" y="365760"/>
+            <a:ext cx="1371600" cy="32004"/>
+          </a:xfrm>
+          <a:prstGeom prst="rect">
+            <a:avLst/>
+          </a:prstGeom>
+          <a:solidFill>
+            <a:srgbClr val="06B6D4"/>
+          </a:solidFill>
+          <a:ln/>
+        </p:spPr>
+      </p:sp>
+      <p:sp>
+        <p:nvSpPr>
+          <p:cNvPr id="3" name="Text 1"/>
+          <p:cNvSpPr/>
+          <p:nvPr/>
+        </p:nvSpPr>
+        <p:spPr>
+          <a:xfrm>
+            <a:off x="731520" y="502920"/>
+            <a:ext cx="10698480" cy="640080"/>
+          </a:xfrm>
+          <a:prstGeom prst="rect">
+            <a:avLst/>
+          </a:prstGeom>
+          <a:noFill/>
+          <a:ln/>
+        </p:spPr>
+        <p:txBody>
+          <a:bodyPr wrap="square" lIns="0" tIns="0" rIns="0" bIns="0" rtlCol="0" anchor="ctr"/>
+          <a:lstStyle/>
+          <a:p>
+            <a:pPr indent="0" marL="0">
+              <a:buNone/>
+            </a:pPr>
+            <a:r>
+              <a:rPr lang="en-US" sz="2800" b="1" dirty="0">
+                <a:solidFill>
+                  <a:srgbClr val="F8FAFC"/>
+                </a:solidFill>
+                <a:latin typeface="Calibri" pitchFamily="34" charset="0"/>
+                <a:ea typeface="Calibri" pitchFamily="34" charset="-122"/>
+                <a:cs typeface="Calibri" pitchFamily="34" charset="-120"/>
+              </a:rPr>
+              <a:t>{{custom_section_title}}</a:t>
+            </a:r>
+            <a:endParaRPr lang="en-US" sz="2800" dirty="0"/>
+          </a:p>
+        </p:txBody>
+      </p:sp>
+      <p:sp>
+        <p:nvSpPr>
+          <p:cNvPr id="4" name="Shape 2"/>
+          <p:cNvSpPr/>
+          <p:nvPr/>
+        </p:nvSpPr>
+        <p:spPr>
+          <a:xfrm>
+            <a:off x="731520" y="1371600"/>
+            <a:ext cx="10698480" cy="4572000"/>
+          </a:xfrm>
+          <a:prstGeom prst="rect">
+            <a:avLst/>
+          </a:prstGeom>
+          <a:solidFill>
+            <a:srgbClr val="1E293B"/>
+          </a:solidFill>
+          <a:ln/>
+          <a:effectLst>
+            <a:outerShdw sx="100000" sy="100000" kx="0" ky="0" algn="bl" rotWithShape="0" blurRad="101600" dist="25400" dir="8100000">
+              <a:srgbClr val="000000">
+                <a:alpha val="30000"/>
+              </a:srgbClr>
+            </a:outerShdw>
+          </a:effectLst>
+        </p:spPr>
+      </p:sp>
+      <p:sp>
+        <p:nvSpPr>
+          <p:cNvPr id="5" name="Text 3"/>
+          <p:cNvSpPr/>
+          <p:nvPr/>
+        </p:nvSpPr>
+        <p:spPr>
+          <a:xfrm>
+            <a:off x="1005840" y="1554480"/>
+            <a:ext cx="10149840" cy="4114800"/>
+          </a:xfrm>
+          <a:prstGeom prst="rect">
+            <a:avLst/>
+          </a:prstGeom>
+          <a:noFill/>
+          <a:ln/>
+        </p:spPr>
+        <p:txBody>
+          <a:bodyPr wrap="square" rtlCol="0" anchor="t"/>
+          <a:lstStyle/>
+          <a:p>
+            <a:pPr indent="0" marL="0">
+              <a:lnSpc>
+                <a:spcPct val="140000"/>
+              </a:lnSpc>
+              <a:buNone/>
+            </a:pPr>
+            <a:r>
+              <a:rPr lang="en-US" sz="1200" dirty="0">
+                <a:solidFill>
+                  <a:srgbClr val="CBD5E1"/>
+                </a:solidFill>
+                <a:latin typeface="Calibri" pitchFamily="34" charset="0"/>
+                <a:ea typeface="Calibri" pitchFamily="34" charset="-122"/>
+                <a:cs typeface="Calibri" pitchFamily="34" charset="-120"/>
+              </a:rPr>
+              <a:t>{{custom_section_text}}</a:t>
+            </a:r>
+            <a:endParaRPr lang="en-US" sz="1200" dirty="0"/>
+          </a:p>
+        </p:txBody>
+      </p:sp>
+      <p:sp>
+        <p:nvSpPr>
+          <p:cNvPr id="6" name="Shape 4"/>
+          <p:cNvSpPr/>
+          <p:nvPr/>
+        </p:nvSpPr>
+        <p:spPr>
+          <a:xfrm>
+            <a:off x="0" y="6839712"/>
+            <a:ext cx="12161520" cy="18288"/>
+          </a:xfrm>
+          <a:prstGeom prst="rect">
+            <a:avLst/>
+          </a:prstGeom>
+          <a:solidFill>
+            <a:srgbClr val="06B6D4"/>
+          </a:solidFill>
+          <a:ln/>
+        </p:spPr>
+      </p:sp>
+      <p:sp>
+        <p:nvSpPr>
+          <p:cNvPr id="7" name="Text 5"/>
+          <p:cNvSpPr/>
+          <p:nvPr/>
+        </p:nvSpPr>
+        <p:spPr>
+          <a:xfrm>
+            <a:off x="731520" y="6510528"/>
+            <a:ext cx="10698480" cy="256032"/>
+          </a:xfrm>
+          <a:prstGeom prst="rect">
+            <a:avLst/>
+          </a:prstGeom>
+          <a:noFill/>
+          <a:ln/>
+        </p:spPr>
+        <p:txBody>
+          <a:bodyPr wrap="square" rtlCol="0" anchor="ctr"/>
+          <a:lstStyle/>
+          <a:p>
+            <a:pPr indent="0" marL="0">
+              <a:buNone/>
+            </a:pPr>
+            <a:r>
+              <a:rPr lang="en-US" sz="800" dirty="0">
+                <a:solidFill>
+                  <a:srgbClr val="475569"/>
+                </a:solidFill>
+                <a:latin typeface="Calibri" pitchFamily="34" charset="0"/>
+                <a:ea typeface="Calibri" pitchFamily="34" charset="-122"/>
+                <a:cs typeface="Calibri" pitchFamily="34" charset="-120"/>
+              </a:rPr>
+              <a:t>{{agency_name}}  •  Confidential  •  Page 19</a:t>
+            </a:r>
+            <a:endParaRPr lang="en-US" sz="800" dirty="0"/>
+          </a:p>
+        </p:txBody>
+      </p:sp>
+    </p:spTree>
+  </p:cSld>
+  <p:clrMapOvr>
+    <a:masterClrMapping/>
+  </p:clrMapOvr>
+</p:sld>
+</file>
+
 <file path=ppt/slides/slide2.xml><?xml version="1.0" encoding="utf-8"?>
 <p:sld xmlns:a="http://schemas.openxmlformats.org/drawingml/2006/main" xmlns:r="http://schemas.openxmlformats.org/officeDocument/2006/relationships" xmlns:p="http://schemas.openxmlformats.org/presentationml/2006/main">
   <p:cSld name="Slide 2">
@@ -3662,7 +7735,7 @@
                 <a:ea typeface="Calibri" pitchFamily="34" charset="-122"/>
                 <a:cs typeface="Calibri" pitchFamily="34" charset="-120"/>
               </a:rPr>
-              <a:t>Paid Advertising — Meta Ads</a:t>
+              <a:t>Website Engagement</a:t>
             </a:r>
             <a:endParaRPr lang="en-US" sz="2800" dirty="0"/>
           </a:p>
@@ -3728,7 +7801,7 @@
                 <a:ea typeface="Calibri" pitchFamily="34" charset="-122"/>
                 <a:cs typeface="Calibri" pitchFamily="34" charset="-120"/>
               </a:rPr>
-              <a:t>{{chart_spend}}</a:t>
+              <a:t>{{chart_device_breakdown}}</a:t>
             </a:r>
             <a:endParaRPr lang="en-US" sz="1000" dirty="0"/>
           </a:p>
@@ -3794,7 +7867,7 @@
                 <a:ea typeface="Calibri" pitchFamily="34" charset="-122"/>
                 <a:cs typeface="Calibri" pitchFamily="34" charset="-120"/>
               </a:rPr>
-              <a:t>{{chart_campaigns}}</a:t>
+              <a:t>{{chart_top_pages}}</a:t>
             </a:r>
             <a:endParaRPr lang="en-US" sz="1000" dirty="0"/>
           </a:p>
@@ -3836,7 +7909,7 @@
                 <a:ea typeface="Calibri" pitchFamily="34" charset="-122"/>
                 <a:cs typeface="Calibri" pitchFamily="34" charset="-120"/>
               </a:rPr>
-              <a:t>{{ads_narrative}}</a:t>
+              <a:t>{{website_narrative}}</a:t>
             </a:r>
             <a:endParaRPr lang="en-US" sz="1200" dirty="0"/>
           </a:p>
@@ -3948,7 +8021,7 @@
             <a:avLst/>
           </a:prstGeom>
           <a:solidFill>
-            <a:srgbClr val="10B981"/>
+            <a:srgbClr val="06B6D4"/>
           </a:solidFill>
           <a:ln/>
         </p:spPr>
@@ -3980,13 +8053,13 @@
             <a:r>
               <a:rPr lang="en-US" sz="2800" b="1" dirty="0">
                 <a:solidFill>
-                  <a:srgbClr val="10B981"/>
-                </a:solidFill>
-                <a:latin typeface="Calibri" pitchFamily="34" charset="0"/>
-                <a:ea typeface="Calibri" pitchFamily="34" charset="-122"/>
-                <a:cs typeface="Calibri" pitchFamily="34" charset="-120"/>
-              </a:rPr>
-              <a:t>Key Wins &amp; Highlights</a:t>
+                  <a:srgbClr val="F8FAFC"/>
+                </a:solidFill>
+                <a:latin typeface="Calibri" pitchFamily="34" charset="0"/>
+                <a:ea typeface="Calibri" pitchFamily="34" charset="-122"/>
+                <a:cs typeface="Calibri" pitchFamily="34" charset="-120"/>
+              </a:rPr>
+              <a:t>Audience Insights</a:t>
             </a:r>
             <a:endParaRPr lang="en-US" sz="2800" dirty="0"/>
           </a:p>
@@ -4001,7 +8074,7 @@
         <p:spPr>
           <a:xfrm>
             <a:off x="731520" y="1371600"/>
-            <a:ext cx="10698480" cy="4572000"/>
+            <a:ext cx="5120640" cy="2743200"/>
           </a:xfrm>
           <a:prstGeom prst="rect">
             <a:avLst/>
@@ -4027,8 +8100,113 @@
         </p:nvSpPr>
         <p:spPr>
           <a:xfrm>
-            <a:off x="1005840" y="1554480"/>
-            <a:ext cx="10149840" cy="4114800"/>
+            <a:off x="731520" y="1371600"/>
+            <a:ext cx="5120640" cy="2743200"/>
+          </a:xfrm>
+          <a:prstGeom prst="rect">
+            <a:avLst/>
+          </a:prstGeom>
+          <a:noFill/>
+          <a:ln/>
+        </p:spPr>
+        <p:txBody>
+          <a:bodyPr wrap="square" rtlCol="0" anchor="ctr"/>
+          <a:lstStyle/>
+          <a:p>
+            <a:pPr algn="ctr" indent="0" marL="0">
+              <a:buNone/>
+            </a:pPr>
+            <a:r>
+              <a:rPr lang="en-US" sz="1000" dirty="0">
+                <a:solidFill>
+                  <a:srgbClr val="475569"/>
+                </a:solidFill>
+                <a:latin typeface="Calibri" pitchFamily="34" charset="0"/>
+                <a:ea typeface="Calibri" pitchFamily="34" charset="-122"/>
+                <a:cs typeface="Calibri" pitchFamily="34" charset="-120"/>
+              </a:rPr>
+              <a:t>{{chart_new_vs_returning}}</a:t>
+            </a:r>
+            <a:endParaRPr lang="en-US" sz="1000" dirty="0"/>
+          </a:p>
+        </p:txBody>
+      </p:sp>
+      <p:sp>
+        <p:nvSpPr>
+          <p:cNvPr id="6" name="Shape 4"/>
+          <p:cNvSpPr/>
+          <p:nvPr/>
+        </p:nvSpPr>
+        <p:spPr>
+          <a:xfrm>
+            <a:off x="6217920" y="1371600"/>
+            <a:ext cx="5212080" cy="2743200"/>
+          </a:xfrm>
+          <a:prstGeom prst="rect">
+            <a:avLst/>
+          </a:prstGeom>
+          <a:solidFill>
+            <a:srgbClr val="1E293B"/>
+          </a:solidFill>
+          <a:ln/>
+          <a:effectLst>
+            <a:outerShdw sx="100000" sy="100000" kx="0" ky="0" algn="bl" rotWithShape="0" blurRad="101600" dist="25400" dir="8100000">
+              <a:srgbClr val="000000">
+                <a:alpha val="30000"/>
+              </a:srgbClr>
+            </a:outerShdw>
+          </a:effectLst>
+        </p:spPr>
+      </p:sp>
+      <p:sp>
+        <p:nvSpPr>
+          <p:cNvPr id="7" name="Text 5"/>
+          <p:cNvSpPr/>
+          <p:nvPr/>
+        </p:nvSpPr>
+        <p:spPr>
+          <a:xfrm>
+            <a:off x="6217920" y="1371600"/>
+            <a:ext cx="5212080" cy="2743200"/>
+          </a:xfrm>
+          <a:prstGeom prst="rect">
+            <a:avLst/>
+          </a:prstGeom>
+          <a:noFill/>
+          <a:ln/>
+        </p:spPr>
+        <p:txBody>
+          <a:bodyPr wrap="square" rtlCol="0" anchor="ctr"/>
+          <a:lstStyle/>
+          <a:p>
+            <a:pPr algn="ctr" indent="0" marL="0">
+              <a:buNone/>
+            </a:pPr>
+            <a:r>
+              <a:rPr lang="en-US" sz="1000" dirty="0">
+                <a:solidFill>
+                  <a:srgbClr val="475569"/>
+                </a:solidFill>
+                <a:latin typeface="Calibri" pitchFamily="34" charset="0"/>
+                <a:ea typeface="Calibri" pitchFamily="34" charset="-122"/>
+                <a:cs typeface="Calibri" pitchFamily="34" charset="-120"/>
+              </a:rPr>
+              <a:t>{{chart_top_countries}}</a:t>
+            </a:r>
+            <a:endParaRPr lang="en-US" sz="1000" dirty="0"/>
+          </a:p>
+        </p:txBody>
+      </p:sp>
+      <p:sp>
+        <p:nvSpPr>
+          <p:cNvPr id="8" name="Text 6"/>
+          <p:cNvSpPr/>
+          <p:nvPr/>
+        </p:nvSpPr>
+        <p:spPr>
+          <a:xfrm>
+            <a:off x="731520" y="4389120"/>
+            <a:ext cx="10698480" cy="1828800"/>
           </a:xfrm>
           <a:prstGeom prst="rect">
             <a:avLst/>
@@ -4042,7 +8220,7 @@
           <a:p>
             <a:pPr indent="0" marL="0">
               <a:lnSpc>
-                <a:spcPct val="150000"/>
+                <a:spcPct val="135000"/>
               </a:lnSpc>
               <a:buNone/>
             </a:pPr>
@@ -4055,7 +8233,7 @@
                 <a:ea typeface="Calibri" pitchFamily="34" charset="-122"/>
                 <a:cs typeface="Calibri" pitchFamily="34" charset="-120"/>
               </a:rPr>
-              <a:t>{{key_wins}}</a:t>
+              <a:t>{{website_narrative}}</a:t>
             </a:r>
             <a:endParaRPr lang="en-US" sz="1200" dirty="0"/>
           </a:p>
@@ -4063,7 +8241,7 @@
       </p:sp>
       <p:sp>
         <p:nvSpPr>
-          <p:cNvPr id="6" name="Shape 4"/>
+          <p:cNvPr id="9" name="Shape 7"/>
           <p:cNvSpPr/>
           <p:nvPr/>
         </p:nvSpPr>
@@ -4083,7 +8261,7 @@
       </p:sp>
       <p:sp>
         <p:nvSpPr>
-          <p:cNvPr id="7" name="Text 5"/>
+          <p:cNvPr id="10" name="Text 8"/>
           <p:cNvSpPr/>
           <p:nvPr/>
         </p:nvSpPr>
@@ -4167,7 +8345,7 @@
             <a:avLst/>
           </a:prstGeom>
           <a:solidFill>
-            <a:srgbClr val="F59E0B"/>
+            <a:srgbClr val="06B6D4"/>
           </a:solidFill>
           <a:ln/>
         </p:spPr>
@@ -4199,13 +8377,13 @@
             <a:r>
               <a:rPr lang="en-US" sz="2800" b="1" dirty="0">
                 <a:solidFill>
-                  <a:srgbClr val="F59E0B"/>
-                </a:solidFill>
-                <a:latin typeface="Calibri" pitchFamily="34" charset="0"/>
-                <a:ea typeface="Calibri" pitchFamily="34" charset="-122"/>
-                <a:cs typeface="Calibri" pitchFamily="34" charset="-120"/>
-              </a:rPr>
-              <a:t>Concerns &amp; Recommendations</a:t>
+                  <a:srgbClr val="F8FAFC"/>
+                </a:solidFill>
+                <a:latin typeface="Calibri" pitchFamily="34" charset="0"/>
+                <a:ea typeface="Calibri" pitchFamily="34" charset="-122"/>
+                <a:cs typeface="Calibri" pitchFamily="34" charset="-120"/>
+              </a:rPr>
+              <a:t>Bounce Rate Analysis</a:t>
             </a:r>
             <a:endParaRPr lang="en-US" sz="2800" dirty="0"/>
           </a:p>
@@ -4220,7 +8398,7 @@
         <p:spPr>
           <a:xfrm>
             <a:off x="731520" y="1371600"/>
-            <a:ext cx="10698480" cy="4572000"/>
+            <a:ext cx="10698480" cy="3657600"/>
           </a:xfrm>
           <a:prstGeom prst="rect">
             <a:avLst/>
@@ -4246,8 +8424,47 @@
         </p:nvSpPr>
         <p:spPr>
           <a:xfrm>
-            <a:off x="1005840" y="1554480"/>
-            <a:ext cx="10149840" cy="4114800"/>
+            <a:off x="731520" y="1371600"/>
+            <a:ext cx="10698480" cy="3657600"/>
+          </a:xfrm>
+          <a:prstGeom prst="rect">
+            <a:avLst/>
+          </a:prstGeom>
+          <a:noFill/>
+          <a:ln/>
+        </p:spPr>
+        <p:txBody>
+          <a:bodyPr wrap="square" rtlCol="0" anchor="ctr"/>
+          <a:lstStyle/>
+          <a:p>
+            <a:pPr algn="ctr" indent="0" marL="0">
+              <a:buNone/>
+            </a:pPr>
+            <a:r>
+              <a:rPr lang="en-US" sz="1000" dirty="0">
+                <a:solidFill>
+                  <a:srgbClr val="475569"/>
+                </a:solidFill>
+                <a:latin typeface="Calibri" pitchFamily="34" charset="0"/>
+                <a:ea typeface="Calibri" pitchFamily="34" charset="-122"/>
+                <a:cs typeface="Calibri" pitchFamily="34" charset="-120"/>
+              </a:rPr>
+              <a:t>{{chart_bounce_rate}}</a:t>
+            </a:r>
+            <a:endParaRPr lang="en-US" sz="1000" dirty="0"/>
+          </a:p>
+        </p:txBody>
+      </p:sp>
+      <p:sp>
+        <p:nvSpPr>
+          <p:cNvPr id="6" name="Text 4"/>
+          <p:cNvSpPr/>
+          <p:nvPr/>
+        </p:nvSpPr>
+        <p:spPr>
+          <a:xfrm>
+            <a:off x="731520" y="5257800"/>
+            <a:ext cx="10698480" cy="1097280"/>
           </a:xfrm>
           <a:prstGeom prst="rect">
             <a:avLst/>
@@ -4261,7 +8478,7 @@
           <a:p>
             <a:pPr indent="0" marL="0">
               <a:lnSpc>
-                <a:spcPct val="150000"/>
+                <a:spcPct val="135000"/>
               </a:lnSpc>
               <a:buNone/>
             </a:pPr>
@@ -4274,7 +8491,7 @@
                 <a:ea typeface="Calibri" pitchFamily="34" charset="-122"/>
                 <a:cs typeface="Calibri" pitchFamily="34" charset="-120"/>
               </a:rPr>
-              <a:t>{{concerns}}</a:t>
+              <a:t>{{website_narrative}}</a:t>
             </a:r>
             <a:endParaRPr lang="en-US" sz="1200" dirty="0"/>
           </a:p>
@@ -4282,7 +8499,7 @@
       </p:sp>
       <p:sp>
         <p:nvSpPr>
-          <p:cNvPr id="6" name="Shape 4"/>
+          <p:cNvPr id="7" name="Shape 5"/>
           <p:cNvSpPr/>
           <p:nvPr/>
         </p:nvSpPr>
@@ -4302,7 +8519,7 @@
       </p:sp>
       <p:sp>
         <p:nvSpPr>
-          <p:cNvPr id="7" name="Text 5"/>
+          <p:cNvPr id="8" name="Text 6"/>
           <p:cNvSpPr/>
           <p:nvPr/>
         </p:nvSpPr>
@@ -4424,7 +8641,7 @@
                 <a:ea typeface="Calibri" pitchFamily="34" charset="-122"/>
                 <a:cs typeface="Calibri" pitchFamily="34" charset="-120"/>
               </a:rPr>
-              <a:t>Next Steps &amp; Action Items</a:t>
+              <a:t>Paid Advertising — Meta Ads</a:t>
             </a:r>
             <a:endParaRPr lang="en-US" sz="2800" dirty="0"/>
           </a:p>
@@ -4439,7 +8656,7 @@
         <p:spPr>
           <a:xfrm>
             <a:off x="731520" y="1371600"/>
-            <a:ext cx="10698480" cy="3657600"/>
+            <a:ext cx="5120640" cy="2743200"/>
           </a:xfrm>
           <a:prstGeom prst="rect">
             <a:avLst/>
@@ -4465,8 +8682,113 @@
         </p:nvSpPr>
         <p:spPr>
           <a:xfrm>
-            <a:off x="1005840" y="1554480"/>
-            <a:ext cx="10149840" cy="3200400"/>
+            <a:off x="731520" y="1371600"/>
+            <a:ext cx="5120640" cy="2743200"/>
+          </a:xfrm>
+          <a:prstGeom prst="rect">
+            <a:avLst/>
+          </a:prstGeom>
+          <a:noFill/>
+          <a:ln/>
+        </p:spPr>
+        <p:txBody>
+          <a:bodyPr wrap="square" rtlCol="0" anchor="ctr"/>
+          <a:lstStyle/>
+          <a:p>
+            <a:pPr algn="ctr" indent="0" marL="0">
+              <a:buNone/>
+            </a:pPr>
+            <a:r>
+              <a:rPr lang="en-US" sz="1000" dirty="0">
+                <a:solidFill>
+                  <a:srgbClr val="475569"/>
+                </a:solidFill>
+                <a:latin typeface="Calibri" pitchFamily="34" charset="0"/>
+                <a:ea typeface="Calibri" pitchFamily="34" charset="-122"/>
+                <a:cs typeface="Calibri" pitchFamily="34" charset="-120"/>
+              </a:rPr>
+              <a:t>{{chart_spend}}</a:t>
+            </a:r>
+            <a:endParaRPr lang="en-US" sz="1000" dirty="0"/>
+          </a:p>
+        </p:txBody>
+      </p:sp>
+      <p:sp>
+        <p:nvSpPr>
+          <p:cNvPr id="6" name="Shape 4"/>
+          <p:cNvSpPr/>
+          <p:nvPr/>
+        </p:nvSpPr>
+        <p:spPr>
+          <a:xfrm>
+            <a:off x="6217920" y="1371600"/>
+            <a:ext cx="5212080" cy="2743200"/>
+          </a:xfrm>
+          <a:prstGeom prst="rect">
+            <a:avLst/>
+          </a:prstGeom>
+          <a:solidFill>
+            <a:srgbClr val="1E293B"/>
+          </a:solidFill>
+          <a:ln/>
+          <a:effectLst>
+            <a:outerShdw sx="100000" sy="100000" kx="0" ky="0" algn="bl" rotWithShape="0" blurRad="101600" dist="25400" dir="8100000">
+              <a:srgbClr val="000000">
+                <a:alpha val="30000"/>
+              </a:srgbClr>
+            </a:outerShdw>
+          </a:effectLst>
+        </p:spPr>
+      </p:sp>
+      <p:sp>
+        <p:nvSpPr>
+          <p:cNvPr id="7" name="Text 5"/>
+          <p:cNvSpPr/>
+          <p:nvPr/>
+        </p:nvSpPr>
+        <p:spPr>
+          <a:xfrm>
+            <a:off x="6217920" y="1371600"/>
+            <a:ext cx="5212080" cy="2743200"/>
+          </a:xfrm>
+          <a:prstGeom prst="rect">
+            <a:avLst/>
+          </a:prstGeom>
+          <a:noFill/>
+          <a:ln/>
+        </p:spPr>
+        <p:txBody>
+          <a:bodyPr wrap="square" rtlCol="0" anchor="ctr"/>
+          <a:lstStyle/>
+          <a:p>
+            <a:pPr algn="ctr" indent="0" marL="0">
+              <a:buNone/>
+            </a:pPr>
+            <a:r>
+              <a:rPr lang="en-US" sz="1000" dirty="0">
+                <a:solidFill>
+                  <a:srgbClr val="475569"/>
+                </a:solidFill>
+                <a:latin typeface="Calibri" pitchFamily="34" charset="0"/>
+                <a:ea typeface="Calibri" pitchFamily="34" charset="-122"/>
+                <a:cs typeface="Calibri" pitchFamily="34" charset="-120"/>
+              </a:rPr>
+              <a:t>{{chart_campaigns}}</a:t>
+            </a:r>
+            <a:endParaRPr lang="en-US" sz="1000" dirty="0"/>
+          </a:p>
+        </p:txBody>
+      </p:sp>
+      <p:sp>
+        <p:nvSpPr>
+          <p:cNvPr id="8" name="Text 6"/>
+          <p:cNvSpPr/>
+          <p:nvPr/>
+        </p:nvSpPr>
+        <p:spPr>
+          <a:xfrm>
+            <a:off x="731520" y="4389120"/>
+            <a:ext cx="10698480" cy="1828800"/>
           </a:xfrm>
           <a:prstGeom prst="rect">
             <a:avLst/>
@@ -4480,7 +8802,7 @@
           <a:p>
             <a:pPr indent="0" marL="0">
               <a:lnSpc>
-                <a:spcPct val="150000"/>
+                <a:spcPct val="135000"/>
               </a:lnSpc>
               <a:buNone/>
             </a:pPr>
@@ -4493,7 +8815,7 @@
                 <a:ea typeface="Calibri" pitchFamily="34" charset="-122"/>
                 <a:cs typeface="Calibri" pitchFamily="34" charset="-120"/>
               </a:rPr>
-              <a:t>{{next_steps}}</a:t>
+              <a:t>{{ads_narrative}}</a:t>
             </a:r>
             <a:endParaRPr lang="en-US" sz="1200" dirty="0"/>
           </a:p>
@@ -4501,34 +8823,34 @@
       </p:sp>
       <p:sp>
         <p:nvSpPr>
-          <p:cNvPr id="6" name="Shape 4"/>
-          <p:cNvSpPr/>
-          <p:nvPr/>
-        </p:nvSpPr>
-        <p:spPr>
-          <a:xfrm>
-            <a:off x="0" y="5760720"/>
-            <a:ext cx="12161520" cy="1097280"/>
-          </a:xfrm>
-          <a:prstGeom prst="rect">
-            <a:avLst/>
-          </a:prstGeom>
-          <a:solidFill>
-            <a:srgbClr val="164E63"/>
-          </a:solidFill>
-          <a:ln/>
-        </p:spPr>
-      </p:sp>
-      <p:sp>
-        <p:nvSpPr>
-          <p:cNvPr id="7" name="Text 5"/>
-          <p:cNvSpPr/>
-          <p:nvPr/>
-        </p:nvSpPr>
-        <p:spPr>
-          <a:xfrm>
-            <a:off x="731520" y="5806440"/>
-            <a:ext cx="10698480" cy="411480"/>
+          <p:cNvPr id="9" name="Shape 7"/>
+          <p:cNvSpPr/>
+          <p:nvPr/>
+        </p:nvSpPr>
+        <p:spPr>
+          <a:xfrm>
+            <a:off x="0" y="6839712"/>
+            <a:ext cx="12161520" cy="18288"/>
+          </a:xfrm>
+          <a:prstGeom prst="rect">
+            <a:avLst/>
+          </a:prstGeom>
+          <a:solidFill>
+            <a:srgbClr val="06B6D4"/>
+          </a:solidFill>
+          <a:ln/>
+        </p:spPr>
+      </p:sp>
+      <p:sp>
+        <p:nvSpPr>
+          <p:cNvPr id="10" name="Text 8"/>
+          <p:cNvSpPr/>
+          <p:nvPr/>
+        </p:nvSpPr>
+        <p:spPr>
+          <a:xfrm>
+            <a:off x="731520" y="6510528"/>
+            <a:ext cx="10698480" cy="256032"/>
           </a:xfrm>
           <a:prstGeom prst="rect">
             <a:avLst/>
@@ -4544,56 +8866,17 @@
               <a:buNone/>
             </a:pPr>
             <a:r>
-              <a:rPr lang="en-US" sz="1300" b="1" dirty="0">
-                <a:solidFill>
-                  <a:srgbClr val="06B6D4"/>
-                </a:solidFill>
-                <a:latin typeface="Calibri" pitchFamily="34" charset="0"/>
-                <a:ea typeface="Calibri" pitchFamily="34" charset="-122"/>
-                <a:cs typeface="Calibri" pitchFamily="34" charset="-120"/>
-              </a:rPr>
-              <a:t>Questions? Reply to this email or schedule a call.</a:t>
-            </a:r>
-            <a:endParaRPr lang="en-US" sz="1300" dirty="0"/>
-          </a:p>
-        </p:txBody>
-      </p:sp>
-      <p:sp>
-        <p:nvSpPr>
-          <p:cNvPr id="8" name="Text 6"/>
-          <p:cNvSpPr/>
-          <p:nvPr/>
-        </p:nvSpPr>
-        <p:spPr>
-          <a:xfrm>
-            <a:off x="731520" y="6263640"/>
-            <a:ext cx="10698480" cy="320040"/>
-          </a:xfrm>
-          <a:prstGeom prst="rect">
-            <a:avLst/>
-          </a:prstGeom>
-          <a:noFill/>
-          <a:ln/>
-        </p:spPr>
-        <p:txBody>
-          <a:bodyPr wrap="square" rtlCol="0" anchor="ctr"/>
-          <a:lstStyle/>
-          <a:p>
-            <a:pPr indent="0" marL="0">
-              <a:buNone/>
-            </a:pPr>
-            <a:r>
-              <a:rPr lang="en-US" sz="1100" dirty="0">
-                <a:solidFill>
-                  <a:srgbClr val="CBD5E1"/>
-                </a:solidFill>
-                <a:latin typeface="Calibri" pitchFamily="34" charset="0"/>
-                <a:ea typeface="Calibri" pitchFamily="34" charset="-122"/>
-                <a:cs typeface="Calibri" pitchFamily="34" charset="-120"/>
-              </a:rPr>
-              <a:t>{{agency_name}}  •  {{agency_email}}</a:t>
-            </a:r>
-            <a:endParaRPr lang="en-US" sz="1100" dirty="0"/>
+              <a:rPr lang="en-US" sz="800" dirty="0">
+                <a:solidFill>
+                  <a:srgbClr val="475569"/>
+                </a:solidFill>
+                <a:latin typeface="Calibri" pitchFamily="34" charset="0"/>
+                <a:ea typeface="Calibri" pitchFamily="34" charset="-122"/>
+                <a:cs typeface="Calibri" pitchFamily="34" charset="-120"/>
+              </a:rPr>
+              <a:t>{{agency_name}}  •  Confidential  •  Page 8</a:t>
+            </a:r>
+            <a:endParaRPr lang="en-US" sz="800" dirty="0"/>
           </a:p>
         </p:txBody>
       </p:sp>
@@ -4682,7 +8965,7 @@
                 <a:ea typeface="Calibri" pitchFamily="34" charset="-122"/>
                 <a:cs typeface="Calibri" pitchFamily="34" charset="-120"/>
               </a:rPr>
-              <a:t>{{custom_section_title}}</a:t>
+              <a:t>Meta Ads — Audience</a:t>
             </a:r>
             <a:endParaRPr lang="en-US" sz="2800" dirty="0"/>
           </a:p>
@@ -4697,7 +8980,7 @@
         <p:spPr>
           <a:xfrm>
             <a:off x="731520" y="1371600"/>
-            <a:ext cx="10698480" cy="4572000"/>
+            <a:ext cx="5120640" cy="2743200"/>
           </a:xfrm>
           <a:prstGeom prst="rect">
             <a:avLst/>
@@ -4723,8 +9006,113 @@
         </p:nvSpPr>
         <p:spPr>
           <a:xfrm>
-            <a:off x="1005840" y="1554480"/>
-            <a:ext cx="10149840" cy="4114800"/>
+            <a:off x="731520" y="1371600"/>
+            <a:ext cx="5120640" cy="2743200"/>
+          </a:xfrm>
+          <a:prstGeom prst="rect">
+            <a:avLst/>
+          </a:prstGeom>
+          <a:noFill/>
+          <a:ln/>
+        </p:spPr>
+        <p:txBody>
+          <a:bodyPr wrap="square" rtlCol="0" anchor="ctr"/>
+          <a:lstStyle/>
+          <a:p>
+            <a:pPr algn="ctr" indent="0" marL="0">
+              <a:buNone/>
+            </a:pPr>
+            <a:r>
+              <a:rPr lang="en-US" sz="1000" dirty="0">
+                <a:solidFill>
+                  <a:srgbClr val="475569"/>
+                </a:solidFill>
+                <a:latin typeface="Calibri" pitchFamily="34" charset="0"/>
+                <a:ea typeface="Calibri" pitchFamily="34" charset="-122"/>
+                <a:cs typeface="Calibri" pitchFamily="34" charset="-120"/>
+              </a:rPr>
+              <a:t>{{chart_demographics}}</a:t>
+            </a:r>
+            <a:endParaRPr lang="en-US" sz="1000" dirty="0"/>
+          </a:p>
+        </p:txBody>
+      </p:sp>
+      <p:sp>
+        <p:nvSpPr>
+          <p:cNvPr id="6" name="Shape 4"/>
+          <p:cNvSpPr/>
+          <p:nvPr/>
+        </p:nvSpPr>
+        <p:spPr>
+          <a:xfrm>
+            <a:off x="6217920" y="1371600"/>
+            <a:ext cx="5212080" cy="2743200"/>
+          </a:xfrm>
+          <a:prstGeom prst="rect">
+            <a:avLst/>
+          </a:prstGeom>
+          <a:solidFill>
+            <a:srgbClr val="1E293B"/>
+          </a:solidFill>
+          <a:ln/>
+          <a:effectLst>
+            <a:outerShdw sx="100000" sy="100000" kx="0" ky="0" algn="bl" rotWithShape="0" blurRad="101600" dist="25400" dir="8100000">
+              <a:srgbClr val="000000">
+                <a:alpha val="30000"/>
+              </a:srgbClr>
+            </a:outerShdw>
+          </a:effectLst>
+        </p:spPr>
+      </p:sp>
+      <p:sp>
+        <p:nvSpPr>
+          <p:cNvPr id="7" name="Text 5"/>
+          <p:cNvSpPr/>
+          <p:nvPr/>
+        </p:nvSpPr>
+        <p:spPr>
+          <a:xfrm>
+            <a:off x="6217920" y="1371600"/>
+            <a:ext cx="5212080" cy="2743200"/>
+          </a:xfrm>
+          <a:prstGeom prst="rect">
+            <a:avLst/>
+          </a:prstGeom>
+          <a:noFill/>
+          <a:ln/>
+        </p:spPr>
+        <p:txBody>
+          <a:bodyPr wrap="square" rtlCol="0" anchor="ctr"/>
+          <a:lstStyle/>
+          <a:p>
+            <a:pPr algn="ctr" indent="0" marL="0">
+              <a:buNone/>
+            </a:pPr>
+            <a:r>
+              <a:rPr lang="en-US" sz="1000" dirty="0">
+                <a:solidFill>
+                  <a:srgbClr val="475569"/>
+                </a:solidFill>
+                <a:latin typeface="Calibri" pitchFamily="34" charset="0"/>
+                <a:ea typeface="Calibri" pitchFamily="34" charset="-122"/>
+                <a:cs typeface="Calibri" pitchFamily="34" charset="-120"/>
+              </a:rPr>
+              <a:t>{{chart_placements}}</a:t>
+            </a:r>
+            <a:endParaRPr lang="en-US" sz="1000" dirty="0"/>
+          </a:p>
+        </p:txBody>
+      </p:sp>
+      <p:sp>
+        <p:nvSpPr>
+          <p:cNvPr id="8" name="Text 6"/>
+          <p:cNvSpPr/>
+          <p:nvPr/>
+        </p:nvSpPr>
+        <p:spPr>
+          <a:xfrm>
+            <a:off x="731520" y="4389120"/>
+            <a:ext cx="10698480" cy="1828800"/>
           </a:xfrm>
           <a:prstGeom prst="rect">
             <a:avLst/>
@@ -4738,7 +9126,7 @@
           <a:p>
             <a:pPr indent="0" marL="0">
               <a:lnSpc>
-                <a:spcPct val="140000"/>
+                <a:spcPct val="135000"/>
               </a:lnSpc>
               <a:buNone/>
             </a:pPr>
@@ -4751,7 +9139,7 @@
                 <a:ea typeface="Calibri" pitchFamily="34" charset="-122"/>
                 <a:cs typeface="Calibri" pitchFamily="34" charset="-120"/>
               </a:rPr>
-              <a:t>{{custom_section_text}}</a:t>
+              <a:t>{{ads_narrative}}</a:t>
             </a:r>
             <a:endParaRPr lang="en-US" sz="1200" dirty="0"/>
           </a:p>
@@ -4759,7 +9147,7 @@
       </p:sp>
       <p:sp>
         <p:nvSpPr>
-          <p:cNvPr id="6" name="Shape 4"/>
+          <p:cNvPr id="9" name="Shape 7"/>
           <p:cNvSpPr/>
           <p:nvPr/>
         </p:nvSpPr>
@@ -4779,7 +9167,7 @@
       </p:sp>
       <p:sp>
         <p:nvSpPr>
-          <p:cNvPr id="7" name="Text 5"/>
+          <p:cNvPr id="10" name="Text 8"/>
           <p:cNvSpPr/>
           <p:nvPr/>
         </p:nvSpPr>

--- a/backend/templates/pptx/dark_executive.pptx
+++ b/backend/templates/pptx/dark_executive.pptx
@@ -2496,6 +2496,10 @@
           </a:solidFill>
           <a:ln/>
         </p:spPr>
+        <p:txBody>
+          <a:bodyPr/>
+          <a:p/>
+        </p:txBody>
       </p:sp>
       <p:sp>
         <p:nvSpPr>
@@ -2789,6 +2793,10 @@
           </a:solidFill>
           <a:ln/>
         </p:spPr>
+        <p:txBody>
+          <a:bodyPr/>
+          <a:p/>
+        </p:txBody>
       </p:sp>
     </p:spTree>
   </p:cSld>
@@ -2841,6 +2849,10 @@
           </a:solidFill>
           <a:ln/>
         </p:spPr>
+        <p:txBody>
+          <a:bodyPr/>
+          <a:p/>
+        </p:txBody>
       </p:sp>
       <p:sp>
         <p:nvSpPr>
@@ -2907,6 +2919,10 @@
             </a:outerShdw>
           </a:effectLst>
         </p:spPr>
+        <p:txBody>
+          <a:bodyPr/>
+          <a:p/>
+        </p:txBody>
       </p:sp>
       <p:sp>
         <p:nvSpPr>
@@ -3008,6 +3024,10 @@
           </a:solidFill>
           <a:ln/>
         </p:spPr>
+        <p:txBody>
+          <a:bodyPr/>
+          <a:p/>
+        </p:txBody>
       </p:sp>
       <p:sp>
         <p:nvSpPr>
@@ -3099,6 +3119,10 @@
           </a:solidFill>
           <a:ln/>
         </p:spPr>
+        <p:txBody>
+          <a:bodyPr/>
+          <a:p/>
+        </p:txBody>
       </p:sp>
       <p:sp>
         <p:nvSpPr>
@@ -3165,6 +3189,10 @@
             </a:outerShdw>
           </a:effectLst>
         </p:spPr>
+        <p:txBody>
+          <a:bodyPr/>
+          <a:p/>
+        </p:txBody>
       </p:sp>
       <p:sp>
         <p:nvSpPr>
@@ -3231,6 +3259,10 @@
             </a:outerShdw>
           </a:effectLst>
         </p:spPr>
+        <p:txBody>
+          <a:bodyPr/>
+          <a:p/>
+        </p:txBody>
       </p:sp>
       <p:sp>
         <p:nvSpPr>
@@ -3332,6 +3364,10 @@
           </a:solidFill>
           <a:ln/>
         </p:spPr>
+        <p:txBody>
+          <a:bodyPr/>
+          <a:p/>
+        </p:txBody>
       </p:sp>
       <p:sp>
         <p:nvSpPr>
@@ -3423,6 +3459,10 @@
           </a:solidFill>
           <a:ln/>
         </p:spPr>
+        <p:txBody>
+          <a:bodyPr/>
+          <a:p/>
+        </p:txBody>
       </p:sp>
       <p:sp>
         <p:nvSpPr>
@@ -3489,6 +3529,10 @@
             </a:outerShdw>
           </a:effectLst>
         </p:spPr>
+        <p:txBody>
+          <a:bodyPr/>
+          <a:p/>
+        </p:txBody>
       </p:sp>
       <p:sp>
         <p:nvSpPr>
@@ -3590,6 +3634,10 @@
           </a:solidFill>
           <a:ln/>
         </p:spPr>
+        <p:txBody>
+          <a:bodyPr/>
+          <a:p/>
+        </p:txBody>
       </p:sp>
       <p:sp>
         <p:nvSpPr>
@@ -3681,6 +3729,10 @@
           </a:solidFill>
           <a:ln/>
         </p:spPr>
+        <p:txBody>
+          <a:bodyPr/>
+          <a:p/>
+        </p:txBody>
       </p:sp>
       <p:sp>
         <p:nvSpPr>
@@ -3747,6 +3799,10 @@
             </a:outerShdw>
           </a:effectLst>
         </p:spPr>
+        <p:txBody>
+          <a:bodyPr/>
+          <a:p/>
+        </p:txBody>
       </p:sp>
       <p:sp>
         <p:nvSpPr>
@@ -3813,6 +3869,10 @@
             </a:outerShdw>
           </a:effectLst>
         </p:spPr>
+        <p:txBody>
+          <a:bodyPr/>
+          <a:p/>
+        </p:txBody>
       </p:sp>
       <p:sp>
         <p:nvSpPr>
@@ -3914,6 +3974,10 @@
           </a:solidFill>
           <a:ln/>
         </p:spPr>
+        <p:txBody>
+          <a:bodyPr/>
+          <a:p/>
+        </p:txBody>
       </p:sp>
       <p:sp>
         <p:nvSpPr>
@@ -4005,6 +4069,10 @@
           </a:solidFill>
           <a:ln/>
         </p:spPr>
+        <p:txBody>
+          <a:bodyPr/>
+          <a:p/>
+        </p:txBody>
       </p:sp>
       <p:sp>
         <p:nvSpPr>
@@ -4071,6 +4139,10 @@
             </a:outerShdw>
           </a:effectLst>
         </p:spPr>
+        <p:txBody>
+          <a:bodyPr/>
+          <a:p/>
+        </p:txBody>
       </p:sp>
       <p:sp>
         <p:nvSpPr>
@@ -4176,6 +4248,10 @@
             </a:outerShdw>
           </a:effectLst>
         </p:spPr>
+        <p:txBody>
+          <a:bodyPr/>
+          <a:p/>
+        </p:txBody>
       </p:sp>
       <p:sp>
         <p:nvSpPr>
@@ -4281,6 +4357,10 @@
             </a:outerShdw>
           </a:effectLst>
         </p:spPr>
+        <p:txBody>
+          <a:bodyPr/>
+          <a:p/>
+        </p:txBody>
       </p:sp>
       <p:sp>
         <p:nvSpPr>
@@ -4386,6 +4466,10 @@
             </a:outerShdw>
           </a:effectLst>
         </p:spPr>
+        <p:txBody>
+          <a:bodyPr/>
+          <a:p/>
+        </p:txBody>
       </p:sp>
       <p:sp>
         <p:nvSpPr>
@@ -4491,6 +4575,10 @@
             </a:outerShdw>
           </a:effectLst>
         </p:spPr>
+        <p:txBody>
+          <a:bodyPr/>
+          <a:p/>
+        </p:txBody>
       </p:sp>
       <p:sp>
         <p:nvSpPr>
@@ -4596,6 +4684,10 @@
             </a:outerShdw>
           </a:effectLst>
         </p:spPr>
+        <p:txBody>
+          <a:bodyPr/>
+          <a:p/>
+        </p:txBody>
       </p:sp>
       <p:sp>
         <p:nvSpPr>
@@ -4683,8 +4775,8 @@
         </p:nvSpPr>
         <p:spPr>
           <a:xfrm>
-            <a:off x="731520" y="3657600"/>
-            <a:ext cx="10698480" cy="2377440"/>
+            <a:off x="731520" y="3959352"/>
+            <a:ext cx="10698480" cy="2414016"/>
           </a:xfrm>
           <a:prstGeom prst="rect">
             <a:avLst/>
@@ -4701,6 +4793,10 @@
             </a:outerShdw>
           </a:effectLst>
         </p:spPr>
+        <p:txBody>
+          <a:bodyPr/>
+          <a:p/>
+        </p:txBody>
       </p:sp>
       <p:sp>
         <p:nvSpPr>
@@ -4710,8 +4806,8 @@
         </p:nvSpPr>
         <p:spPr>
           <a:xfrm>
-            <a:off x="731520" y="3657600"/>
-            <a:ext cx="10698480" cy="2377440"/>
+            <a:off x="731520" y="3959352"/>
+            <a:ext cx="10698480" cy="2414016"/>
           </a:xfrm>
           <a:prstGeom prst="rect">
             <a:avLst/>
@@ -4760,6 +4856,10 @@
           </a:solidFill>
           <a:ln/>
         </p:spPr>
+        <p:txBody>
+          <a:bodyPr/>
+          <a:p/>
+        </p:txBody>
       </p:sp>
       <p:sp>
         <p:nvSpPr>
@@ -6024,6 +6124,10 @@
           </a:solidFill>
           <a:ln/>
         </p:spPr>
+        <p:txBody>
+          <a:bodyPr/>
+          <a:p/>
+        </p:txBody>
       </p:sp>
       <p:sp>
         <p:nvSpPr>
@@ -6090,6 +6194,10 @@
             </a:outerShdw>
           </a:effectLst>
         </p:spPr>
+        <p:txBody>
+          <a:bodyPr/>
+          <a:p/>
+        </p:txBody>
       </p:sp>
       <p:sp>
         <p:nvSpPr>
@@ -6152,6 +6260,10 @@
           </a:solidFill>
           <a:ln/>
         </p:spPr>
+        <p:txBody>
+          <a:bodyPr/>
+          <a:p/>
+        </p:txBody>
       </p:sp>
       <p:sp>
         <p:nvSpPr>
@@ -6243,6 +6355,10 @@
           </a:solidFill>
           <a:ln/>
         </p:spPr>
+        <p:txBody>
+          <a:bodyPr/>
+          <a:p/>
+        </p:txBody>
       </p:sp>
       <p:sp>
         <p:nvSpPr>
@@ -6309,6 +6425,10 @@
             </a:outerShdw>
           </a:effectLst>
         </p:spPr>
+        <p:txBody>
+          <a:bodyPr/>
+          <a:p/>
+        </p:txBody>
       </p:sp>
       <p:sp>
         <p:nvSpPr>
@@ -6329,6 +6449,10 @@
           </a:solidFill>
           <a:ln/>
         </p:spPr>
+        <p:txBody>
+          <a:bodyPr/>
+          <a:p/>
+        </p:txBody>
       </p:sp>
       <p:sp>
         <p:nvSpPr>
@@ -6473,6 +6597,10 @@
             </a:outerShdw>
           </a:effectLst>
         </p:spPr>
+        <p:txBody>
+          <a:bodyPr/>
+          <a:p/>
+        </p:txBody>
       </p:sp>
       <p:sp>
         <p:nvSpPr>
@@ -6493,6 +6621,10 @@
           </a:solidFill>
           <a:ln/>
         </p:spPr>
+        <p:txBody>
+          <a:bodyPr/>
+          <a:p/>
+        </p:txBody>
       </p:sp>
       <p:sp>
         <p:nvSpPr>
@@ -6637,6 +6769,10 @@
             </a:outerShdw>
           </a:effectLst>
         </p:spPr>
+        <p:txBody>
+          <a:bodyPr/>
+          <a:p/>
+        </p:txBody>
       </p:sp>
       <p:sp>
         <p:nvSpPr>
@@ -6657,6 +6793,10 @@
           </a:solidFill>
           <a:ln/>
         </p:spPr>
+        <p:txBody>
+          <a:bodyPr/>
+          <a:p/>
+        </p:txBody>
       </p:sp>
       <p:sp>
         <p:nvSpPr>
@@ -6801,6 +6941,10 @@
             </a:outerShdw>
           </a:effectLst>
         </p:spPr>
+        <p:txBody>
+          <a:bodyPr/>
+          <a:p/>
+        </p:txBody>
       </p:sp>
       <p:sp>
         <p:nvSpPr>
@@ -6821,6 +6965,10 @@
           </a:solidFill>
           <a:ln/>
         </p:spPr>
+        <p:txBody>
+          <a:bodyPr/>
+          <a:p/>
+        </p:txBody>
       </p:sp>
       <p:sp>
         <p:nvSpPr>
@@ -6965,6 +7113,10 @@
             </a:outerShdw>
           </a:effectLst>
         </p:spPr>
+        <p:txBody>
+          <a:bodyPr/>
+          <a:p/>
+        </p:txBody>
       </p:sp>
       <p:sp>
         <p:nvSpPr>
@@ -6985,6 +7137,10 @@
           </a:solidFill>
           <a:ln/>
         </p:spPr>
+        <p:txBody>
+          <a:bodyPr/>
+          <a:p/>
+        </p:txBody>
       </p:sp>
       <p:sp>
         <p:nvSpPr>
@@ -7129,6 +7285,10 @@
             </a:outerShdw>
           </a:effectLst>
         </p:spPr>
+        <p:txBody>
+          <a:bodyPr/>
+          <a:p/>
+        </p:txBody>
       </p:sp>
       <p:sp>
         <p:nvSpPr>
@@ -7149,6 +7309,10 @@
           </a:solidFill>
           <a:ln/>
         </p:spPr>
+        <p:txBody>
+          <a:bodyPr/>
+          <a:p/>
+        </p:txBody>
       </p:sp>
       <p:sp>
         <p:nvSpPr>
@@ -7286,6 +7450,10 @@
           </a:solidFill>
           <a:ln/>
         </p:spPr>
+        <p:txBody>
+          <a:bodyPr/>
+          <a:p/>
+        </p:txBody>
       </p:sp>
       <p:sp>
         <p:nvSpPr>
@@ -7377,6 +7545,10 @@
           </a:solidFill>
           <a:ln/>
         </p:spPr>
+        <p:txBody>
+          <a:bodyPr/>
+          <a:p/>
+        </p:txBody>
       </p:sp>
       <p:sp>
         <p:nvSpPr>
@@ -7443,6 +7615,10 @@
             </a:outerShdw>
           </a:effectLst>
         </p:spPr>
+        <p:txBody>
+          <a:bodyPr/>
+          <a:p/>
+        </p:txBody>
       </p:sp>
       <p:sp>
         <p:nvSpPr>
@@ -7509,6 +7685,10 @@
             </a:outerShdw>
           </a:effectLst>
         </p:spPr>
+        <p:txBody>
+          <a:bodyPr/>
+          <a:p/>
+        </p:txBody>
       </p:sp>
       <p:sp>
         <p:nvSpPr>
@@ -7610,6 +7790,10 @@
           </a:solidFill>
           <a:ln/>
         </p:spPr>
+        <p:txBody>
+          <a:bodyPr/>
+          <a:p/>
+        </p:txBody>
       </p:sp>
       <p:sp>
         <p:nvSpPr>
@@ -7701,6 +7885,10 @@
           </a:solidFill>
           <a:ln/>
         </p:spPr>
+        <p:txBody>
+          <a:bodyPr/>
+          <a:p/>
+        </p:txBody>
       </p:sp>
       <p:sp>
         <p:nvSpPr>
@@ -7767,6 +7955,10 @@
             </a:outerShdw>
           </a:effectLst>
         </p:spPr>
+        <p:txBody>
+          <a:bodyPr/>
+          <a:p/>
+        </p:txBody>
       </p:sp>
       <p:sp>
         <p:nvSpPr>
@@ -7833,6 +8025,10 @@
             </a:outerShdw>
           </a:effectLst>
         </p:spPr>
+        <p:txBody>
+          <a:bodyPr/>
+          <a:p/>
+        </p:txBody>
       </p:sp>
       <p:sp>
         <p:nvSpPr>
@@ -7934,6 +8130,10 @@
           </a:solidFill>
           <a:ln/>
         </p:spPr>
+        <p:txBody>
+          <a:bodyPr/>
+          <a:p/>
+        </p:txBody>
       </p:sp>
       <p:sp>
         <p:nvSpPr>
@@ -8025,6 +8225,10 @@
           </a:solidFill>
           <a:ln/>
         </p:spPr>
+        <p:txBody>
+          <a:bodyPr/>
+          <a:p/>
+        </p:txBody>
       </p:sp>
       <p:sp>
         <p:nvSpPr>
@@ -8091,6 +8295,10 @@
             </a:outerShdw>
           </a:effectLst>
         </p:spPr>
+        <p:txBody>
+          <a:bodyPr/>
+          <a:p/>
+        </p:txBody>
       </p:sp>
       <p:sp>
         <p:nvSpPr>
@@ -8157,6 +8365,10 @@
             </a:outerShdw>
           </a:effectLst>
         </p:spPr>
+        <p:txBody>
+          <a:bodyPr/>
+          <a:p/>
+        </p:txBody>
       </p:sp>
       <p:sp>
         <p:nvSpPr>
@@ -8258,6 +8470,10 @@
           </a:solidFill>
           <a:ln/>
         </p:spPr>
+        <p:txBody>
+          <a:bodyPr/>
+          <a:p/>
+        </p:txBody>
       </p:sp>
       <p:sp>
         <p:nvSpPr>
@@ -8349,6 +8565,10 @@
           </a:solidFill>
           <a:ln/>
         </p:spPr>
+        <p:txBody>
+          <a:bodyPr/>
+          <a:p/>
+        </p:txBody>
       </p:sp>
       <p:sp>
         <p:nvSpPr>
@@ -8415,6 +8635,10 @@
             </a:outerShdw>
           </a:effectLst>
         </p:spPr>
+        <p:txBody>
+          <a:bodyPr/>
+          <a:p/>
+        </p:txBody>
       </p:sp>
       <p:sp>
         <p:nvSpPr>
@@ -8516,6 +8740,10 @@
           </a:solidFill>
           <a:ln/>
         </p:spPr>
+        <p:txBody>
+          <a:bodyPr/>
+          <a:p/>
+        </p:txBody>
       </p:sp>
       <p:sp>
         <p:nvSpPr>
@@ -8607,6 +8835,10 @@
           </a:solidFill>
           <a:ln/>
         </p:spPr>
+        <p:txBody>
+          <a:bodyPr/>
+          <a:p/>
+        </p:txBody>
       </p:sp>
       <p:sp>
         <p:nvSpPr>
@@ -8673,6 +8905,10 @@
             </a:outerShdw>
           </a:effectLst>
         </p:spPr>
+        <p:txBody>
+          <a:bodyPr/>
+          <a:p/>
+        </p:txBody>
       </p:sp>
       <p:sp>
         <p:nvSpPr>
@@ -8739,6 +8975,10 @@
             </a:outerShdw>
           </a:effectLst>
         </p:spPr>
+        <p:txBody>
+          <a:bodyPr/>
+          <a:p/>
+        </p:txBody>
       </p:sp>
       <p:sp>
         <p:nvSpPr>
@@ -8840,6 +9080,10 @@
           </a:solidFill>
           <a:ln/>
         </p:spPr>
+        <p:txBody>
+          <a:bodyPr/>
+          <a:p/>
+        </p:txBody>
       </p:sp>
       <p:sp>
         <p:nvSpPr>
@@ -8931,6 +9175,10 @@
           </a:solidFill>
           <a:ln/>
         </p:spPr>
+        <p:txBody>
+          <a:bodyPr/>
+          <a:p/>
+        </p:txBody>
       </p:sp>
       <p:sp>
         <p:nvSpPr>
@@ -8997,6 +9245,10 @@
             </a:outerShdw>
           </a:effectLst>
         </p:spPr>
+        <p:txBody>
+          <a:bodyPr/>
+          <a:p/>
+        </p:txBody>
       </p:sp>
       <p:sp>
         <p:nvSpPr>
@@ -9063,6 +9315,10 @@
             </a:outerShdw>
           </a:effectLst>
         </p:spPr>
+        <p:txBody>
+          <a:bodyPr/>
+          <a:p/>
+        </p:txBody>
       </p:sp>
       <p:sp>
         <p:nvSpPr>
@@ -9164,6 +9420,10 @@
           </a:solidFill>
           <a:ln/>
         </p:spPr>
+        <p:txBody>
+          <a:bodyPr/>
+          <a:p/>
+        </p:txBody>
       </p:sp>
       <p:sp>
         <p:nvSpPr>

--- a/backend/templates/pptx/dark_executive.pptx
+++ b/backend/templates/pptx/dark_executive.pptx
@@ -2496,10 +2496,6 @@
           </a:solidFill>
           <a:ln/>
         </p:spPr>
-        <p:txBody>
-          <a:bodyPr/>
-          <a:p/>
-        </p:txBody>
       </p:sp>
       <p:sp>
         <p:nvSpPr>
@@ -2793,10 +2789,6 @@
           </a:solidFill>
           <a:ln/>
         </p:spPr>
-        <p:txBody>
-          <a:bodyPr/>
-          <a:p/>
-        </p:txBody>
       </p:sp>
     </p:spTree>
   </p:cSld>
@@ -2849,10 +2841,6 @@
           </a:solidFill>
           <a:ln/>
         </p:spPr>
-        <p:txBody>
-          <a:bodyPr/>
-          <a:p/>
-        </p:txBody>
       </p:sp>
       <p:sp>
         <p:nvSpPr>
@@ -2919,10 +2907,6 @@
             </a:outerShdw>
           </a:effectLst>
         </p:spPr>
-        <p:txBody>
-          <a:bodyPr/>
-          <a:p/>
-        </p:txBody>
       </p:sp>
       <p:sp>
         <p:nvSpPr>
@@ -3024,10 +3008,6 @@
           </a:solidFill>
           <a:ln/>
         </p:spPr>
-        <p:txBody>
-          <a:bodyPr/>
-          <a:p/>
-        </p:txBody>
       </p:sp>
       <p:sp>
         <p:nvSpPr>
@@ -3119,10 +3099,6 @@
           </a:solidFill>
           <a:ln/>
         </p:spPr>
-        <p:txBody>
-          <a:bodyPr/>
-          <a:p/>
-        </p:txBody>
       </p:sp>
       <p:sp>
         <p:nvSpPr>
@@ -3189,10 +3165,6 @@
             </a:outerShdw>
           </a:effectLst>
         </p:spPr>
-        <p:txBody>
-          <a:bodyPr/>
-          <a:p/>
-        </p:txBody>
       </p:sp>
       <p:sp>
         <p:nvSpPr>
@@ -3259,10 +3231,6 @@
             </a:outerShdw>
           </a:effectLst>
         </p:spPr>
-        <p:txBody>
-          <a:bodyPr/>
-          <a:p/>
-        </p:txBody>
       </p:sp>
       <p:sp>
         <p:nvSpPr>
@@ -3364,10 +3332,6 @@
           </a:solidFill>
           <a:ln/>
         </p:spPr>
-        <p:txBody>
-          <a:bodyPr/>
-          <a:p/>
-        </p:txBody>
       </p:sp>
       <p:sp>
         <p:nvSpPr>
@@ -3459,10 +3423,6 @@
           </a:solidFill>
           <a:ln/>
         </p:spPr>
-        <p:txBody>
-          <a:bodyPr/>
-          <a:p/>
-        </p:txBody>
       </p:sp>
       <p:sp>
         <p:nvSpPr>
@@ -3529,10 +3489,6 @@
             </a:outerShdw>
           </a:effectLst>
         </p:spPr>
-        <p:txBody>
-          <a:bodyPr/>
-          <a:p/>
-        </p:txBody>
       </p:sp>
       <p:sp>
         <p:nvSpPr>
@@ -3634,10 +3590,6 @@
           </a:solidFill>
           <a:ln/>
         </p:spPr>
-        <p:txBody>
-          <a:bodyPr/>
-          <a:p/>
-        </p:txBody>
       </p:sp>
       <p:sp>
         <p:nvSpPr>
@@ -3729,10 +3681,6 @@
           </a:solidFill>
           <a:ln/>
         </p:spPr>
-        <p:txBody>
-          <a:bodyPr/>
-          <a:p/>
-        </p:txBody>
       </p:sp>
       <p:sp>
         <p:nvSpPr>
@@ -3799,10 +3747,6 @@
             </a:outerShdw>
           </a:effectLst>
         </p:spPr>
-        <p:txBody>
-          <a:bodyPr/>
-          <a:p/>
-        </p:txBody>
       </p:sp>
       <p:sp>
         <p:nvSpPr>
@@ -3869,10 +3813,6 @@
             </a:outerShdw>
           </a:effectLst>
         </p:spPr>
-        <p:txBody>
-          <a:bodyPr/>
-          <a:p/>
-        </p:txBody>
       </p:sp>
       <p:sp>
         <p:nvSpPr>
@@ -3974,10 +3914,6 @@
           </a:solidFill>
           <a:ln/>
         </p:spPr>
-        <p:txBody>
-          <a:bodyPr/>
-          <a:p/>
-        </p:txBody>
       </p:sp>
       <p:sp>
         <p:nvSpPr>
@@ -4069,10 +4005,6 @@
           </a:solidFill>
           <a:ln/>
         </p:spPr>
-        <p:txBody>
-          <a:bodyPr/>
-          <a:p/>
-        </p:txBody>
       </p:sp>
       <p:sp>
         <p:nvSpPr>
@@ -4139,10 +4071,6 @@
             </a:outerShdw>
           </a:effectLst>
         </p:spPr>
-        <p:txBody>
-          <a:bodyPr/>
-          <a:p/>
-        </p:txBody>
       </p:sp>
       <p:sp>
         <p:nvSpPr>
@@ -4248,10 +4176,6 @@
             </a:outerShdw>
           </a:effectLst>
         </p:spPr>
-        <p:txBody>
-          <a:bodyPr/>
-          <a:p/>
-        </p:txBody>
       </p:sp>
       <p:sp>
         <p:nvSpPr>
@@ -4357,10 +4281,6 @@
             </a:outerShdw>
           </a:effectLst>
         </p:spPr>
-        <p:txBody>
-          <a:bodyPr/>
-          <a:p/>
-        </p:txBody>
       </p:sp>
       <p:sp>
         <p:nvSpPr>
@@ -4466,10 +4386,6 @@
             </a:outerShdw>
           </a:effectLst>
         </p:spPr>
-        <p:txBody>
-          <a:bodyPr/>
-          <a:p/>
-        </p:txBody>
       </p:sp>
       <p:sp>
         <p:nvSpPr>
@@ -4575,10 +4491,6 @@
             </a:outerShdw>
           </a:effectLst>
         </p:spPr>
-        <p:txBody>
-          <a:bodyPr/>
-          <a:p/>
-        </p:txBody>
       </p:sp>
       <p:sp>
         <p:nvSpPr>
@@ -4684,10 +4596,6 @@
             </a:outerShdw>
           </a:effectLst>
         </p:spPr>
-        <p:txBody>
-          <a:bodyPr/>
-          <a:p/>
-        </p:txBody>
       </p:sp>
       <p:sp>
         <p:nvSpPr>
@@ -4775,8 +4683,8 @@
         </p:nvSpPr>
         <p:spPr>
           <a:xfrm>
-            <a:off x="731520" y="3959352"/>
-            <a:ext cx="10698480" cy="2414016"/>
+            <a:off x="731520" y="3657600"/>
+            <a:ext cx="10698480" cy="2377440"/>
           </a:xfrm>
           <a:prstGeom prst="rect">
             <a:avLst/>
@@ -4793,10 +4701,6 @@
             </a:outerShdw>
           </a:effectLst>
         </p:spPr>
-        <p:txBody>
-          <a:bodyPr/>
-          <a:p/>
-        </p:txBody>
       </p:sp>
       <p:sp>
         <p:nvSpPr>
@@ -4806,8 +4710,8 @@
         </p:nvSpPr>
         <p:spPr>
           <a:xfrm>
-            <a:off x="731520" y="3959352"/>
-            <a:ext cx="10698480" cy="2414016"/>
+            <a:off x="731520" y="3657600"/>
+            <a:ext cx="10698480" cy="2377440"/>
           </a:xfrm>
           <a:prstGeom prst="rect">
             <a:avLst/>
@@ -4856,10 +4760,6 @@
           </a:solidFill>
           <a:ln/>
         </p:spPr>
-        <p:txBody>
-          <a:bodyPr/>
-          <a:p/>
-        </p:txBody>
       </p:sp>
       <p:sp>
         <p:nvSpPr>
@@ -6124,10 +6024,6 @@
           </a:solidFill>
           <a:ln/>
         </p:spPr>
-        <p:txBody>
-          <a:bodyPr/>
-          <a:p/>
-        </p:txBody>
       </p:sp>
       <p:sp>
         <p:nvSpPr>
@@ -6194,10 +6090,6 @@
             </a:outerShdw>
           </a:effectLst>
         </p:spPr>
-        <p:txBody>
-          <a:bodyPr/>
-          <a:p/>
-        </p:txBody>
       </p:sp>
       <p:sp>
         <p:nvSpPr>
@@ -6260,10 +6152,6 @@
           </a:solidFill>
           <a:ln/>
         </p:spPr>
-        <p:txBody>
-          <a:bodyPr/>
-          <a:p/>
-        </p:txBody>
       </p:sp>
       <p:sp>
         <p:nvSpPr>
@@ -6355,10 +6243,6 @@
           </a:solidFill>
           <a:ln/>
         </p:spPr>
-        <p:txBody>
-          <a:bodyPr/>
-          <a:p/>
-        </p:txBody>
       </p:sp>
       <p:sp>
         <p:nvSpPr>
@@ -6425,10 +6309,6 @@
             </a:outerShdw>
           </a:effectLst>
         </p:spPr>
-        <p:txBody>
-          <a:bodyPr/>
-          <a:p/>
-        </p:txBody>
       </p:sp>
       <p:sp>
         <p:nvSpPr>
@@ -6449,10 +6329,6 @@
           </a:solidFill>
           <a:ln/>
         </p:spPr>
-        <p:txBody>
-          <a:bodyPr/>
-          <a:p/>
-        </p:txBody>
       </p:sp>
       <p:sp>
         <p:nvSpPr>
@@ -6597,10 +6473,6 @@
             </a:outerShdw>
           </a:effectLst>
         </p:spPr>
-        <p:txBody>
-          <a:bodyPr/>
-          <a:p/>
-        </p:txBody>
       </p:sp>
       <p:sp>
         <p:nvSpPr>
@@ -6621,10 +6493,6 @@
           </a:solidFill>
           <a:ln/>
         </p:spPr>
-        <p:txBody>
-          <a:bodyPr/>
-          <a:p/>
-        </p:txBody>
       </p:sp>
       <p:sp>
         <p:nvSpPr>
@@ -6769,10 +6637,6 @@
             </a:outerShdw>
           </a:effectLst>
         </p:spPr>
-        <p:txBody>
-          <a:bodyPr/>
-          <a:p/>
-        </p:txBody>
       </p:sp>
       <p:sp>
         <p:nvSpPr>
@@ -6793,10 +6657,6 @@
           </a:solidFill>
           <a:ln/>
         </p:spPr>
-        <p:txBody>
-          <a:bodyPr/>
-          <a:p/>
-        </p:txBody>
       </p:sp>
       <p:sp>
         <p:nvSpPr>
@@ -6941,10 +6801,6 @@
             </a:outerShdw>
           </a:effectLst>
         </p:spPr>
-        <p:txBody>
-          <a:bodyPr/>
-          <a:p/>
-        </p:txBody>
       </p:sp>
       <p:sp>
         <p:nvSpPr>
@@ -6965,10 +6821,6 @@
           </a:solidFill>
           <a:ln/>
         </p:spPr>
-        <p:txBody>
-          <a:bodyPr/>
-          <a:p/>
-        </p:txBody>
       </p:sp>
       <p:sp>
         <p:nvSpPr>
@@ -7113,10 +6965,6 @@
             </a:outerShdw>
           </a:effectLst>
         </p:spPr>
-        <p:txBody>
-          <a:bodyPr/>
-          <a:p/>
-        </p:txBody>
       </p:sp>
       <p:sp>
         <p:nvSpPr>
@@ -7137,10 +6985,6 @@
           </a:solidFill>
           <a:ln/>
         </p:spPr>
-        <p:txBody>
-          <a:bodyPr/>
-          <a:p/>
-        </p:txBody>
       </p:sp>
       <p:sp>
         <p:nvSpPr>
@@ -7285,10 +7129,6 @@
             </a:outerShdw>
           </a:effectLst>
         </p:spPr>
-        <p:txBody>
-          <a:bodyPr/>
-          <a:p/>
-        </p:txBody>
       </p:sp>
       <p:sp>
         <p:nvSpPr>
@@ -7309,10 +7149,6 @@
           </a:solidFill>
           <a:ln/>
         </p:spPr>
-        <p:txBody>
-          <a:bodyPr/>
-          <a:p/>
-        </p:txBody>
       </p:sp>
       <p:sp>
         <p:nvSpPr>
@@ -7450,10 +7286,6 @@
           </a:solidFill>
           <a:ln/>
         </p:spPr>
-        <p:txBody>
-          <a:bodyPr/>
-          <a:p/>
-        </p:txBody>
       </p:sp>
       <p:sp>
         <p:nvSpPr>
@@ -7545,10 +7377,6 @@
           </a:solidFill>
           <a:ln/>
         </p:spPr>
-        <p:txBody>
-          <a:bodyPr/>
-          <a:p/>
-        </p:txBody>
       </p:sp>
       <p:sp>
         <p:nvSpPr>
@@ -7615,10 +7443,6 @@
             </a:outerShdw>
           </a:effectLst>
         </p:spPr>
-        <p:txBody>
-          <a:bodyPr/>
-          <a:p/>
-        </p:txBody>
       </p:sp>
       <p:sp>
         <p:nvSpPr>
@@ -7685,10 +7509,6 @@
             </a:outerShdw>
           </a:effectLst>
         </p:spPr>
-        <p:txBody>
-          <a:bodyPr/>
-          <a:p/>
-        </p:txBody>
       </p:sp>
       <p:sp>
         <p:nvSpPr>
@@ -7790,10 +7610,6 @@
           </a:solidFill>
           <a:ln/>
         </p:spPr>
-        <p:txBody>
-          <a:bodyPr/>
-          <a:p/>
-        </p:txBody>
       </p:sp>
       <p:sp>
         <p:nvSpPr>
@@ -7885,10 +7701,6 @@
           </a:solidFill>
           <a:ln/>
         </p:spPr>
-        <p:txBody>
-          <a:bodyPr/>
-          <a:p/>
-        </p:txBody>
       </p:sp>
       <p:sp>
         <p:nvSpPr>
@@ -7955,10 +7767,6 @@
             </a:outerShdw>
           </a:effectLst>
         </p:spPr>
-        <p:txBody>
-          <a:bodyPr/>
-          <a:p/>
-        </p:txBody>
       </p:sp>
       <p:sp>
         <p:nvSpPr>
@@ -8025,10 +7833,6 @@
             </a:outerShdw>
           </a:effectLst>
         </p:spPr>
-        <p:txBody>
-          <a:bodyPr/>
-          <a:p/>
-        </p:txBody>
       </p:sp>
       <p:sp>
         <p:nvSpPr>
@@ -8105,7 +7909,7 @@
                 <a:ea typeface="Calibri" pitchFamily="34" charset="-122"/>
                 <a:cs typeface="Calibri" pitchFamily="34" charset="-120"/>
               </a:rPr>
-              <a:t>{{website_narrative}}</a:t>
+              <a:t>{{engagement_narrative}}</a:t>
             </a:r>
             <a:endParaRPr lang="en-US" sz="1200" dirty="0"/>
           </a:p>
@@ -8130,10 +7934,6 @@
           </a:solidFill>
           <a:ln/>
         </p:spPr>
-        <p:txBody>
-          <a:bodyPr/>
-          <a:p/>
-        </p:txBody>
       </p:sp>
       <p:sp>
         <p:nvSpPr>
@@ -8225,10 +8025,6 @@
           </a:solidFill>
           <a:ln/>
         </p:spPr>
-        <p:txBody>
-          <a:bodyPr/>
-          <a:p/>
-        </p:txBody>
       </p:sp>
       <p:sp>
         <p:nvSpPr>
@@ -8295,10 +8091,6 @@
             </a:outerShdw>
           </a:effectLst>
         </p:spPr>
-        <p:txBody>
-          <a:bodyPr/>
-          <a:p/>
-        </p:txBody>
       </p:sp>
       <p:sp>
         <p:nvSpPr>
@@ -8365,10 +8157,6 @@
             </a:outerShdw>
           </a:effectLst>
         </p:spPr>
-        <p:txBody>
-          <a:bodyPr/>
-          <a:p/>
-        </p:txBody>
       </p:sp>
       <p:sp>
         <p:nvSpPr>
@@ -8470,10 +8258,6 @@
           </a:solidFill>
           <a:ln/>
         </p:spPr>
-        <p:txBody>
-          <a:bodyPr/>
-          <a:p/>
-        </p:txBody>
       </p:sp>
       <p:sp>
         <p:nvSpPr>
@@ -8565,10 +8349,6 @@
           </a:solidFill>
           <a:ln/>
         </p:spPr>
-        <p:txBody>
-          <a:bodyPr/>
-          <a:p/>
-        </p:txBody>
       </p:sp>
       <p:sp>
         <p:nvSpPr>
@@ -8635,10 +8415,6 @@
             </a:outerShdw>
           </a:effectLst>
         </p:spPr>
-        <p:txBody>
-          <a:bodyPr/>
-          <a:p/>
-        </p:txBody>
       </p:sp>
       <p:sp>
         <p:nvSpPr>
@@ -8740,10 +8516,6 @@
           </a:solidFill>
           <a:ln/>
         </p:spPr>
-        <p:txBody>
-          <a:bodyPr/>
-          <a:p/>
-        </p:txBody>
       </p:sp>
       <p:sp>
         <p:nvSpPr>
@@ -8835,10 +8607,6 @@
           </a:solidFill>
           <a:ln/>
         </p:spPr>
-        <p:txBody>
-          <a:bodyPr/>
-          <a:p/>
-        </p:txBody>
       </p:sp>
       <p:sp>
         <p:nvSpPr>
@@ -8905,10 +8673,6 @@
             </a:outerShdw>
           </a:effectLst>
         </p:spPr>
-        <p:txBody>
-          <a:bodyPr/>
-          <a:p/>
-        </p:txBody>
       </p:sp>
       <p:sp>
         <p:nvSpPr>
@@ -8975,10 +8739,6 @@
             </a:outerShdw>
           </a:effectLst>
         </p:spPr>
-        <p:txBody>
-          <a:bodyPr/>
-          <a:p/>
-        </p:txBody>
       </p:sp>
       <p:sp>
         <p:nvSpPr>
@@ -9080,10 +8840,6 @@
           </a:solidFill>
           <a:ln/>
         </p:spPr>
-        <p:txBody>
-          <a:bodyPr/>
-          <a:p/>
-        </p:txBody>
       </p:sp>
       <p:sp>
         <p:nvSpPr>
@@ -9175,10 +8931,6 @@
           </a:solidFill>
           <a:ln/>
         </p:spPr>
-        <p:txBody>
-          <a:bodyPr/>
-          <a:p/>
-        </p:txBody>
       </p:sp>
       <p:sp>
         <p:nvSpPr>
@@ -9245,10 +8997,6 @@
             </a:outerShdw>
           </a:effectLst>
         </p:spPr>
-        <p:txBody>
-          <a:bodyPr/>
-          <a:p/>
-        </p:txBody>
       </p:sp>
       <p:sp>
         <p:nvSpPr>
@@ -9315,10 +9063,6 @@
             </a:outerShdw>
           </a:effectLst>
         </p:spPr>
-        <p:txBody>
-          <a:bodyPr/>
-          <a:p/>
-        </p:txBody>
       </p:sp>
       <p:sp>
         <p:nvSpPr>
@@ -9420,10 +9164,6 @@
           </a:solidFill>
           <a:ln/>
         </p:spPr>
-        <p:txBody>
-          <a:bodyPr/>
-          <a:p/>
-        </p:txBody>
       </p:sp>
       <p:sp>
         <p:nvSpPr>

--- a/backend/templates/pptx/dark_executive.pptx
+++ b/backend/templates/pptx/dark_executive.pptx
@@ -2496,6 +2496,10 @@
           </a:solidFill>
           <a:ln/>
         </p:spPr>
+        <p:txBody>
+          <a:bodyPr/>
+          <a:p/>
+        </p:txBody>
       </p:sp>
       <p:sp>
         <p:nvSpPr>
@@ -2538,240 +2542,6 @@
       </p:sp>
       <p:sp>
         <p:nvSpPr>
-          <p:cNvPr id="4" name="Text 2"/>
-          <p:cNvSpPr/>
-          <p:nvPr/>
-        </p:nvSpPr>
-        <p:spPr>
-          <a:xfrm>
-            <a:off x="9418320" y="457200"/>
-            <a:ext cx="2011680" cy="914400"/>
-          </a:xfrm>
-          <a:prstGeom prst="rect">
-            <a:avLst/>
-          </a:prstGeom>
-          <a:noFill/>
-          <a:ln/>
-        </p:spPr>
-        <p:txBody>
-          <a:bodyPr wrap="square" rtlCol="0" anchor="ctr"/>
-          <a:lstStyle/>
-          <a:p>
-            <a:pPr algn="r" indent="0" marL="0">
-              <a:buNone/>
-            </a:pPr>
-            <a:r>
-              <a:rPr lang="en-US" sz="900" dirty="0">
-                <a:solidFill>
-                  <a:srgbClr val="475569"/>
-                </a:solidFill>
-                <a:latin typeface="Calibri" pitchFamily="34" charset="0"/>
-                <a:ea typeface="Calibri" pitchFamily="34" charset="-122"/>
-                <a:cs typeface="Calibri" pitchFamily="34" charset="-120"/>
-              </a:rPr>
-              <a:t>{{agency_logo}}</a:t>
-            </a:r>
-            <a:endParaRPr lang="en-US" sz="900" dirty="0"/>
-          </a:p>
-        </p:txBody>
-      </p:sp>
-      <p:sp>
-        <p:nvSpPr>
-          <p:cNvPr id="5" name="Text 3"/>
-          <p:cNvSpPr/>
-          <p:nvPr/>
-        </p:nvSpPr>
-        <p:spPr>
-          <a:xfrm>
-            <a:off x="731520" y="2286000"/>
-            <a:ext cx="10698480" cy="1371600"/>
-          </a:xfrm>
-          <a:prstGeom prst="rect">
-            <a:avLst/>
-          </a:prstGeom>
-          <a:noFill/>
-          <a:ln/>
-        </p:spPr>
-        <p:txBody>
-          <a:bodyPr wrap="square" rtlCol="0" anchor="ctr"/>
-          <a:lstStyle/>
-          <a:p>
-            <a:pPr indent="0" marL="0">
-              <a:buNone/>
-            </a:pPr>
-            <a:r>
-              <a:rPr lang="en-US" sz="4000" b="1" dirty="0">
-                <a:solidFill>
-                  <a:srgbClr val="F8FAFC"/>
-                </a:solidFill>
-                <a:latin typeface="Calibri" pitchFamily="34" charset="0"/>
-                <a:ea typeface="Calibri" pitchFamily="34" charset="-122"/>
-                <a:cs typeface="Calibri" pitchFamily="34" charset="-120"/>
-              </a:rPr>
-              <a:t>{{client_name}}</a:t>
-            </a:r>
-            <a:endParaRPr lang="en-US" sz="4000" dirty="0"/>
-          </a:p>
-        </p:txBody>
-      </p:sp>
-      <p:sp>
-        <p:nvSpPr>
-          <p:cNvPr id="6" name="Text 4"/>
-          <p:cNvSpPr/>
-          <p:nvPr/>
-        </p:nvSpPr>
-        <p:spPr>
-          <a:xfrm>
-            <a:off x="731520" y="3794760"/>
-            <a:ext cx="7315200" cy="411480"/>
-          </a:xfrm>
-          <a:prstGeom prst="rect">
-            <a:avLst/>
-          </a:prstGeom>
-          <a:noFill/>
-          <a:ln/>
-        </p:spPr>
-        <p:txBody>
-          <a:bodyPr wrap="square" rtlCol="0" anchor="ctr"/>
-          <a:lstStyle/>
-          <a:p>
-            <a:pPr indent="0" marL="0">
-              <a:buNone/>
-            </a:pPr>
-            <a:r>
-              <a:rPr lang="en-US" sz="1400" dirty="0">
-                <a:solidFill>
-                  <a:srgbClr val="CBD5E1"/>
-                </a:solidFill>
-                <a:latin typeface="Calibri" pitchFamily="34" charset="0"/>
-                <a:ea typeface="Calibri" pitchFamily="34" charset="-122"/>
-                <a:cs typeface="Calibri" pitchFamily="34" charset="-120"/>
-              </a:rPr>
-              <a:t>{{report_period}}</a:t>
-            </a:r>
-            <a:endParaRPr lang="en-US" sz="1400" dirty="0"/>
-          </a:p>
-        </p:txBody>
-      </p:sp>
-      <p:sp>
-        <p:nvSpPr>
-          <p:cNvPr id="7" name="Text 5"/>
-          <p:cNvSpPr/>
-          <p:nvPr/>
-        </p:nvSpPr>
-        <p:spPr>
-          <a:xfrm>
-            <a:off x="731520" y="4297680"/>
-            <a:ext cx="7315200" cy="320040"/>
-          </a:xfrm>
-          <a:prstGeom prst="rect">
-            <a:avLst/>
-          </a:prstGeom>
-          <a:noFill/>
-          <a:ln/>
-        </p:spPr>
-        <p:txBody>
-          <a:bodyPr wrap="square" rtlCol="0" anchor="ctr"/>
-          <a:lstStyle/>
-          <a:p>
-            <a:pPr indent="0" marL="0">
-              <a:buNone/>
-            </a:pPr>
-            <a:r>
-              <a:rPr lang="en-US" sz="1200" dirty="0">
-                <a:solidFill>
-                  <a:srgbClr val="64748B"/>
-                </a:solidFill>
-                <a:latin typeface="Calibri" pitchFamily="34" charset="0"/>
-                <a:ea typeface="Calibri" pitchFamily="34" charset="-122"/>
-                <a:cs typeface="Calibri" pitchFamily="34" charset="-120"/>
-              </a:rPr>
-              <a:t>{{report_type}}</a:t>
-            </a:r>
-            <a:endParaRPr lang="en-US" sz="1200" dirty="0"/>
-          </a:p>
-        </p:txBody>
-      </p:sp>
-      <p:sp>
-        <p:nvSpPr>
-          <p:cNvPr id="8" name="Text 6"/>
-          <p:cNvSpPr/>
-          <p:nvPr/>
-        </p:nvSpPr>
-        <p:spPr>
-          <a:xfrm>
-            <a:off x="731520" y="6126480"/>
-            <a:ext cx="7315200" cy="320040"/>
-          </a:xfrm>
-          <a:prstGeom prst="rect">
-            <a:avLst/>
-          </a:prstGeom>
-          <a:noFill/>
-          <a:ln/>
-        </p:spPr>
-        <p:txBody>
-          <a:bodyPr wrap="square" rtlCol="0" anchor="ctr"/>
-          <a:lstStyle/>
-          <a:p>
-            <a:pPr indent="0" marL="0">
-              <a:buNone/>
-            </a:pPr>
-            <a:r>
-              <a:rPr lang="en-US" sz="1100" dirty="0">
-                <a:solidFill>
-                  <a:srgbClr val="475569"/>
-                </a:solidFill>
-                <a:latin typeface="Calibri" pitchFamily="34" charset="0"/>
-                <a:ea typeface="Calibri" pitchFamily="34" charset="-122"/>
-                <a:cs typeface="Calibri" pitchFamily="34" charset="-120"/>
-              </a:rPr>
-              <a:t>Prepared by {{agency_name}}</a:t>
-            </a:r>
-            <a:endParaRPr lang="en-US" sz="1100" dirty="0"/>
-          </a:p>
-        </p:txBody>
-      </p:sp>
-      <p:sp>
-        <p:nvSpPr>
-          <p:cNvPr id="9" name="Text 7"/>
-          <p:cNvSpPr/>
-          <p:nvPr/>
-        </p:nvSpPr>
-        <p:spPr>
-          <a:xfrm>
-            <a:off x="8961120" y="3657600"/>
-            <a:ext cx="2286000" cy="1645920"/>
-          </a:xfrm>
-          <a:prstGeom prst="rect">
-            <a:avLst/>
-          </a:prstGeom>
-          <a:noFill/>
-          <a:ln/>
-        </p:spPr>
-        <p:txBody>
-          <a:bodyPr wrap="square" rtlCol="0" anchor="ctr"/>
-          <a:lstStyle/>
-          <a:p>
-            <a:pPr algn="ctr" indent="0" marL="0">
-              <a:buNone/>
-            </a:pPr>
-            <a:r>
-              <a:rPr lang="en-US" sz="900" dirty="0">
-                <a:solidFill>
-                  <a:srgbClr val="475569"/>
-                </a:solidFill>
-                <a:latin typeface="Calibri" pitchFamily="34" charset="0"/>
-                <a:ea typeface="Calibri" pitchFamily="34" charset="-122"/>
-                <a:cs typeface="Calibri" pitchFamily="34" charset="-120"/>
-              </a:rPr>
-              <a:t>{{client_logo}}</a:t>
-            </a:r>
-            <a:endParaRPr lang="en-US" sz="900" dirty="0"/>
-          </a:p>
-        </p:txBody>
-      </p:sp>
-      <p:sp>
-        <p:nvSpPr>
           <p:cNvPr id="10" name="Shape 8"/>
           <p:cNvSpPr/>
           <p:nvPr/>
@@ -2789,6 +2559,10 @@
           </a:solidFill>
           <a:ln/>
         </p:spPr>
+        <p:txBody>
+          <a:bodyPr/>
+          <a:p/>
+        </p:txBody>
       </p:sp>
     </p:spTree>
   </p:cSld>
